--- a/figs/DIYfigures_icpa2.pptx
+++ b/figs/DIYfigures_icpa2.pptx
@@ -5,7 +5,7 @@
     <p:sldMasterId id="2147483648" r:id="rId1"/>
   </p:sldMasterIdLst>
   <p:notesMasterIdLst>
-    <p:notesMasterId r:id="rId11"/>
+    <p:notesMasterId r:id="rId12"/>
   </p:notesMasterIdLst>
   <p:sldIdLst>
     <p:sldId id="258" r:id="rId2"/>
@@ -17,6 +17,7 @@
     <p:sldId id="264" r:id="rId8"/>
     <p:sldId id="265" r:id="rId9"/>
     <p:sldId id="266" r:id="rId10"/>
+    <p:sldId id="267" r:id="rId11"/>
   </p:sldIdLst>
   <p:sldSz cx="12192000" cy="6858000"/>
   <p:notesSz cx="6858000" cy="9144000"/>
@@ -205,7 +206,7 @@
           <a:p>
             <a:fld id="{578D67A2-3998-1741-A572-96ADB5DE7BBF}" type="datetimeFigureOut">
               <a:rPr kumimoji="1" lang="ja-JP" altLang="en-US" smtClean="0"/>
-              <a:t>2026/9/4</a:t>
+              <a:t>2026/9/16</a:t>
             </a:fld>
             <a:endParaRPr kumimoji="1" lang="ja-JP" altLang="en-US"/>
           </a:p>
@@ -819,7 +820,7 @@
           <a:p>
             <a:fld id="{F4B6AA23-F6BB-FA47-96B5-569FAB187581}" type="datetimeFigureOut">
               <a:rPr kumimoji="1" lang="ja-JP" altLang="en-US" smtClean="0"/>
-              <a:t>2026/9/4</a:t>
+              <a:t>2026/9/16</a:t>
             </a:fld>
             <a:endParaRPr kumimoji="1" lang="ja-JP" altLang="en-US"/>
           </a:p>
@@ -1049,7 +1050,7 @@
           <a:p>
             <a:fld id="{F4B6AA23-F6BB-FA47-96B5-569FAB187581}" type="datetimeFigureOut">
               <a:rPr kumimoji="1" lang="ja-JP" altLang="en-US" smtClean="0"/>
-              <a:t>2026/9/4</a:t>
+              <a:t>2026/9/16</a:t>
             </a:fld>
             <a:endParaRPr kumimoji="1" lang="ja-JP" altLang="en-US"/>
           </a:p>
@@ -1289,7 +1290,7 @@
           <a:p>
             <a:fld id="{F4B6AA23-F6BB-FA47-96B5-569FAB187581}" type="datetimeFigureOut">
               <a:rPr kumimoji="1" lang="ja-JP" altLang="en-US" smtClean="0"/>
-              <a:t>2026/9/4</a:t>
+              <a:t>2026/9/16</a:t>
             </a:fld>
             <a:endParaRPr kumimoji="1" lang="ja-JP" altLang="en-US"/>
           </a:p>
@@ -1519,7 +1520,7 @@
           <a:p>
             <a:fld id="{F4B6AA23-F6BB-FA47-96B5-569FAB187581}" type="datetimeFigureOut">
               <a:rPr kumimoji="1" lang="ja-JP" altLang="en-US" smtClean="0"/>
-              <a:t>2026/9/4</a:t>
+              <a:t>2026/9/16</a:t>
             </a:fld>
             <a:endParaRPr kumimoji="1" lang="ja-JP" altLang="en-US"/>
           </a:p>
@@ -1794,7 +1795,7 @@
           <a:p>
             <a:fld id="{F4B6AA23-F6BB-FA47-96B5-569FAB187581}" type="datetimeFigureOut">
               <a:rPr kumimoji="1" lang="ja-JP" altLang="en-US" smtClean="0"/>
-              <a:t>2026/9/4</a:t>
+              <a:t>2026/9/16</a:t>
             </a:fld>
             <a:endParaRPr kumimoji="1" lang="ja-JP" altLang="en-US"/>
           </a:p>
@@ -2123,7 +2124,7 @@
           <a:p>
             <a:fld id="{F4B6AA23-F6BB-FA47-96B5-569FAB187581}" type="datetimeFigureOut">
               <a:rPr kumimoji="1" lang="ja-JP" altLang="en-US" smtClean="0"/>
-              <a:t>2026/9/4</a:t>
+              <a:t>2026/9/16</a:t>
             </a:fld>
             <a:endParaRPr kumimoji="1" lang="ja-JP" altLang="en-US"/>
           </a:p>
@@ -2599,7 +2600,7 @@
           <a:p>
             <a:fld id="{F4B6AA23-F6BB-FA47-96B5-569FAB187581}" type="datetimeFigureOut">
               <a:rPr kumimoji="1" lang="ja-JP" altLang="en-US" smtClean="0"/>
-              <a:t>2026/9/4</a:t>
+              <a:t>2026/9/16</a:t>
             </a:fld>
             <a:endParaRPr kumimoji="1" lang="ja-JP" altLang="en-US"/>
           </a:p>
@@ -2740,7 +2741,7 @@
           <a:p>
             <a:fld id="{F4B6AA23-F6BB-FA47-96B5-569FAB187581}" type="datetimeFigureOut">
               <a:rPr kumimoji="1" lang="ja-JP" altLang="en-US" smtClean="0"/>
-              <a:t>2026/9/4</a:t>
+              <a:t>2026/9/16</a:t>
             </a:fld>
             <a:endParaRPr kumimoji="1" lang="ja-JP" altLang="en-US"/>
           </a:p>
@@ -2853,7 +2854,7 @@
           <a:p>
             <a:fld id="{F4B6AA23-F6BB-FA47-96B5-569FAB187581}" type="datetimeFigureOut">
               <a:rPr kumimoji="1" lang="ja-JP" altLang="en-US" smtClean="0"/>
-              <a:t>2026/9/4</a:t>
+              <a:t>2026/9/16</a:t>
             </a:fld>
             <a:endParaRPr kumimoji="1" lang="ja-JP" altLang="en-US"/>
           </a:p>
@@ -3196,7 +3197,7 @@
           <a:p>
             <a:fld id="{F4B6AA23-F6BB-FA47-96B5-569FAB187581}" type="datetimeFigureOut">
               <a:rPr kumimoji="1" lang="ja-JP" altLang="en-US" smtClean="0"/>
-              <a:t>2026/9/4</a:t>
+              <a:t>2026/9/16</a:t>
             </a:fld>
             <a:endParaRPr kumimoji="1" lang="ja-JP" altLang="en-US"/>
           </a:p>
@@ -3484,7 +3485,7 @@
           <a:p>
             <a:fld id="{F4B6AA23-F6BB-FA47-96B5-569FAB187581}" type="datetimeFigureOut">
               <a:rPr kumimoji="1" lang="ja-JP" altLang="en-US" smtClean="0"/>
-              <a:t>2026/9/4</a:t>
+              <a:t>2026/9/16</a:t>
             </a:fld>
             <a:endParaRPr kumimoji="1" lang="ja-JP" altLang="en-US"/>
           </a:p>
@@ -3757,7 +3758,7 @@
           <a:p>
             <a:fld id="{F4B6AA23-F6BB-FA47-96B5-569FAB187581}" type="datetimeFigureOut">
               <a:rPr kumimoji="1" lang="ja-JP" altLang="en-US" smtClean="0"/>
-              <a:t>2026/9/4</a:t>
+              <a:t>2026/9/16</a:t>
             </a:fld>
             <a:endParaRPr kumimoji="1" lang="ja-JP" altLang="en-US"/>
           </a:p>
@@ -6628,6 +6629,1169 @@
 </p:sld>
 </file>
 
+<file path=ppt/slides/slide10.xml><?xml version="1.0" encoding="utf-8"?>
+<p:sld xmlns:a="http://schemas.openxmlformats.org/drawingml/2006/main" xmlns:r="http://schemas.openxmlformats.org/officeDocument/2006/relationships" xmlns:p="http://schemas.openxmlformats.org/presentationml/2006/main">
+  <p:cSld>
+    <p:spTree>
+      <p:nvGrpSpPr>
+        <p:cNvPr id="1" name=""/>
+        <p:cNvGrpSpPr/>
+        <p:nvPr/>
+      </p:nvGrpSpPr>
+      <p:grpSpPr>
+        <a:xfrm>
+          <a:off x="0" y="0"/>
+          <a:ext cx="0" cy="0"/>
+          <a:chOff x="0" y="0"/>
+          <a:chExt cx="0" cy="0"/>
+        </a:xfrm>
+      </p:grpSpPr>
+      <p:grpSp>
+        <p:nvGrpSpPr>
+          <p:cNvPr id="30" name="グループ化 29">
+            <a:extLst>
+              <a:ext uri="{FF2B5EF4-FFF2-40B4-BE49-F238E27FC236}">
+                <a16:creationId xmlns:a16="http://schemas.microsoft.com/office/drawing/2014/main" id="{460AE991-C628-2D90-B89F-ED66E58613C5}"/>
+              </a:ext>
+            </a:extLst>
+          </p:cNvPr>
+          <p:cNvGrpSpPr/>
+          <p:nvPr/>
+        </p:nvGrpSpPr>
+        <p:grpSpPr>
+          <a:xfrm>
+            <a:off x="606840" y="593541"/>
+            <a:ext cx="10978320" cy="5670919"/>
+            <a:chOff x="606840" y="593541"/>
+            <a:chExt cx="10978320" cy="5670919"/>
+          </a:xfrm>
+        </p:grpSpPr>
+        <p:grpSp>
+          <p:nvGrpSpPr>
+            <p:cNvPr id="25" name="グループ化 24">
+              <a:extLst>
+                <a:ext uri="{FF2B5EF4-FFF2-40B4-BE49-F238E27FC236}">
+                  <a16:creationId xmlns:a16="http://schemas.microsoft.com/office/drawing/2014/main" id="{46260787-7B9D-3585-A8B3-4691CD527C99}"/>
+                </a:ext>
+              </a:extLst>
+            </p:cNvPr>
+            <p:cNvGrpSpPr/>
+            <p:nvPr/>
+          </p:nvGrpSpPr>
+          <p:grpSpPr>
+            <a:xfrm>
+              <a:off x="9051280" y="1003829"/>
+              <a:ext cx="2533880" cy="4850341"/>
+              <a:chOff x="7291332" y="2404775"/>
+              <a:chExt cx="2533880" cy="2048450"/>
+            </a:xfrm>
+          </p:grpSpPr>
+          <p:sp>
+            <p:nvSpPr>
+              <p:cNvPr id="22" name="角丸四角形 21">
+                <a:extLst>
+                  <a:ext uri="{FF2B5EF4-FFF2-40B4-BE49-F238E27FC236}">
+                    <a16:creationId xmlns:a16="http://schemas.microsoft.com/office/drawing/2014/main" id="{DC2EED71-CE35-A19F-E20F-31F8CDF3C7AF}"/>
+                  </a:ext>
+                </a:extLst>
+              </p:cNvPr>
+              <p:cNvSpPr/>
+              <p:nvPr/>
+            </p:nvSpPr>
+            <p:spPr>
+              <a:xfrm>
+                <a:off x="7379008" y="2404775"/>
+                <a:ext cx="2358528" cy="2048450"/>
+              </a:xfrm>
+              <a:prstGeom prst="roundRect">
+                <a:avLst/>
+              </a:prstGeom>
+              <a:solidFill>
+                <a:schemeClr val="bg1"/>
+              </a:solidFill>
+              <a:ln w="38100"/>
+            </p:spPr>
+            <p:style>
+              <a:lnRef idx="2">
+                <a:schemeClr val="accent1">
+                  <a:shade val="15000"/>
+                </a:schemeClr>
+              </a:lnRef>
+              <a:fillRef idx="1">
+                <a:schemeClr val="accent1"/>
+              </a:fillRef>
+              <a:effectRef idx="0">
+                <a:schemeClr val="accent1"/>
+              </a:effectRef>
+              <a:fontRef idx="minor">
+                <a:schemeClr val="lt1"/>
+              </a:fontRef>
+            </p:style>
+            <p:txBody>
+              <a:bodyPr rtlCol="0" anchor="ctr"/>
+              <a:lstStyle/>
+              <a:p>
+                <a:pPr algn="ctr"/>
+                <a:endParaRPr kumimoji="1" lang="ja-JP" altLang="en-US"/>
+              </a:p>
+            </p:txBody>
+          </p:sp>
+          <p:sp>
+            <p:nvSpPr>
+              <p:cNvPr id="21" name="テキスト ボックス 20">
+                <a:extLst>
+                  <a:ext uri="{FF2B5EF4-FFF2-40B4-BE49-F238E27FC236}">
+                    <a16:creationId xmlns:a16="http://schemas.microsoft.com/office/drawing/2014/main" id="{D92D106B-48BA-9B33-68A2-5348862D6141}"/>
+                  </a:ext>
+                </a:extLst>
+              </p:cNvPr>
+              <p:cNvSpPr txBox="1"/>
+              <p:nvPr/>
+            </p:nvSpPr>
+            <p:spPr>
+              <a:xfrm>
+                <a:off x="7291332" y="2543272"/>
+                <a:ext cx="2533880" cy="584775"/>
+              </a:xfrm>
+              <a:prstGeom prst="rect">
+                <a:avLst/>
+              </a:prstGeom>
+              <a:noFill/>
+            </p:spPr>
+            <p:txBody>
+              <a:bodyPr wrap="square" rtlCol="0">
+                <a:spAutoFit/>
+              </a:bodyPr>
+              <a:lstStyle/>
+              <a:p>
+                <a:pPr algn="ctr"/>
+                <a:r>
+                  <a:rPr kumimoji="1" lang="ja-JP" altLang="en-US" sz="3200" b="1">
+                    <a:latin typeface="Hiragino Sans W8" panose="020B0400000000000000" pitchFamily="34" charset="-128"/>
+                    <a:ea typeface="Hiragino Sans W8" panose="020B0400000000000000" pitchFamily="34" charset="-128"/>
+                  </a:rPr>
+                  <a:t>母集団</a:t>
+                </a:r>
+                <a:endParaRPr kumimoji="1" lang="ja-JP" altLang="en-US" b="1">
+                  <a:latin typeface="Hiragino Sans W8" panose="020B0400000000000000" pitchFamily="34" charset="-128"/>
+                  <a:ea typeface="Hiragino Sans W8" panose="020B0400000000000000" pitchFamily="34" charset="-128"/>
+                </a:endParaRPr>
+              </a:p>
+            </p:txBody>
+          </p:sp>
+          <mc:AlternateContent xmlns:mc="http://schemas.openxmlformats.org/markup-compatibility/2006">
+            <mc:Choice xmlns:a14="http://schemas.microsoft.com/office/drawing/2010/main" Requires="a14">
+              <p:sp>
+                <p:nvSpPr>
+                  <p:cNvPr id="23" name="テキスト ボックス 22">
+                    <a:extLst>
+                      <a:ext uri="{FF2B5EF4-FFF2-40B4-BE49-F238E27FC236}">
+                        <a16:creationId xmlns:a16="http://schemas.microsoft.com/office/drawing/2014/main" id="{CDBFAD5B-B76C-D156-3835-D06DBAA65279}"/>
+                      </a:ext>
+                    </a:extLst>
+                  </p:cNvPr>
+                  <p:cNvSpPr txBox="1"/>
+                  <p:nvPr/>
+                </p:nvSpPr>
+                <p:spPr>
+                  <a:xfrm>
+                    <a:off x="7466684" y="3266543"/>
+                    <a:ext cx="2183176" cy="954107"/>
+                  </a:xfrm>
+                  <a:prstGeom prst="rect">
+                    <a:avLst/>
+                  </a:prstGeom>
+                  <a:noFill/>
+                </p:spPr>
+                <p:txBody>
+                  <a:bodyPr wrap="square">
+                    <a:spAutoFit/>
+                  </a:bodyPr>
+                  <a:lstStyle/>
+                  <a:p>
+                    <a:pPr algn="ctr"/>
+                    <a:r>
+                      <a:rPr kumimoji="1" lang="ja-JP" altLang="en-US" sz="2800" b="1">
+                        <a:latin typeface="Cambria Math" panose="02040503050406030204" pitchFamily="18" charset="0"/>
+                        <a:ea typeface="Hiragino Sans W4" panose="020B0400000000000000" pitchFamily="34" charset="-128"/>
+                      </a:rPr>
+                      <a:t>真の値：</a:t>
+                    </a:r>
+                    <a:endParaRPr kumimoji="1" lang="en-US" altLang="ja-JP" sz="2800" b="1" dirty="0">
+                      <a:latin typeface="Cambria Math" panose="02040503050406030204" pitchFamily="18" charset="0"/>
+                      <a:ea typeface="Hiragino Sans W4" panose="020B0400000000000000" pitchFamily="34" charset="-128"/>
+                    </a:endParaRPr>
+                  </a:p>
+                  <a:p>
+                    <a:pPr algn="ctr"/>
+                    <a14:m>
+                      <m:oMathPara xmlns:m="http://schemas.openxmlformats.org/officeDocument/2006/math">
+                        <m:oMath>
+                          <m:sSub>
+                            <m:sSubPr>
+                              <m:ctrlPr>
+                                <a:rPr lang="en-US" altLang="ja-JP" sz="2800" b="1" i="1" smtClean="0">
+                                  <a:latin typeface="Cambria Math" panose="02040503050406030204" pitchFamily="18" charset="0"/>
+                                  <a:ea typeface="Hiragino Sans W4" panose="020B0400000000000000" pitchFamily="34" charset="-128"/>
+                                </a:rPr>
+                              </m:ctrlPr>
+                            </m:sSubPr>
+                            <m:e>
+                              <m:r>
+                                <a:rPr lang="en-US" altLang="ja-JP" sz="2800" b="1" i="1" smtClean="0">
+                                  <a:latin typeface="Cambria Math" panose="02040503050406030204" pitchFamily="18" charset="0"/>
+                                  <a:ea typeface="Hiragino Sans W4" panose="020B0400000000000000" pitchFamily="34" charset="-128"/>
+                                </a:rPr>
+                                <m:t>𝜷</m:t>
+                              </m:r>
+                            </m:e>
+                            <m:sub>
+                              <m:r>
+                                <a:rPr lang="en-US" altLang="ja-JP" sz="2800" b="1" i="1" smtClean="0">
+                                  <a:latin typeface="Cambria Math" panose="02040503050406030204" pitchFamily="18" charset="0"/>
+                                  <a:ea typeface="Hiragino Sans W4" panose="020B0400000000000000" pitchFamily="34" charset="-128"/>
+                                </a:rPr>
+                                <m:t>𝟏</m:t>
+                              </m:r>
+                            </m:sub>
+                          </m:sSub>
+                          <m:r>
+                            <a:rPr lang="en-US" altLang="ja-JP" sz="2800" b="1" i="1" smtClean="0">
+                              <a:latin typeface="Cambria Math" panose="02040503050406030204" pitchFamily="18" charset="0"/>
+                              <a:ea typeface="Hiragino Sans W4" panose="020B0400000000000000" pitchFamily="34" charset="-128"/>
+                            </a:rPr>
+                            <m:t>=</m:t>
+                          </m:r>
+                          <m:r>
+                            <a:rPr lang="en-US" altLang="ja-JP" sz="2800" b="1" i="1" smtClean="0">
+                              <a:latin typeface="Cambria Math" panose="02040503050406030204" pitchFamily="18" charset="0"/>
+                              <a:ea typeface="Hiragino Sans W4" panose="020B0400000000000000" pitchFamily="34" charset="-128"/>
+                            </a:rPr>
+                            <m:t>?</m:t>
+                          </m:r>
+                        </m:oMath>
+                      </m:oMathPara>
+                    </a14:m>
+                    <a:endParaRPr kumimoji="1" lang="en-US" altLang="ja-JP" sz="2800" b="1" dirty="0">
+                      <a:latin typeface="Cambria Math" panose="02040503050406030204" pitchFamily="18" charset="0"/>
+                      <a:ea typeface="Hiragino Sans W4" panose="020B0400000000000000" pitchFamily="34" charset="-128"/>
+                    </a:endParaRPr>
+                  </a:p>
+                </p:txBody>
+              </p:sp>
+            </mc:Choice>
+            <mc:Fallback>
+              <p:sp>
+                <p:nvSpPr>
+                  <p:cNvPr id="23" name="テキスト ボックス 22">
+                    <a:extLst>
+                      <a:ext uri="{FF2B5EF4-FFF2-40B4-BE49-F238E27FC236}">
+                        <a16:creationId xmlns:a16="http://schemas.microsoft.com/office/drawing/2014/main" id="{CDBFAD5B-B76C-D156-3835-D06DBAA65279}"/>
+                      </a:ext>
+                    </a:extLst>
+                  </p:cNvPr>
+                  <p:cNvSpPr txBox="1">
+                    <a:spLocks noRot="1" noChangeAspect="1" noMove="1" noResize="1" noEditPoints="1" noAdjustHandles="1" noChangeArrowheads="1" noChangeShapeType="1" noTextEdit="1"/>
+                  </p:cNvSpPr>
+                  <p:nvPr/>
+                </p:nvSpPr>
+                <p:spPr>
+                  <a:xfrm>
+                    <a:off x="7466684" y="3266543"/>
+                    <a:ext cx="2183176" cy="954107"/>
+                  </a:xfrm>
+                  <a:prstGeom prst="rect">
+                    <a:avLst/>
+                  </a:prstGeom>
+                  <a:blipFill>
+                    <a:blip r:embed="rId2"/>
+                    <a:stretch>
+                      <a:fillRect t="-3352"/>
+                    </a:stretch>
+                  </a:blipFill>
+                </p:spPr>
+                <p:txBody>
+                  <a:bodyPr/>
+                  <a:lstStyle/>
+                  <a:p>
+                    <a:r>
+                      <a:rPr lang="ja-JP" altLang="en-US">
+                        <a:noFill/>
+                      </a:rPr>
+                      <a:t> </a:t>
+                    </a:r>
+                  </a:p>
+                </p:txBody>
+              </p:sp>
+            </mc:Fallback>
+          </mc:AlternateContent>
+        </p:grpSp>
+        <mc:AlternateContent xmlns:mc="http://schemas.openxmlformats.org/markup-compatibility/2006">
+          <mc:Choice xmlns:a14="http://schemas.microsoft.com/office/drawing/2010/main" Requires="a14">
+            <p:sp>
+              <p:nvSpPr>
+                <p:cNvPr id="24" name="角丸四角形 23">
+                  <a:extLst>
+                    <a:ext uri="{FF2B5EF4-FFF2-40B4-BE49-F238E27FC236}">
+                      <a16:creationId xmlns:a16="http://schemas.microsoft.com/office/drawing/2014/main" id="{54C3F10B-8919-44F1-FFE4-FFF6D189FAED}"/>
+                    </a:ext>
+                  </a:extLst>
+                </p:cNvPr>
+                <p:cNvSpPr/>
+                <p:nvPr/>
+              </p:nvSpPr>
+              <p:spPr>
+                <a:xfrm>
+                  <a:off x="606840" y="593541"/>
+                  <a:ext cx="4736342" cy="2048450"/>
+                </a:xfrm>
+                <a:prstGeom prst="roundRect">
+                  <a:avLst/>
+                </a:prstGeom>
+                <a:solidFill>
+                  <a:schemeClr val="bg1"/>
+                </a:solidFill>
+                <a:ln w="38100"/>
+              </p:spPr>
+              <p:style>
+                <a:lnRef idx="2">
+                  <a:schemeClr val="accent1">
+                    <a:shade val="15000"/>
+                  </a:schemeClr>
+                </a:lnRef>
+                <a:fillRef idx="1">
+                  <a:schemeClr val="accent1"/>
+                </a:fillRef>
+                <a:effectRef idx="0">
+                  <a:schemeClr val="accent1"/>
+                </a:effectRef>
+                <a:fontRef idx="minor">
+                  <a:schemeClr val="lt1"/>
+                </a:fontRef>
+              </p:style>
+              <p:txBody>
+                <a:bodyPr rtlCol="0" anchor="ctr"/>
+                <a:lstStyle/>
+                <a:p>
+                  <a:r>
+                    <a:rPr kumimoji="1" lang="ja-JP" altLang="en-US" sz="2400" b="1">
+                      <a:solidFill>
+                        <a:schemeClr val="tx1"/>
+                      </a:solidFill>
+                      <a:latin typeface="Hiragino Sans W4" panose="020B0400000000000000" pitchFamily="34" charset="-128"/>
+                      <a:ea typeface="Hiragino Sans W4" panose="020B0400000000000000" pitchFamily="34" charset="-128"/>
+                    </a:rPr>
+                    <a:t>標本</a:t>
+                  </a:r>
+                  <a:r>
+                    <a:rPr kumimoji="1" lang="en-US" altLang="ja-JP" sz="2400" b="1" dirty="0">
+                      <a:solidFill>
+                        <a:schemeClr val="tx1"/>
+                      </a:solidFill>
+                      <a:latin typeface="Hiragino Sans W4" panose="020B0400000000000000" pitchFamily="34" charset="-128"/>
+                      <a:ea typeface="Hiragino Sans W4" panose="020B0400000000000000" pitchFamily="34" charset="-128"/>
+                    </a:rPr>
+                    <a:t>1</a:t>
+                  </a:r>
+                  <a:r>
+                    <a:rPr kumimoji="1" lang="ja-JP" altLang="en-US" sz="2400">
+                      <a:solidFill>
+                        <a:schemeClr val="tx1"/>
+                      </a:solidFill>
+                      <a:latin typeface="Hiragino Sans W4" panose="020B0400000000000000" pitchFamily="34" charset="-128"/>
+                      <a:ea typeface="Hiragino Sans W4" panose="020B0400000000000000" pitchFamily="34" charset="-128"/>
+                    </a:rPr>
+                    <a:t>（</a:t>
+                  </a:r>
+                  <a:r>
+                    <a:rPr kumimoji="1" lang="en-US" altLang="ja-JP" sz="2400" dirty="0">
+                      <a:solidFill>
+                        <a:schemeClr val="tx1"/>
+                      </a:solidFill>
+                      <a:latin typeface="Hiragino Sans W4" panose="020B0400000000000000" pitchFamily="34" charset="-128"/>
+                      <a:ea typeface="Hiragino Sans W4" panose="020B0400000000000000" pitchFamily="34" charset="-128"/>
+                    </a:rPr>
+                    <a:t>n=10</a:t>
+                  </a:r>
+                  <a:r>
+                    <a:rPr kumimoji="1" lang="ja-JP" altLang="en-US" sz="2400">
+                      <a:solidFill>
+                        <a:schemeClr val="tx1"/>
+                      </a:solidFill>
+                      <a:latin typeface="Hiragino Sans W4" panose="020B0400000000000000" pitchFamily="34" charset="-128"/>
+                      <a:ea typeface="Hiragino Sans W4" panose="020B0400000000000000" pitchFamily="34" charset="-128"/>
+                    </a:rPr>
+                    <a:t>）</a:t>
+                  </a:r>
+                  <a:endParaRPr kumimoji="1" lang="en-US" altLang="ja-JP" sz="2400" dirty="0">
+                    <a:solidFill>
+                      <a:schemeClr val="tx1"/>
+                    </a:solidFill>
+                    <a:latin typeface="Hiragino Sans W4" panose="020B0400000000000000" pitchFamily="34" charset="-128"/>
+                    <a:ea typeface="Hiragino Sans W4" panose="020B0400000000000000" pitchFamily="34" charset="-128"/>
+                  </a:endParaRPr>
+                </a:p>
+                <a:p>
+                  <a:pPr/>
+                  <a14:m>
+                    <m:oMathPara xmlns:m="http://schemas.openxmlformats.org/officeDocument/2006/math">
+                      <m:oMath>
+                        <m:sSub>
+                          <m:sSubPr>
+                            <m:ctrlPr>
+                              <a:rPr kumimoji="1" lang="en-US" altLang="ja-JP" sz="3200" b="1" i="1" smtClean="0">
+                                <a:solidFill>
+                                  <a:schemeClr val="tx1"/>
+                                </a:solidFill>
+                                <a:latin typeface="Cambria Math" panose="02040503050406030204" pitchFamily="18" charset="0"/>
+                                <a:ea typeface="Hiragino Sans W4" panose="020B0400000000000000" pitchFamily="34" charset="-128"/>
+                              </a:rPr>
+                            </m:ctrlPr>
+                          </m:sSubPr>
+                          <m:e>
+                            <m:acc>
+                              <m:accPr>
+                                <m:chr m:val="̂"/>
+                                <m:ctrlPr>
+                                  <a:rPr kumimoji="1" lang="en-US" altLang="ja-JP" sz="3200" b="1" i="1" smtClean="0">
+                                    <a:solidFill>
+                                      <a:schemeClr val="tx1"/>
+                                    </a:solidFill>
+                                    <a:latin typeface="Cambria Math" panose="02040503050406030204" pitchFamily="18" charset="0"/>
+                                    <a:ea typeface="Hiragino Sans W4" panose="020B0400000000000000" pitchFamily="34" charset="-128"/>
+                                  </a:rPr>
+                                </m:ctrlPr>
+                              </m:accPr>
+                              <m:e>
+                                <m:r>
+                                  <a:rPr kumimoji="1" lang="en-US" altLang="ja-JP" sz="3200" b="1" i="1" smtClean="0">
+                                    <a:solidFill>
+                                      <a:schemeClr val="tx1"/>
+                                    </a:solidFill>
+                                    <a:latin typeface="Cambria Math" panose="02040503050406030204" pitchFamily="18" charset="0"/>
+                                    <a:ea typeface="Hiragino Sans W4" panose="020B0400000000000000" pitchFamily="34" charset="-128"/>
+                                  </a:rPr>
+                                  <m:t>𝜷</m:t>
+                                </m:r>
+                              </m:e>
+                            </m:acc>
+                          </m:e>
+                          <m:sub>
+                            <m:r>
+                              <a:rPr kumimoji="1" lang="en-US" altLang="ja-JP" sz="3200" b="1" i="1" smtClean="0">
+                                <a:solidFill>
+                                  <a:schemeClr val="tx1"/>
+                                </a:solidFill>
+                                <a:latin typeface="Cambria Math" panose="02040503050406030204" pitchFamily="18" charset="0"/>
+                                <a:ea typeface="Hiragino Sans W4" panose="020B0400000000000000" pitchFamily="34" charset="-128"/>
+                              </a:rPr>
+                              <m:t>𝟏</m:t>
+                            </m:r>
+                          </m:sub>
+                        </m:sSub>
+                        <m:r>
+                          <a:rPr kumimoji="1" lang="en-US" altLang="ja-JP" sz="3200" b="1" i="1" smtClean="0">
+                            <a:solidFill>
+                              <a:schemeClr val="tx1"/>
+                            </a:solidFill>
+                            <a:latin typeface="Cambria Math" panose="02040503050406030204" pitchFamily="18" charset="0"/>
+                            <a:ea typeface="Hiragino Sans W4" panose="020B0400000000000000" pitchFamily="34" charset="-128"/>
+                          </a:rPr>
+                          <m:t>=20.6</m:t>
+                        </m:r>
+                      </m:oMath>
+                    </m:oMathPara>
+                  </a14:m>
+                  <a:endParaRPr kumimoji="1" lang="en-US" altLang="ja-JP" sz="3200" dirty="0">
+                    <a:solidFill>
+                      <a:schemeClr val="tx1"/>
+                    </a:solidFill>
+                    <a:latin typeface="Hiragino Sans W4" panose="020B0400000000000000" pitchFamily="34" charset="-128"/>
+                    <a:ea typeface="Hiragino Sans W4" panose="020B0400000000000000" pitchFamily="34" charset="-128"/>
+                  </a:endParaRPr>
+                </a:p>
+                <a:p>
+                  <a:pPr/>
+                  <a:r>
+                    <a:rPr lang="ja-JP" altLang="en-US" sz="2400">
+                      <a:solidFill>
+                        <a:schemeClr val="tx1"/>
+                      </a:solidFill>
+                      <a:latin typeface="Hiragino Sans W4" panose="020B0400000000000000" pitchFamily="34" charset="-128"/>
+                      <a:ea typeface="Hiragino Sans W4" panose="020B0400000000000000" pitchFamily="34" charset="-128"/>
+                    </a:rPr>
+                    <a:t>この</a:t>
+                  </a:r>
+                  <a14:m>
+                    <m:oMath xmlns:m="http://schemas.openxmlformats.org/officeDocument/2006/math">
+                      <m:sSub>
+                        <m:sSubPr>
+                          <m:ctrlPr>
+                            <a:rPr lang="en-US" altLang="ja-JP" sz="2400" b="1" i="1">
+                              <a:solidFill>
+                                <a:schemeClr val="tx1"/>
+                              </a:solidFill>
+                              <a:latin typeface="Cambria Math" panose="02040503050406030204" pitchFamily="18" charset="0"/>
+                              <a:ea typeface="Hiragino Sans W4" panose="020B0400000000000000" pitchFamily="34" charset="-128"/>
+                            </a:rPr>
+                          </m:ctrlPr>
+                        </m:sSubPr>
+                        <m:e>
+                          <m:acc>
+                            <m:accPr>
+                              <m:chr m:val="̂"/>
+                              <m:ctrlPr>
+                                <a:rPr lang="en-US" altLang="ja-JP" sz="2400" b="1" i="1">
+                                  <a:solidFill>
+                                    <a:schemeClr val="tx1"/>
+                                  </a:solidFill>
+                                  <a:latin typeface="Cambria Math" panose="02040503050406030204" pitchFamily="18" charset="0"/>
+                                  <a:ea typeface="Hiragino Sans W4" panose="020B0400000000000000" pitchFamily="34" charset="-128"/>
+                                </a:rPr>
+                              </m:ctrlPr>
+                            </m:accPr>
+                            <m:e>
+                              <m:r>
+                                <a:rPr lang="en-US" altLang="ja-JP" sz="2400" b="1" i="1">
+                                  <a:solidFill>
+                                    <a:schemeClr val="tx1"/>
+                                  </a:solidFill>
+                                  <a:latin typeface="Cambria Math" panose="02040503050406030204" pitchFamily="18" charset="0"/>
+                                  <a:ea typeface="Hiragino Sans W4" panose="020B0400000000000000" pitchFamily="34" charset="-128"/>
+                                </a:rPr>
+                                <m:t>𝜷</m:t>
+                              </m:r>
+                            </m:e>
+                          </m:acc>
+                        </m:e>
+                        <m:sub>
+                          <m:r>
+                            <a:rPr lang="en-US" altLang="ja-JP" sz="2400" b="1" i="1">
+                              <a:solidFill>
+                                <a:schemeClr val="tx1"/>
+                              </a:solidFill>
+                              <a:latin typeface="Cambria Math" panose="02040503050406030204" pitchFamily="18" charset="0"/>
+                              <a:ea typeface="Hiragino Sans W4" panose="020B0400000000000000" pitchFamily="34" charset="-128"/>
+                            </a:rPr>
+                            <m:t>𝟏</m:t>
+                          </m:r>
+                        </m:sub>
+                      </m:sSub>
+                    </m:oMath>
+                  </a14:m>
+                  <a:r>
+                    <a:rPr kumimoji="1" lang="ja-JP" altLang="en-US" sz="2400">
+                      <a:solidFill>
+                        <a:schemeClr val="tx1"/>
+                      </a:solidFill>
+                      <a:latin typeface="Hiragino Sans W4" panose="020B0400000000000000" pitchFamily="34" charset="-128"/>
+                      <a:ea typeface="Hiragino Sans W4" panose="020B0400000000000000" pitchFamily="34" charset="-128"/>
+                    </a:rPr>
+                    <a:t>は真の値</a:t>
+                  </a:r>
+                  <a14:m>
+                    <m:oMath xmlns:m="http://schemas.openxmlformats.org/officeDocument/2006/math">
+                      <m:sSub>
+                        <m:sSubPr>
+                          <m:ctrlPr>
+                            <a:rPr lang="en-US" altLang="ja-JP" sz="2400" b="1" i="1">
+                              <a:solidFill>
+                                <a:schemeClr val="tx1"/>
+                              </a:solidFill>
+                              <a:latin typeface="Cambria Math" panose="02040503050406030204" pitchFamily="18" charset="0"/>
+                              <a:ea typeface="Hiragino Sans W4" panose="020B0400000000000000" pitchFamily="34" charset="-128"/>
+                            </a:rPr>
+                          </m:ctrlPr>
+                        </m:sSubPr>
+                        <m:e>
+                          <m:r>
+                            <a:rPr lang="en-US" altLang="ja-JP" sz="2400" b="1" i="1">
+                              <a:solidFill>
+                                <a:schemeClr val="tx1"/>
+                              </a:solidFill>
+                              <a:latin typeface="Cambria Math" panose="02040503050406030204" pitchFamily="18" charset="0"/>
+                              <a:ea typeface="Hiragino Sans W4" panose="020B0400000000000000" pitchFamily="34" charset="-128"/>
+                            </a:rPr>
+                            <m:t>𝜷</m:t>
+                          </m:r>
+                        </m:e>
+                        <m:sub>
+                          <m:r>
+                            <a:rPr lang="en-US" altLang="ja-JP" sz="2400" b="1" i="1">
+                              <a:solidFill>
+                                <a:schemeClr val="tx1"/>
+                              </a:solidFill>
+                              <a:latin typeface="Cambria Math" panose="02040503050406030204" pitchFamily="18" charset="0"/>
+                              <a:ea typeface="Hiragino Sans W4" panose="020B0400000000000000" pitchFamily="34" charset="-128"/>
+                            </a:rPr>
+                            <m:t>𝟏</m:t>
+                          </m:r>
+                        </m:sub>
+                      </m:sSub>
+                    </m:oMath>
+                  </a14:m>
+                  <a:r>
+                    <a:rPr kumimoji="1" lang="ja-JP" altLang="en-US" sz="2400">
+                      <a:solidFill>
+                        <a:schemeClr val="tx1"/>
+                      </a:solidFill>
+                      <a:latin typeface="Hiragino Sans W4" panose="020B0400000000000000" pitchFamily="34" charset="-128"/>
+                      <a:ea typeface="Hiragino Sans W4" panose="020B0400000000000000" pitchFamily="34" charset="-128"/>
+                    </a:rPr>
+                    <a:t>からかけ離れているかもしれない</a:t>
+                  </a:r>
+                  <a:r>
+                    <a:rPr kumimoji="1" lang="en-US" altLang="ja-JP" sz="2400" dirty="0">
+                      <a:solidFill>
+                        <a:schemeClr val="tx1"/>
+                      </a:solidFill>
+                      <a:latin typeface="Hiragino Sans W4" panose="020B0400000000000000" pitchFamily="34" charset="-128"/>
+                      <a:ea typeface="Hiragino Sans W4" panose="020B0400000000000000" pitchFamily="34" charset="-128"/>
+                    </a:rPr>
+                    <a:t>…</a:t>
+                  </a:r>
+                  <a:r>
+                    <a:rPr kumimoji="1" lang="ja-JP" altLang="en-US" sz="2400">
+                      <a:solidFill>
+                        <a:schemeClr val="tx1"/>
+                      </a:solidFill>
+                      <a:latin typeface="Hiragino Sans W4" panose="020B0400000000000000" pitchFamily="34" charset="-128"/>
+                      <a:ea typeface="Hiragino Sans W4" panose="020B0400000000000000" pitchFamily="34" charset="-128"/>
+                    </a:rPr>
+                    <a:t>🤔</a:t>
+                  </a:r>
+                </a:p>
+              </p:txBody>
+            </p:sp>
+          </mc:Choice>
+          <mc:Fallback>
+            <p:sp>
+              <p:nvSpPr>
+                <p:cNvPr id="24" name="角丸四角形 23">
+                  <a:extLst>
+                    <a:ext uri="{FF2B5EF4-FFF2-40B4-BE49-F238E27FC236}">
+                      <a16:creationId xmlns:a16="http://schemas.microsoft.com/office/drawing/2014/main" id="{54C3F10B-8919-44F1-FFE4-FFF6D189FAED}"/>
+                    </a:ext>
+                  </a:extLst>
+                </p:cNvPr>
+                <p:cNvSpPr>
+                  <a:spLocks noRot="1" noChangeAspect="1" noMove="1" noResize="1" noEditPoints="1" noAdjustHandles="1" noChangeArrowheads="1" noChangeShapeType="1" noTextEdit="1"/>
+                </p:cNvSpPr>
+                <p:nvPr/>
+              </p:nvSpPr>
+              <p:spPr>
+                <a:xfrm>
+                  <a:off x="606840" y="593541"/>
+                  <a:ext cx="4736342" cy="2048450"/>
+                </a:xfrm>
+                <a:prstGeom prst="roundRect">
+                  <a:avLst/>
+                </a:prstGeom>
+                <a:blipFill>
+                  <a:blip r:embed="rId3"/>
+                  <a:stretch>
+                    <a:fillRect/>
+                  </a:stretch>
+                </a:blipFill>
+                <a:ln w="38100"/>
+              </p:spPr>
+              <p:txBody>
+                <a:bodyPr/>
+                <a:lstStyle/>
+                <a:p>
+                  <a:r>
+                    <a:rPr lang="ja-JP" altLang="en-US">
+                      <a:noFill/>
+                    </a:rPr>
+                    <a:t> </a:t>
+                  </a:r>
+                </a:p>
+              </p:txBody>
+            </p:sp>
+          </mc:Fallback>
+        </mc:AlternateContent>
+        <mc:AlternateContent xmlns:mc="http://schemas.openxmlformats.org/markup-compatibility/2006">
+          <mc:Choice xmlns:a14="http://schemas.microsoft.com/office/drawing/2010/main" Requires="a14">
+            <p:sp>
+              <p:nvSpPr>
+                <p:cNvPr id="26" name="角丸四角形 25">
+                  <a:extLst>
+                    <a:ext uri="{FF2B5EF4-FFF2-40B4-BE49-F238E27FC236}">
+                      <a16:creationId xmlns:a16="http://schemas.microsoft.com/office/drawing/2014/main" id="{3EE22B7E-3C32-EC99-AA2A-53AE13AFBDEF}"/>
+                    </a:ext>
+                  </a:extLst>
+                </p:cNvPr>
+                <p:cNvSpPr/>
+                <p:nvPr/>
+              </p:nvSpPr>
+              <p:spPr>
+                <a:xfrm>
+                  <a:off x="606840" y="4216010"/>
+                  <a:ext cx="4736342" cy="2048450"/>
+                </a:xfrm>
+                <a:prstGeom prst="roundRect">
+                  <a:avLst/>
+                </a:prstGeom>
+                <a:solidFill>
+                  <a:schemeClr val="bg1"/>
+                </a:solidFill>
+                <a:ln w="38100"/>
+              </p:spPr>
+              <p:style>
+                <a:lnRef idx="2">
+                  <a:schemeClr val="accent1">
+                    <a:shade val="15000"/>
+                  </a:schemeClr>
+                </a:lnRef>
+                <a:fillRef idx="1">
+                  <a:schemeClr val="accent1"/>
+                </a:fillRef>
+                <a:effectRef idx="0">
+                  <a:schemeClr val="accent1"/>
+                </a:effectRef>
+                <a:fontRef idx="minor">
+                  <a:schemeClr val="lt1"/>
+                </a:fontRef>
+              </p:style>
+              <p:txBody>
+                <a:bodyPr rtlCol="0" anchor="ctr"/>
+                <a:lstStyle/>
+                <a:p>
+                  <a:r>
+                    <a:rPr kumimoji="1" lang="ja-JP" altLang="en-US" sz="2400" b="1">
+                      <a:solidFill>
+                        <a:schemeClr val="tx1"/>
+                      </a:solidFill>
+                      <a:latin typeface="Hiragino Sans W4" panose="020B0400000000000000" pitchFamily="34" charset="-128"/>
+                      <a:ea typeface="Hiragino Sans W4" panose="020B0400000000000000" pitchFamily="34" charset="-128"/>
+                    </a:rPr>
+                    <a:t>標本</a:t>
+                  </a:r>
+                  <a:r>
+                    <a:rPr lang="en-US" altLang="ja-JP" sz="2400" b="1" dirty="0">
+                      <a:solidFill>
+                        <a:schemeClr val="tx1"/>
+                      </a:solidFill>
+                      <a:latin typeface="Hiragino Sans W4" panose="020B0400000000000000" pitchFamily="34" charset="-128"/>
+                      <a:ea typeface="Hiragino Sans W4" panose="020B0400000000000000" pitchFamily="34" charset="-128"/>
+                    </a:rPr>
+                    <a:t>2</a:t>
+                  </a:r>
+                  <a:r>
+                    <a:rPr kumimoji="1" lang="ja-JP" altLang="en-US" sz="2400">
+                      <a:solidFill>
+                        <a:schemeClr val="tx1"/>
+                      </a:solidFill>
+                      <a:latin typeface="Hiragino Sans W4" panose="020B0400000000000000" pitchFamily="34" charset="-128"/>
+                      <a:ea typeface="Hiragino Sans W4" panose="020B0400000000000000" pitchFamily="34" charset="-128"/>
+                    </a:rPr>
+                    <a:t>（</a:t>
+                  </a:r>
+                  <a:r>
+                    <a:rPr kumimoji="1" lang="en-US" altLang="ja-JP" sz="2400" dirty="0">
+                      <a:solidFill>
+                        <a:schemeClr val="tx1"/>
+                      </a:solidFill>
+                      <a:latin typeface="Hiragino Sans W4" panose="020B0400000000000000" pitchFamily="34" charset="-128"/>
+                      <a:ea typeface="Hiragino Sans W4" panose="020B0400000000000000" pitchFamily="34" charset="-128"/>
+                    </a:rPr>
+                    <a:t>n=10,000</a:t>
+                  </a:r>
+                  <a:r>
+                    <a:rPr kumimoji="1" lang="ja-JP" altLang="en-US" sz="2400">
+                      <a:solidFill>
+                        <a:schemeClr val="tx1"/>
+                      </a:solidFill>
+                      <a:latin typeface="Hiragino Sans W4" panose="020B0400000000000000" pitchFamily="34" charset="-128"/>
+                      <a:ea typeface="Hiragino Sans W4" panose="020B0400000000000000" pitchFamily="34" charset="-128"/>
+                    </a:rPr>
+                    <a:t>）</a:t>
+                  </a:r>
+                  <a:endParaRPr kumimoji="1" lang="en-US" altLang="ja-JP" sz="2400" dirty="0">
+                    <a:solidFill>
+                      <a:schemeClr val="tx1"/>
+                    </a:solidFill>
+                    <a:latin typeface="Hiragino Sans W4" panose="020B0400000000000000" pitchFamily="34" charset="-128"/>
+                    <a:ea typeface="Hiragino Sans W4" panose="020B0400000000000000" pitchFamily="34" charset="-128"/>
+                  </a:endParaRPr>
+                </a:p>
+                <a:p>
+                  <a:pPr/>
+                  <a14:m>
+                    <m:oMathPara xmlns:m="http://schemas.openxmlformats.org/officeDocument/2006/math">
+                      <m:oMath>
+                        <m:sSub>
+                          <m:sSubPr>
+                            <m:ctrlPr>
+                              <a:rPr kumimoji="1" lang="en-US" altLang="ja-JP" sz="3200" b="1" i="1" smtClean="0">
+                                <a:solidFill>
+                                  <a:schemeClr val="tx1"/>
+                                </a:solidFill>
+                                <a:latin typeface="Cambria Math" panose="02040503050406030204" pitchFamily="18" charset="0"/>
+                                <a:ea typeface="Hiragino Sans W4" panose="020B0400000000000000" pitchFamily="34" charset="-128"/>
+                              </a:rPr>
+                            </m:ctrlPr>
+                          </m:sSubPr>
+                          <m:e>
+                            <m:acc>
+                              <m:accPr>
+                                <m:chr m:val="̂"/>
+                                <m:ctrlPr>
+                                  <a:rPr kumimoji="1" lang="en-US" altLang="ja-JP" sz="3200" b="1" i="1" smtClean="0">
+                                    <a:solidFill>
+                                      <a:schemeClr val="tx1"/>
+                                    </a:solidFill>
+                                    <a:latin typeface="Cambria Math" panose="02040503050406030204" pitchFamily="18" charset="0"/>
+                                    <a:ea typeface="Hiragino Sans W4" panose="020B0400000000000000" pitchFamily="34" charset="-128"/>
+                                  </a:rPr>
+                                </m:ctrlPr>
+                              </m:accPr>
+                              <m:e>
+                                <m:r>
+                                  <a:rPr kumimoji="1" lang="en-US" altLang="ja-JP" sz="3200" b="1" i="1" smtClean="0">
+                                    <a:solidFill>
+                                      <a:schemeClr val="tx1"/>
+                                    </a:solidFill>
+                                    <a:latin typeface="Cambria Math" panose="02040503050406030204" pitchFamily="18" charset="0"/>
+                                    <a:ea typeface="Hiragino Sans W4" panose="020B0400000000000000" pitchFamily="34" charset="-128"/>
+                                  </a:rPr>
+                                  <m:t>𝜷</m:t>
+                                </m:r>
+                              </m:e>
+                            </m:acc>
+                          </m:e>
+                          <m:sub>
+                            <m:r>
+                              <a:rPr kumimoji="1" lang="en-US" altLang="ja-JP" sz="3200" b="1" i="1" smtClean="0">
+                                <a:solidFill>
+                                  <a:schemeClr val="tx1"/>
+                                </a:solidFill>
+                                <a:latin typeface="Cambria Math" panose="02040503050406030204" pitchFamily="18" charset="0"/>
+                                <a:ea typeface="Hiragino Sans W4" panose="020B0400000000000000" pitchFamily="34" charset="-128"/>
+                              </a:rPr>
+                              <m:t>𝟏</m:t>
+                            </m:r>
+                          </m:sub>
+                        </m:sSub>
+                        <m:r>
+                          <a:rPr kumimoji="1" lang="en-US" altLang="ja-JP" sz="3200" b="1" i="1" smtClean="0">
+                            <a:solidFill>
+                              <a:schemeClr val="tx1"/>
+                            </a:solidFill>
+                            <a:latin typeface="Cambria Math" panose="02040503050406030204" pitchFamily="18" charset="0"/>
+                            <a:ea typeface="Hiragino Sans W4" panose="020B0400000000000000" pitchFamily="34" charset="-128"/>
+                          </a:rPr>
+                          <m:t>=20.6</m:t>
+                        </m:r>
+                      </m:oMath>
+                    </m:oMathPara>
+                  </a14:m>
+                  <a:endParaRPr kumimoji="1" lang="en-US" altLang="ja-JP" sz="3200" dirty="0">
+                    <a:solidFill>
+                      <a:schemeClr val="tx1"/>
+                    </a:solidFill>
+                    <a:latin typeface="Hiragino Sans W4" panose="020B0400000000000000" pitchFamily="34" charset="-128"/>
+                    <a:ea typeface="Hiragino Sans W4" panose="020B0400000000000000" pitchFamily="34" charset="-128"/>
+                  </a:endParaRPr>
+                </a:p>
+                <a:p>
+                  <a:pPr/>
+                  <a:r>
+                    <a:rPr lang="ja-JP" altLang="en-US" sz="2400">
+                      <a:solidFill>
+                        <a:schemeClr val="tx1"/>
+                      </a:solidFill>
+                      <a:latin typeface="Hiragino Sans W4" panose="020B0400000000000000" pitchFamily="34" charset="-128"/>
+                      <a:ea typeface="Hiragino Sans W4" panose="020B0400000000000000" pitchFamily="34" charset="-128"/>
+                    </a:rPr>
+                    <a:t>この</a:t>
+                  </a:r>
+                  <a14:m>
+                    <m:oMath xmlns:m="http://schemas.openxmlformats.org/officeDocument/2006/math">
+                      <m:sSub>
+                        <m:sSubPr>
+                          <m:ctrlPr>
+                            <a:rPr lang="en-US" altLang="ja-JP" sz="2400" b="1" i="1">
+                              <a:solidFill>
+                                <a:schemeClr val="tx1"/>
+                              </a:solidFill>
+                              <a:latin typeface="Cambria Math" panose="02040503050406030204" pitchFamily="18" charset="0"/>
+                              <a:ea typeface="Hiragino Sans W4" panose="020B0400000000000000" pitchFamily="34" charset="-128"/>
+                            </a:rPr>
+                          </m:ctrlPr>
+                        </m:sSubPr>
+                        <m:e>
+                          <m:acc>
+                            <m:accPr>
+                              <m:chr m:val="̂"/>
+                              <m:ctrlPr>
+                                <a:rPr lang="en-US" altLang="ja-JP" sz="2400" b="1" i="1">
+                                  <a:solidFill>
+                                    <a:schemeClr val="tx1"/>
+                                  </a:solidFill>
+                                  <a:latin typeface="Cambria Math" panose="02040503050406030204" pitchFamily="18" charset="0"/>
+                                  <a:ea typeface="Hiragino Sans W4" panose="020B0400000000000000" pitchFamily="34" charset="-128"/>
+                                </a:rPr>
+                              </m:ctrlPr>
+                            </m:accPr>
+                            <m:e>
+                              <m:r>
+                                <a:rPr lang="en-US" altLang="ja-JP" sz="2400" b="1" i="1">
+                                  <a:solidFill>
+                                    <a:schemeClr val="tx1"/>
+                                  </a:solidFill>
+                                  <a:latin typeface="Cambria Math" panose="02040503050406030204" pitchFamily="18" charset="0"/>
+                                  <a:ea typeface="Hiragino Sans W4" panose="020B0400000000000000" pitchFamily="34" charset="-128"/>
+                                </a:rPr>
+                                <m:t>𝜷</m:t>
+                              </m:r>
+                            </m:e>
+                          </m:acc>
+                        </m:e>
+                        <m:sub>
+                          <m:r>
+                            <a:rPr lang="en-US" altLang="ja-JP" sz="2400" b="1" i="1">
+                              <a:solidFill>
+                                <a:schemeClr val="tx1"/>
+                              </a:solidFill>
+                              <a:latin typeface="Cambria Math" panose="02040503050406030204" pitchFamily="18" charset="0"/>
+                              <a:ea typeface="Hiragino Sans W4" panose="020B0400000000000000" pitchFamily="34" charset="-128"/>
+                            </a:rPr>
+                            <m:t>𝟏</m:t>
+                          </m:r>
+                        </m:sub>
+                      </m:sSub>
+                    </m:oMath>
+                  </a14:m>
+                  <a:r>
+                    <a:rPr kumimoji="1" lang="ja-JP" altLang="en-US" sz="2400">
+                      <a:solidFill>
+                        <a:schemeClr val="tx1"/>
+                      </a:solidFill>
+                      <a:latin typeface="Hiragino Sans W4" panose="020B0400000000000000" pitchFamily="34" charset="-128"/>
+                      <a:ea typeface="Hiragino Sans W4" panose="020B0400000000000000" pitchFamily="34" charset="-128"/>
+                    </a:rPr>
+                    <a:t>は真の値</a:t>
+                  </a:r>
+                  <a14:m>
+                    <m:oMath xmlns:m="http://schemas.openxmlformats.org/officeDocument/2006/math">
+                      <m:sSub>
+                        <m:sSubPr>
+                          <m:ctrlPr>
+                            <a:rPr lang="en-US" altLang="ja-JP" sz="2400" b="1" i="1">
+                              <a:solidFill>
+                                <a:schemeClr val="tx1"/>
+                              </a:solidFill>
+                              <a:latin typeface="Cambria Math" panose="02040503050406030204" pitchFamily="18" charset="0"/>
+                              <a:ea typeface="Hiragino Sans W4" panose="020B0400000000000000" pitchFamily="34" charset="-128"/>
+                            </a:rPr>
+                          </m:ctrlPr>
+                        </m:sSubPr>
+                        <m:e>
+                          <m:r>
+                            <a:rPr lang="en-US" altLang="ja-JP" sz="2400" b="1" i="1">
+                              <a:solidFill>
+                                <a:schemeClr val="tx1"/>
+                              </a:solidFill>
+                              <a:latin typeface="Cambria Math" panose="02040503050406030204" pitchFamily="18" charset="0"/>
+                              <a:ea typeface="Hiragino Sans W4" panose="020B0400000000000000" pitchFamily="34" charset="-128"/>
+                            </a:rPr>
+                            <m:t>𝜷</m:t>
+                          </m:r>
+                        </m:e>
+                        <m:sub>
+                          <m:r>
+                            <a:rPr lang="en-US" altLang="ja-JP" sz="2400" b="1" i="1">
+                              <a:solidFill>
+                                <a:schemeClr val="tx1"/>
+                              </a:solidFill>
+                              <a:latin typeface="Cambria Math" panose="02040503050406030204" pitchFamily="18" charset="0"/>
+                              <a:ea typeface="Hiragino Sans W4" panose="020B0400000000000000" pitchFamily="34" charset="-128"/>
+                            </a:rPr>
+                            <m:t>𝟏</m:t>
+                          </m:r>
+                        </m:sub>
+                      </m:sSub>
+                    </m:oMath>
+                  </a14:m>
+                  <a:r>
+                    <a:rPr kumimoji="1" lang="ja-JP" altLang="en-US" sz="2400">
+                      <a:solidFill>
+                        <a:schemeClr val="tx1"/>
+                      </a:solidFill>
+                      <a:latin typeface="Hiragino Sans W4" panose="020B0400000000000000" pitchFamily="34" charset="-128"/>
+                      <a:ea typeface="Hiragino Sans W4" panose="020B0400000000000000" pitchFamily="34" charset="-128"/>
+                    </a:rPr>
+                    <a:t>にたぶんめっちゃ近い！🤗</a:t>
+                  </a:r>
+                </a:p>
+              </p:txBody>
+            </p:sp>
+          </mc:Choice>
+          <mc:Fallback>
+            <p:sp>
+              <p:nvSpPr>
+                <p:cNvPr id="26" name="角丸四角形 25">
+                  <a:extLst>
+                    <a:ext uri="{FF2B5EF4-FFF2-40B4-BE49-F238E27FC236}">
+                      <a16:creationId xmlns:a16="http://schemas.microsoft.com/office/drawing/2014/main" id="{3EE22B7E-3C32-EC99-AA2A-53AE13AFBDEF}"/>
+                    </a:ext>
+                  </a:extLst>
+                </p:cNvPr>
+                <p:cNvSpPr>
+                  <a:spLocks noRot="1" noChangeAspect="1" noMove="1" noResize="1" noEditPoints="1" noAdjustHandles="1" noChangeArrowheads="1" noChangeShapeType="1" noTextEdit="1"/>
+                </p:cNvSpPr>
+                <p:nvPr/>
+              </p:nvSpPr>
+              <p:spPr>
+                <a:xfrm>
+                  <a:off x="606840" y="4216010"/>
+                  <a:ext cx="4736342" cy="2048450"/>
+                </a:xfrm>
+                <a:prstGeom prst="roundRect">
+                  <a:avLst/>
+                </a:prstGeom>
+                <a:blipFill>
+                  <a:blip r:embed="rId4"/>
+                  <a:stretch>
+                    <a:fillRect/>
+                  </a:stretch>
+                </a:blipFill>
+                <a:ln w="38100"/>
+              </p:spPr>
+              <p:txBody>
+                <a:bodyPr/>
+                <a:lstStyle/>
+                <a:p>
+                  <a:r>
+                    <a:rPr lang="ja-JP" altLang="en-US">
+                      <a:noFill/>
+                    </a:rPr>
+                    <a:t> </a:t>
+                  </a:r>
+                </a:p>
+              </p:txBody>
+            </p:sp>
+          </mc:Fallback>
+        </mc:AlternateContent>
+        <p:sp>
+          <p:nvSpPr>
+            <p:cNvPr id="28" name="右矢印 27">
+              <a:extLst>
+                <a:ext uri="{FF2B5EF4-FFF2-40B4-BE49-F238E27FC236}">
+                  <a16:creationId xmlns:a16="http://schemas.microsoft.com/office/drawing/2014/main" id="{9291BF36-D7D8-09C1-166C-CE12A4594F81}"/>
+                </a:ext>
+              </a:extLst>
+            </p:cNvPr>
+            <p:cNvSpPr/>
+            <p:nvPr/>
+          </p:nvSpPr>
+          <p:spPr>
+            <a:xfrm flipH="1">
+              <a:off x="5780180" y="966565"/>
+              <a:ext cx="2592638" cy="1302401"/>
+            </a:xfrm>
+            <a:prstGeom prst="rightArrow">
+              <a:avLst/>
+            </a:prstGeom>
+            <a:solidFill>
+              <a:schemeClr val="tx1"/>
+            </a:solidFill>
+            <a:ln>
+              <a:noFill/>
+            </a:ln>
+          </p:spPr>
+          <p:style>
+            <a:lnRef idx="2">
+              <a:schemeClr val="accent1">
+                <a:shade val="15000"/>
+              </a:schemeClr>
+            </a:lnRef>
+            <a:fillRef idx="1">
+              <a:schemeClr val="accent1"/>
+            </a:fillRef>
+            <a:effectRef idx="0">
+              <a:schemeClr val="accent1"/>
+            </a:effectRef>
+            <a:fontRef idx="minor">
+              <a:schemeClr val="lt1"/>
+            </a:fontRef>
+          </p:style>
+          <p:txBody>
+            <a:bodyPr rtlCol="0" anchor="ctr"/>
+            <a:lstStyle/>
+            <a:p>
+              <a:pPr algn="ctr"/>
+              <a:endParaRPr kumimoji="1" lang="ja-JP" altLang="en-US"/>
+            </a:p>
+          </p:txBody>
+        </p:sp>
+        <p:sp>
+          <p:nvSpPr>
+            <p:cNvPr id="29" name="右矢印 28">
+              <a:extLst>
+                <a:ext uri="{FF2B5EF4-FFF2-40B4-BE49-F238E27FC236}">
+                  <a16:creationId xmlns:a16="http://schemas.microsoft.com/office/drawing/2014/main" id="{AAEEB71D-123E-03B0-B394-44AD9C31ABC6}"/>
+                </a:ext>
+              </a:extLst>
+            </p:cNvPr>
+            <p:cNvSpPr/>
+            <p:nvPr/>
+          </p:nvSpPr>
+          <p:spPr>
+            <a:xfrm flipH="1">
+              <a:off x="5780180" y="4589035"/>
+              <a:ext cx="2592638" cy="1302401"/>
+            </a:xfrm>
+            <a:prstGeom prst="rightArrow">
+              <a:avLst/>
+            </a:prstGeom>
+            <a:solidFill>
+              <a:schemeClr val="tx1"/>
+            </a:solidFill>
+            <a:ln>
+              <a:noFill/>
+            </a:ln>
+          </p:spPr>
+          <p:style>
+            <a:lnRef idx="2">
+              <a:schemeClr val="accent1">
+                <a:shade val="15000"/>
+              </a:schemeClr>
+            </a:lnRef>
+            <a:fillRef idx="1">
+              <a:schemeClr val="accent1"/>
+            </a:fillRef>
+            <a:effectRef idx="0">
+              <a:schemeClr val="accent1"/>
+            </a:effectRef>
+            <a:fontRef idx="minor">
+              <a:schemeClr val="lt1"/>
+            </a:fontRef>
+          </p:style>
+          <p:txBody>
+            <a:bodyPr rtlCol="0" anchor="ctr"/>
+            <a:lstStyle/>
+            <a:p>
+              <a:pPr algn="ctr"/>
+              <a:endParaRPr kumimoji="1" lang="ja-JP" altLang="en-US"/>
+            </a:p>
+          </p:txBody>
+        </p:sp>
+      </p:grpSp>
+    </p:spTree>
+    <p:extLst>
+      <p:ext uri="{BB962C8B-B14F-4D97-AF65-F5344CB8AC3E}">
+        <p14:creationId xmlns:p14="http://schemas.microsoft.com/office/powerpoint/2010/main" val="3382139105"/>
+      </p:ext>
+    </p:extLst>
+  </p:cSld>
+  <p:clrMapOvr>
+    <a:masterClrMapping/>
+  </p:clrMapOvr>
+</p:sld>
+</file>
+
 <file path=ppt/slides/slide2.xml><?xml version="1.0" encoding="utf-8"?>
 <p:sld xmlns:a="http://schemas.openxmlformats.org/drawingml/2006/main" xmlns:r="http://schemas.openxmlformats.org/officeDocument/2006/relationships" xmlns:p="http://schemas.openxmlformats.org/presentationml/2006/main">
   <p:cSld>
@@ -9125,8 +10289,8 @@
             <a:chExt cx="9448591" cy="3997287"/>
           </a:xfrm>
         </p:grpSpPr>
-        <mc:AlternateContent xmlns:mc="http://schemas.openxmlformats.org/markup-compatibility/2006">
-          <mc:Choice xmlns:a14="http://schemas.microsoft.com/office/drawing/2010/main" Requires="a14">
+        <mc:AlternateContent xmlns:mc="http://schemas.openxmlformats.org/markup-compatibility/2006" xmlns:a14="http://schemas.microsoft.com/office/drawing/2010/main">
+          <mc:Choice Requires="a14">
             <p:sp>
               <p:nvSpPr>
                 <p:cNvPr id="2" name="角丸四角形 1">
@@ -9211,7 +10375,7 @@
               </p:txBody>
             </p:sp>
           </mc:Choice>
-          <mc:Fallback>
+          <mc:Fallback xmlns="">
             <p:sp>
               <p:nvSpPr>
                 <p:cNvPr id="2" name="角丸四角形 1">
@@ -9261,8 +10425,8 @@
             </p:sp>
           </mc:Fallback>
         </mc:AlternateContent>
-        <mc:AlternateContent xmlns:mc="http://schemas.openxmlformats.org/markup-compatibility/2006">
-          <mc:Choice xmlns:a14="http://schemas.microsoft.com/office/drawing/2010/main" Requires="a14">
+        <mc:AlternateContent xmlns:mc="http://schemas.openxmlformats.org/markup-compatibility/2006" xmlns:a14="http://schemas.microsoft.com/office/drawing/2010/main">
+          <mc:Choice Requires="a14">
             <p:sp>
               <p:nvSpPr>
                 <p:cNvPr id="3" name="角丸四角形 2">
@@ -9347,7 +10511,7 @@
               </p:txBody>
             </p:sp>
           </mc:Choice>
-          <mc:Fallback>
+          <mc:Fallback xmlns="">
             <p:sp>
               <p:nvSpPr>
                 <p:cNvPr id="3" name="角丸四角形 2">
@@ -9397,8 +10561,8 @@
             </p:sp>
           </mc:Fallback>
         </mc:AlternateContent>
-        <mc:AlternateContent xmlns:mc="http://schemas.openxmlformats.org/markup-compatibility/2006">
-          <mc:Choice xmlns:a14="http://schemas.microsoft.com/office/drawing/2010/main" Requires="a14">
+        <mc:AlternateContent xmlns:mc="http://schemas.openxmlformats.org/markup-compatibility/2006" xmlns:a14="http://schemas.microsoft.com/office/drawing/2010/main">
+          <mc:Choice Requires="a14">
             <p:sp>
               <p:nvSpPr>
                 <p:cNvPr id="4" name="角丸四角形 3">
@@ -9483,7 +10647,7 @@
               </p:txBody>
             </p:sp>
           </mc:Choice>
-          <mc:Fallback>
+          <mc:Fallback xmlns="">
             <p:sp>
               <p:nvSpPr>
                 <p:cNvPr id="4" name="角丸四角形 3">
@@ -9777,8 +10941,8 @@
             <a:chExt cx="9448591" cy="4765407"/>
           </a:xfrm>
         </p:grpSpPr>
-        <mc:AlternateContent xmlns:mc="http://schemas.openxmlformats.org/markup-compatibility/2006">
-          <mc:Choice xmlns:a14="http://schemas.microsoft.com/office/drawing/2010/main" Requires="a14">
+        <mc:AlternateContent xmlns:mc="http://schemas.openxmlformats.org/markup-compatibility/2006" xmlns:a14="http://schemas.microsoft.com/office/drawing/2010/main">
+          <mc:Choice Requires="a14">
             <p:sp>
               <p:nvSpPr>
                 <p:cNvPr id="3" name="角丸四角形 2">
@@ -9863,7 +11027,7 @@
               </p:txBody>
             </p:sp>
           </mc:Choice>
-          <mc:Fallback>
+          <mc:Fallback xmlns="">
             <p:sp>
               <p:nvSpPr>
                 <p:cNvPr id="3" name="角丸四角形 2">
@@ -9913,8 +11077,8 @@
             </p:sp>
           </mc:Fallback>
         </mc:AlternateContent>
-        <mc:AlternateContent xmlns:mc="http://schemas.openxmlformats.org/markup-compatibility/2006">
-          <mc:Choice xmlns:a14="http://schemas.microsoft.com/office/drawing/2010/main" Requires="a14">
+        <mc:AlternateContent xmlns:mc="http://schemas.openxmlformats.org/markup-compatibility/2006" xmlns:a14="http://schemas.microsoft.com/office/drawing/2010/main">
+          <mc:Choice Requires="a14">
             <p:sp>
               <p:nvSpPr>
                 <p:cNvPr id="4" name="角丸四角形 3">
@@ -9999,7 +11163,7 @@
               </p:txBody>
             </p:sp>
           </mc:Choice>
-          <mc:Fallback>
+          <mc:Fallback xmlns="">
             <p:sp>
               <p:nvSpPr>
                 <p:cNvPr id="4" name="角丸四角形 3">
@@ -10049,8 +11213,8 @@
             </p:sp>
           </mc:Fallback>
         </mc:AlternateContent>
-        <mc:AlternateContent xmlns:mc="http://schemas.openxmlformats.org/markup-compatibility/2006">
-          <mc:Choice xmlns:a14="http://schemas.microsoft.com/office/drawing/2010/main" Requires="a14">
+        <mc:AlternateContent xmlns:mc="http://schemas.openxmlformats.org/markup-compatibility/2006" xmlns:a14="http://schemas.microsoft.com/office/drawing/2010/main">
+          <mc:Choice Requires="a14">
             <p:sp>
               <p:nvSpPr>
                 <p:cNvPr id="5" name="角丸四角形 4">
@@ -10154,7 +11318,7 @@
               </p:txBody>
             </p:sp>
           </mc:Choice>
-          <mc:Fallback>
+          <mc:Fallback xmlns="">
             <p:sp>
               <p:nvSpPr>
                 <p:cNvPr id="5" name="角丸四角形 4">
@@ -10532,8 +11696,8 @@
             <a:chExt cx="9252333" cy="3997287"/>
           </a:xfrm>
         </p:grpSpPr>
-        <mc:AlternateContent xmlns:mc="http://schemas.openxmlformats.org/markup-compatibility/2006">
-          <mc:Choice xmlns:a14="http://schemas.microsoft.com/office/drawing/2010/main" Requires="a14">
+        <mc:AlternateContent xmlns:mc="http://schemas.openxmlformats.org/markup-compatibility/2006" xmlns:a14="http://schemas.microsoft.com/office/drawing/2010/main">
+          <mc:Choice Requires="a14">
             <p:sp>
               <p:nvSpPr>
                 <p:cNvPr id="3" name="角丸四角形 2">
@@ -10618,7 +11782,7 @@
               </p:txBody>
             </p:sp>
           </mc:Choice>
-          <mc:Fallback>
+          <mc:Fallback xmlns="">
             <p:sp>
               <p:nvSpPr>
                 <p:cNvPr id="3" name="角丸四角形 2">
@@ -10668,8 +11832,8 @@
             </p:sp>
           </mc:Fallback>
         </mc:AlternateContent>
-        <mc:AlternateContent xmlns:mc="http://schemas.openxmlformats.org/markup-compatibility/2006">
-          <mc:Choice xmlns:a14="http://schemas.microsoft.com/office/drawing/2010/main" Requires="a14">
+        <mc:AlternateContent xmlns:mc="http://schemas.openxmlformats.org/markup-compatibility/2006" xmlns:a14="http://schemas.microsoft.com/office/drawing/2010/main">
+          <mc:Choice Requires="a14">
             <p:sp>
               <p:nvSpPr>
                 <p:cNvPr id="4" name="角丸四角形 3">
@@ -10754,7 +11918,7 @@
               </p:txBody>
             </p:sp>
           </mc:Choice>
-          <mc:Fallback>
+          <mc:Fallback xmlns="">
             <p:sp>
               <p:nvSpPr>
                 <p:cNvPr id="4" name="角丸四角形 3">
@@ -10804,8 +11968,8 @@
             </p:sp>
           </mc:Fallback>
         </mc:AlternateContent>
-        <mc:AlternateContent xmlns:mc="http://schemas.openxmlformats.org/markup-compatibility/2006">
-          <mc:Choice xmlns:a14="http://schemas.microsoft.com/office/drawing/2010/main" Requires="a14">
+        <mc:AlternateContent xmlns:mc="http://schemas.openxmlformats.org/markup-compatibility/2006" xmlns:a14="http://schemas.microsoft.com/office/drawing/2010/main">
+          <mc:Choice Requires="a14">
             <p:sp>
               <p:nvSpPr>
                 <p:cNvPr id="5" name="角丸四角形 4">
@@ -10903,7 +12067,7 @@
               </p:txBody>
             </p:sp>
           </mc:Choice>
-          <mc:Fallback>
+          <mc:Fallback xmlns="">
             <p:sp>
               <p:nvSpPr>
                 <p:cNvPr id="5" name="角丸四角形 4">
@@ -12418,8 +13582,8 @@
             </a:p>
           </p:txBody>
         </p:sp>
-        <mc:AlternateContent xmlns:mc="http://schemas.openxmlformats.org/markup-compatibility/2006" xmlns:a14="http://schemas.microsoft.com/office/drawing/2010/main">
-          <mc:Choice Requires="a14">
+        <mc:AlternateContent xmlns:mc="http://schemas.openxmlformats.org/markup-compatibility/2006">
+          <mc:Choice xmlns:a14="http://schemas.microsoft.com/office/drawing/2010/main" Requires="a14">
             <p:sp>
               <p:nvSpPr>
                 <p:cNvPr id="6" name="テキスト ボックス 5">
@@ -12453,16 +13617,19 @@
                     <m:oMathPara xmlns:m="http://schemas.openxmlformats.org/officeDocument/2006/math">
                       <m:oMath>
                         <m:r>
-                          <a:rPr kumimoji="1" lang="en-US" altLang="ja-JP" sz="2800" b="0" i="1" smtClean="0">
+                          <m:rPr>
+                            <m:sty m:val="p"/>
+                          </m:rPr>
+                          <a:rPr kumimoji="1" lang="en-US" altLang="ja-JP" sz="2800" b="0" i="0" smtClean="0">
                             <a:latin typeface="Cambria Math" panose="02040503050406030204" pitchFamily="18" charset="0"/>
                             <a:ea typeface="Hiragino Sans W4" panose="020B0400000000000000" pitchFamily="34" charset="-128"/>
                           </a:rPr>
-                          <m:t>𝑇𝑂𝐸𝐼</m:t>
+                          <m:t>TOEI</m:t>
                         </m:r>
                         <m:sSub>
                           <m:sSubPr>
                             <m:ctrlPr>
-                              <a:rPr kumimoji="1" lang="en-US" altLang="ja-JP" sz="2800" b="0" i="1" smtClean="0">
+                              <a:rPr kumimoji="1" lang="en-US" altLang="ja-JP" sz="2800" b="0" i="0" smtClean="0">
                                 <a:latin typeface="Cambria Math" panose="02040503050406030204" pitchFamily="18" charset="0"/>
                                 <a:ea typeface="Hiragino Sans W4" panose="020B0400000000000000" pitchFamily="34" charset="-128"/>
                               </a:rPr>
@@ -12470,11 +13637,14 @@
                           </m:sSubPr>
                           <m:e>
                             <m:r>
-                              <a:rPr kumimoji="1" lang="en-US" altLang="ja-JP" sz="2800" b="0" i="1" smtClean="0">
+                              <m:rPr>
+                                <m:sty m:val="p"/>
+                              </m:rPr>
+                              <a:rPr kumimoji="1" lang="en-US" altLang="ja-JP" sz="2800" b="0" i="0" smtClean="0">
                                 <a:latin typeface="Cambria Math" panose="02040503050406030204" pitchFamily="18" charset="0"/>
                                 <a:ea typeface="Hiragino Sans W4" panose="020B0400000000000000" pitchFamily="34" charset="-128"/>
                               </a:rPr>
-                              <m:t>𝐶</m:t>
+                              <m:t>C</m:t>
                             </m:r>
                           </m:e>
                           <m:sub>
@@ -12784,7 +13954,7 @@
               </p:txBody>
             </p:sp>
           </mc:Choice>
-          <mc:Fallback xmlns="">
+          <mc:Fallback>
             <p:sp>
               <p:nvSpPr>
                 <p:cNvPr id="6" name="テキスト ボックス 5">
@@ -12810,7 +13980,7 @@
                 <a:blipFill>
                   <a:blip r:embed="rId2"/>
                   <a:stretch>
-                    <a:fillRect l="-860" b="-10390"/>
+                    <a:fillRect l="-430" b="-10390"/>
                   </a:stretch>
                 </a:blipFill>
               </p:spPr>
@@ -15446,8 +16616,8 @@
             </a:fontRef>
           </p:style>
         </p:cxnSp>
-        <mc:AlternateContent xmlns:mc="http://schemas.openxmlformats.org/markup-compatibility/2006">
-          <mc:Choice xmlns:a14="http://schemas.microsoft.com/office/drawing/2010/main" Requires="a14">
+        <mc:AlternateContent xmlns:mc="http://schemas.openxmlformats.org/markup-compatibility/2006" xmlns:a14="http://schemas.microsoft.com/office/drawing/2010/main">
+          <mc:Choice Requires="a14">
             <p:sp>
               <p:nvSpPr>
                 <p:cNvPr id="9" name="テキスト ボックス 8">
@@ -15556,7 +16726,7 @@
               </p:txBody>
             </p:sp>
           </mc:Choice>
-          <mc:Fallback>
+          <mc:Fallback xmlns="">
             <p:sp>
               <p:nvSpPr>
                 <p:cNvPr id="9" name="テキスト ボックス 8">
@@ -15601,8 +16771,8 @@
             </p:sp>
           </mc:Fallback>
         </mc:AlternateContent>
-        <mc:AlternateContent xmlns:mc="http://schemas.openxmlformats.org/markup-compatibility/2006">
-          <mc:Choice xmlns:a14="http://schemas.microsoft.com/office/drawing/2010/main" Requires="a14">
+        <mc:AlternateContent xmlns:mc="http://schemas.openxmlformats.org/markup-compatibility/2006" xmlns:a14="http://schemas.microsoft.com/office/drawing/2010/main">
+          <mc:Choice Requires="a14">
             <p:sp>
               <p:nvSpPr>
                 <p:cNvPr id="10" name="テキスト ボックス 9">
@@ -15678,7 +16848,7 @@
               </p:txBody>
             </p:sp>
           </mc:Choice>
-          <mc:Fallback>
+          <mc:Fallback xmlns="">
             <p:sp>
               <p:nvSpPr>
                 <p:cNvPr id="10" name="テキスト ボックス 9">

--- a/figs/DIYfigures_icpa2.pptx
+++ b/figs/DIYfigures_icpa2.pptx
@@ -206,7 +206,7 @@
           <a:p>
             <a:fld id="{578D67A2-3998-1741-A572-96ADB5DE7BBF}" type="datetimeFigureOut">
               <a:rPr kumimoji="1" lang="ja-JP" altLang="en-US" smtClean="0"/>
-              <a:t>2026/9/16</a:t>
+              <a:t>2026/9/25</a:t>
             </a:fld>
             <a:endParaRPr kumimoji="1" lang="ja-JP" altLang="en-US"/>
           </a:p>
@@ -673,6 +673,90 @@
 </p:notes>
 </file>
 
+<file path=ppt/notesSlides/notesSlide3.xml><?xml version="1.0" encoding="utf-8"?>
+<p:notes xmlns:a="http://schemas.openxmlformats.org/drawingml/2006/main" xmlns:r="http://schemas.openxmlformats.org/officeDocument/2006/relationships" xmlns:p="http://schemas.openxmlformats.org/presentationml/2006/main">
+  <p:cSld>
+    <p:spTree>
+      <p:nvGrpSpPr>
+        <p:cNvPr id="1" name=""/>
+        <p:cNvGrpSpPr/>
+        <p:nvPr/>
+      </p:nvGrpSpPr>
+      <p:grpSpPr>
+        <a:xfrm>
+          <a:off x="0" y="0"/>
+          <a:ext cx="0" cy="0"/>
+          <a:chOff x="0" y="0"/>
+          <a:chExt cx="0" cy="0"/>
+        </a:xfrm>
+      </p:grpSpPr>
+      <p:sp>
+        <p:nvSpPr>
+          <p:cNvPr id="2" name="スライド イメージ プレースホルダー 1"/>
+          <p:cNvSpPr>
+            <a:spLocks noGrp="1" noRot="1" noChangeAspect="1"/>
+          </p:cNvSpPr>
+          <p:nvPr>
+            <p:ph type="sldImg"/>
+          </p:nvPr>
+        </p:nvSpPr>
+        <p:spPr/>
+      </p:sp>
+      <p:sp>
+        <p:nvSpPr>
+          <p:cNvPr id="3" name="ノート プレースホルダー 2"/>
+          <p:cNvSpPr>
+            <a:spLocks noGrp="1"/>
+          </p:cNvSpPr>
+          <p:nvPr>
+            <p:ph type="body" idx="1"/>
+          </p:nvPr>
+        </p:nvSpPr>
+        <p:spPr/>
+        <p:txBody>
+          <a:bodyPr/>
+          <a:lstStyle/>
+          <a:p>
+            <a:endParaRPr kumimoji="1" lang="ja-JP" altLang="en-US"/>
+          </a:p>
+        </p:txBody>
+      </p:sp>
+      <p:sp>
+        <p:nvSpPr>
+          <p:cNvPr id="4" name="スライド番号プレースホルダー 3"/>
+          <p:cNvSpPr>
+            <a:spLocks noGrp="1"/>
+          </p:cNvSpPr>
+          <p:nvPr>
+            <p:ph type="sldNum" sz="quarter" idx="5"/>
+          </p:nvPr>
+        </p:nvSpPr>
+        <p:spPr/>
+        <p:txBody>
+          <a:bodyPr/>
+          <a:lstStyle/>
+          <a:p>
+            <a:fld id="{A4F04B04-4CEB-2647-96CF-6A0625877C42}" type="slidenum">
+              <a:rPr kumimoji="1" lang="ja-JP" altLang="en-US" smtClean="0"/>
+              <a:t>10</a:t>
+            </a:fld>
+            <a:endParaRPr kumimoji="1" lang="ja-JP" altLang="en-US"/>
+          </a:p>
+        </p:txBody>
+      </p:sp>
+    </p:spTree>
+    <p:extLst>
+      <p:ext uri="{BB962C8B-B14F-4D97-AF65-F5344CB8AC3E}">
+        <p14:creationId xmlns:p14="http://schemas.microsoft.com/office/powerpoint/2010/main" val="3827589694"/>
+      </p:ext>
+    </p:extLst>
+  </p:cSld>
+  <p:clrMapOvr>
+    <a:masterClrMapping/>
+  </p:clrMapOvr>
+</p:notes>
+</file>
+
 <file path=ppt/slideLayouts/slideLayout1.xml><?xml version="1.0" encoding="utf-8"?>
 <p:sldLayout xmlns:a="http://schemas.openxmlformats.org/drawingml/2006/main" xmlns:r="http://schemas.openxmlformats.org/officeDocument/2006/relationships" xmlns:p="http://schemas.openxmlformats.org/presentationml/2006/main" type="title" preserve="1">
   <p:cSld name="タイトル スライド">
@@ -820,7 +904,7 @@
           <a:p>
             <a:fld id="{F4B6AA23-F6BB-FA47-96B5-569FAB187581}" type="datetimeFigureOut">
               <a:rPr kumimoji="1" lang="ja-JP" altLang="en-US" smtClean="0"/>
-              <a:t>2026/9/16</a:t>
+              <a:t>2026/9/25</a:t>
             </a:fld>
             <a:endParaRPr kumimoji="1" lang="ja-JP" altLang="en-US"/>
           </a:p>
@@ -1050,7 +1134,7 @@
           <a:p>
             <a:fld id="{F4B6AA23-F6BB-FA47-96B5-569FAB187581}" type="datetimeFigureOut">
               <a:rPr kumimoji="1" lang="ja-JP" altLang="en-US" smtClean="0"/>
-              <a:t>2026/9/16</a:t>
+              <a:t>2026/9/25</a:t>
             </a:fld>
             <a:endParaRPr kumimoji="1" lang="ja-JP" altLang="en-US"/>
           </a:p>
@@ -1290,7 +1374,7 @@
           <a:p>
             <a:fld id="{F4B6AA23-F6BB-FA47-96B5-569FAB187581}" type="datetimeFigureOut">
               <a:rPr kumimoji="1" lang="ja-JP" altLang="en-US" smtClean="0"/>
-              <a:t>2026/9/16</a:t>
+              <a:t>2026/9/25</a:t>
             </a:fld>
             <a:endParaRPr kumimoji="1" lang="ja-JP" altLang="en-US"/>
           </a:p>
@@ -1520,7 +1604,7 @@
           <a:p>
             <a:fld id="{F4B6AA23-F6BB-FA47-96B5-569FAB187581}" type="datetimeFigureOut">
               <a:rPr kumimoji="1" lang="ja-JP" altLang="en-US" smtClean="0"/>
-              <a:t>2026/9/16</a:t>
+              <a:t>2026/9/25</a:t>
             </a:fld>
             <a:endParaRPr kumimoji="1" lang="ja-JP" altLang="en-US"/>
           </a:p>
@@ -1795,7 +1879,7 @@
           <a:p>
             <a:fld id="{F4B6AA23-F6BB-FA47-96B5-569FAB187581}" type="datetimeFigureOut">
               <a:rPr kumimoji="1" lang="ja-JP" altLang="en-US" smtClean="0"/>
-              <a:t>2026/9/16</a:t>
+              <a:t>2026/9/25</a:t>
             </a:fld>
             <a:endParaRPr kumimoji="1" lang="ja-JP" altLang="en-US"/>
           </a:p>
@@ -2124,7 +2208,7 @@
           <a:p>
             <a:fld id="{F4B6AA23-F6BB-FA47-96B5-569FAB187581}" type="datetimeFigureOut">
               <a:rPr kumimoji="1" lang="ja-JP" altLang="en-US" smtClean="0"/>
-              <a:t>2026/9/16</a:t>
+              <a:t>2026/9/25</a:t>
             </a:fld>
             <a:endParaRPr kumimoji="1" lang="ja-JP" altLang="en-US"/>
           </a:p>
@@ -2600,7 +2684,7 @@
           <a:p>
             <a:fld id="{F4B6AA23-F6BB-FA47-96B5-569FAB187581}" type="datetimeFigureOut">
               <a:rPr kumimoji="1" lang="ja-JP" altLang="en-US" smtClean="0"/>
-              <a:t>2026/9/16</a:t>
+              <a:t>2026/9/25</a:t>
             </a:fld>
             <a:endParaRPr kumimoji="1" lang="ja-JP" altLang="en-US"/>
           </a:p>
@@ -2741,7 +2825,7 @@
           <a:p>
             <a:fld id="{F4B6AA23-F6BB-FA47-96B5-569FAB187581}" type="datetimeFigureOut">
               <a:rPr kumimoji="1" lang="ja-JP" altLang="en-US" smtClean="0"/>
-              <a:t>2026/9/16</a:t>
+              <a:t>2026/9/25</a:t>
             </a:fld>
             <a:endParaRPr kumimoji="1" lang="ja-JP" altLang="en-US"/>
           </a:p>
@@ -2854,7 +2938,7 @@
           <a:p>
             <a:fld id="{F4B6AA23-F6BB-FA47-96B5-569FAB187581}" type="datetimeFigureOut">
               <a:rPr kumimoji="1" lang="ja-JP" altLang="en-US" smtClean="0"/>
-              <a:t>2026/9/16</a:t>
+              <a:t>2026/9/25</a:t>
             </a:fld>
             <a:endParaRPr kumimoji="1" lang="ja-JP" altLang="en-US"/>
           </a:p>
@@ -3197,7 +3281,7 @@
           <a:p>
             <a:fld id="{F4B6AA23-F6BB-FA47-96B5-569FAB187581}" type="datetimeFigureOut">
               <a:rPr kumimoji="1" lang="ja-JP" altLang="en-US" smtClean="0"/>
-              <a:t>2026/9/16</a:t>
+              <a:t>2026/9/25</a:t>
             </a:fld>
             <a:endParaRPr kumimoji="1" lang="ja-JP" altLang="en-US"/>
           </a:p>
@@ -3485,7 +3569,7 @@
           <a:p>
             <a:fld id="{F4B6AA23-F6BB-FA47-96B5-569FAB187581}" type="datetimeFigureOut">
               <a:rPr kumimoji="1" lang="ja-JP" altLang="en-US" smtClean="0"/>
-              <a:t>2026/9/16</a:t>
+              <a:t>2026/9/25</a:t>
             </a:fld>
             <a:endParaRPr kumimoji="1" lang="ja-JP" altLang="en-US"/>
           </a:p>
@@ -3758,7 +3842,7 @@
           <a:p>
             <a:fld id="{F4B6AA23-F6BB-FA47-96B5-569FAB187581}" type="datetimeFigureOut">
               <a:rPr kumimoji="1" lang="ja-JP" altLang="en-US" smtClean="0"/>
-              <a:t>2026/9/16</a:t>
+              <a:t>2026/9/25</a:t>
             </a:fld>
             <a:endParaRPr kumimoji="1" lang="ja-JP" altLang="en-US"/>
           </a:p>
@@ -6648,10 +6732,10 @@
       </p:grpSpPr>
       <p:grpSp>
         <p:nvGrpSpPr>
-          <p:cNvPr id="30" name="グループ化 29">
+          <p:cNvPr id="33" name="グループ化 32">
             <a:extLst>
               <a:ext uri="{FF2B5EF4-FFF2-40B4-BE49-F238E27FC236}">
-                <a16:creationId xmlns:a16="http://schemas.microsoft.com/office/drawing/2014/main" id="{460AE991-C628-2D90-B89F-ED66E58613C5}"/>
+                <a16:creationId xmlns:a16="http://schemas.microsoft.com/office/drawing/2014/main" id="{2BB396D1-F73F-F887-76EB-686FBBED76B8}"/>
               </a:ext>
             </a:extLst>
           </p:cNvPr>
@@ -6666,268 +6750,240 @@
             <a:chExt cx="10978320" cy="5670919"/>
           </a:xfrm>
         </p:grpSpPr>
-        <p:grpSp>
-          <p:nvGrpSpPr>
-            <p:cNvPr id="25" name="グループ化 24">
+        <p:sp>
+          <p:nvSpPr>
+            <p:cNvPr id="22" name="角丸四角形 21">
               <a:extLst>
                 <a:ext uri="{FF2B5EF4-FFF2-40B4-BE49-F238E27FC236}">
-                  <a16:creationId xmlns:a16="http://schemas.microsoft.com/office/drawing/2014/main" id="{46260787-7B9D-3585-A8B3-4691CD527C99}"/>
+                  <a16:creationId xmlns:a16="http://schemas.microsoft.com/office/drawing/2014/main" id="{DC2EED71-CE35-A19F-E20F-31F8CDF3C7AF}"/>
                 </a:ext>
               </a:extLst>
             </p:cNvPr>
-            <p:cNvGrpSpPr/>
+            <p:cNvSpPr/>
             <p:nvPr/>
-          </p:nvGrpSpPr>
-          <p:grpSpPr>
+          </p:nvSpPr>
+          <p:spPr>
             <a:xfrm>
-              <a:off x="9051280" y="1003829"/>
-              <a:ext cx="2533880" cy="4850341"/>
-              <a:chOff x="7291332" y="2404775"/>
-              <a:chExt cx="2533880" cy="2048450"/>
+              <a:off x="9138956" y="593541"/>
+              <a:ext cx="2358528" cy="5670919"/>
             </a:xfrm>
-          </p:grpSpPr>
-          <p:sp>
-            <p:nvSpPr>
-              <p:cNvPr id="22" name="角丸四角形 21">
-                <a:extLst>
-                  <a:ext uri="{FF2B5EF4-FFF2-40B4-BE49-F238E27FC236}">
-                    <a16:creationId xmlns:a16="http://schemas.microsoft.com/office/drawing/2014/main" id="{DC2EED71-CE35-A19F-E20F-31F8CDF3C7AF}"/>
-                  </a:ext>
-                </a:extLst>
-              </p:cNvPr>
-              <p:cNvSpPr/>
-              <p:nvPr/>
-            </p:nvSpPr>
-            <p:spPr>
-              <a:xfrm>
-                <a:off x="7379008" y="2404775"/>
-                <a:ext cx="2358528" cy="2048450"/>
-              </a:xfrm>
-              <a:prstGeom prst="roundRect">
-                <a:avLst/>
-              </a:prstGeom>
-              <a:solidFill>
-                <a:schemeClr val="bg1"/>
-              </a:solidFill>
-              <a:ln w="38100"/>
-            </p:spPr>
-            <p:style>
-              <a:lnRef idx="2">
-                <a:schemeClr val="accent1">
-                  <a:shade val="15000"/>
-                </a:schemeClr>
-              </a:lnRef>
-              <a:fillRef idx="1">
-                <a:schemeClr val="accent1"/>
-              </a:fillRef>
-              <a:effectRef idx="0">
-                <a:schemeClr val="accent1"/>
-              </a:effectRef>
-              <a:fontRef idx="minor">
-                <a:schemeClr val="lt1"/>
-              </a:fontRef>
-            </p:style>
-            <p:txBody>
-              <a:bodyPr rtlCol="0" anchor="ctr"/>
-              <a:lstStyle/>
-              <a:p>
-                <a:pPr algn="ctr"/>
-                <a:endParaRPr kumimoji="1" lang="ja-JP" altLang="en-US"/>
-              </a:p>
-            </p:txBody>
-          </p:sp>
-          <p:sp>
-            <p:nvSpPr>
-              <p:cNvPr id="21" name="テキスト ボックス 20">
-                <a:extLst>
-                  <a:ext uri="{FF2B5EF4-FFF2-40B4-BE49-F238E27FC236}">
-                    <a16:creationId xmlns:a16="http://schemas.microsoft.com/office/drawing/2014/main" id="{D92D106B-48BA-9B33-68A2-5348862D6141}"/>
-                  </a:ext>
-                </a:extLst>
-              </p:cNvPr>
-              <p:cNvSpPr txBox="1"/>
-              <p:nvPr/>
-            </p:nvSpPr>
-            <p:spPr>
-              <a:xfrm>
-                <a:off x="7291332" y="2543272"/>
-                <a:ext cx="2533880" cy="584775"/>
-              </a:xfrm>
-              <a:prstGeom prst="rect">
-                <a:avLst/>
-              </a:prstGeom>
-              <a:noFill/>
-            </p:spPr>
-            <p:txBody>
-              <a:bodyPr wrap="square" rtlCol="0">
-                <a:spAutoFit/>
-              </a:bodyPr>
-              <a:lstStyle/>
-              <a:p>
-                <a:pPr algn="ctr"/>
-                <a:r>
-                  <a:rPr kumimoji="1" lang="ja-JP" altLang="en-US" sz="3200" b="1">
-                    <a:latin typeface="Hiragino Sans W8" panose="020B0400000000000000" pitchFamily="34" charset="-128"/>
-                    <a:ea typeface="Hiragino Sans W8" panose="020B0400000000000000" pitchFamily="34" charset="-128"/>
-                  </a:rPr>
-                  <a:t>母集団</a:t>
-                </a:r>
-                <a:endParaRPr kumimoji="1" lang="ja-JP" altLang="en-US" b="1">
+            <a:prstGeom prst="roundRect">
+              <a:avLst/>
+            </a:prstGeom>
+            <a:solidFill>
+              <a:schemeClr val="bg1"/>
+            </a:solidFill>
+            <a:ln w="38100"/>
+          </p:spPr>
+          <p:style>
+            <a:lnRef idx="2">
+              <a:schemeClr val="accent1">
+                <a:shade val="15000"/>
+              </a:schemeClr>
+            </a:lnRef>
+            <a:fillRef idx="1">
+              <a:schemeClr val="accent1"/>
+            </a:fillRef>
+            <a:effectRef idx="0">
+              <a:schemeClr val="accent1"/>
+            </a:effectRef>
+            <a:fontRef idx="minor">
+              <a:schemeClr val="lt1"/>
+            </a:fontRef>
+          </p:style>
+          <p:txBody>
+            <a:bodyPr rtlCol="0" anchor="ctr"/>
+            <a:lstStyle/>
+            <a:p>
+              <a:pPr algn="ctr"/>
+              <a:endParaRPr kumimoji="1" lang="ja-JP" altLang="en-US"/>
+            </a:p>
+          </p:txBody>
+        </p:sp>
+        <p:sp>
+          <p:nvSpPr>
+            <p:cNvPr id="21" name="テキスト ボックス 20">
+              <a:extLst>
+                <a:ext uri="{FF2B5EF4-FFF2-40B4-BE49-F238E27FC236}">
+                  <a16:creationId xmlns:a16="http://schemas.microsoft.com/office/drawing/2014/main" id="{D92D106B-48BA-9B33-68A2-5348862D6141}"/>
+                </a:ext>
+              </a:extLst>
+            </p:cNvPr>
+            <p:cNvSpPr txBox="1"/>
+            <p:nvPr/>
+          </p:nvSpPr>
+          <p:spPr>
+            <a:xfrm>
+              <a:off x="9051280" y="1331764"/>
+              <a:ext cx="2533880" cy="1384636"/>
+            </a:xfrm>
+            <a:prstGeom prst="rect">
+              <a:avLst/>
+            </a:prstGeom>
+            <a:noFill/>
+          </p:spPr>
+          <p:txBody>
+            <a:bodyPr wrap="square" rtlCol="0">
+              <a:spAutoFit/>
+            </a:bodyPr>
+            <a:lstStyle/>
+            <a:p>
+              <a:pPr algn="ctr"/>
+              <a:r>
+                <a:rPr kumimoji="1" lang="ja-JP" altLang="en-US" sz="3200" b="1">
                   <a:latin typeface="Hiragino Sans W8" panose="020B0400000000000000" pitchFamily="34" charset="-128"/>
                   <a:ea typeface="Hiragino Sans W8" panose="020B0400000000000000" pitchFamily="34" charset="-128"/>
-                </a:endParaRPr>
-              </a:p>
-            </p:txBody>
-          </p:sp>
-          <mc:AlternateContent xmlns:mc="http://schemas.openxmlformats.org/markup-compatibility/2006">
-            <mc:Choice xmlns:a14="http://schemas.microsoft.com/office/drawing/2010/main" Requires="a14">
-              <p:sp>
-                <p:nvSpPr>
-                  <p:cNvPr id="23" name="テキスト ボックス 22">
-                    <a:extLst>
-                      <a:ext uri="{FF2B5EF4-FFF2-40B4-BE49-F238E27FC236}">
-                        <a16:creationId xmlns:a16="http://schemas.microsoft.com/office/drawing/2014/main" id="{CDBFAD5B-B76C-D156-3835-D06DBAA65279}"/>
-                      </a:ext>
-                    </a:extLst>
-                  </p:cNvPr>
-                  <p:cNvSpPr txBox="1"/>
-                  <p:nvPr/>
-                </p:nvSpPr>
-                <p:spPr>
-                  <a:xfrm>
-                    <a:off x="7466684" y="3266543"/>
-                    <a:ext cx="2183176" cy="954107"/>
-                  </a:xfrm>
-                  <a:prstGeom prst="rect">
-                    <a:avLst/>
-                  </a:prstGeom>
-                  <a:noFill/>
-                </p:spPr>
-                <p:txBody>
-                  <a:bodyPr wrap="square">
-                    <a:spAutoFit/>
-                  </a:bodyPr>
-                  <a:lstStyle/>
-                  <a:p>
-                    <a:pPr algn="ctr"/>
-                    <a:r>
-                      <a:rPr kumimoji="1" lang="ja-JP" altLang="en-US" sz="2800" b="1">
-                        <a:latin typeface="Cambria Math" panose="02040503050406030204" pitchFamily="18" charset="0"/>
-                        <a:ea typeface="Hiragino Sans W4" panose="020B0400000000000000" pitchFamily="34" charset="-128"/>
-                      </a:rPr>
-                      <a:t>真の値：</a:t>
-                    </a:r>
-                    <a:endParaRPr kumimoji="1" lang="en-US" altLang="ja-JP" sz="2800" b="1" dirty="0">
+                </a:rPr>
+                <a:t>母集団</a:t>
+              </a:r>
+              <a:endParaRPr kumimoji="1" lang="ja-JP" altLang="en-US" b="1">
+                <a:latin typeface="Hiragino Sans W8" panose="020B0400000000000000" pitchFamily="34" charset="-128"/>
+                <a:ea typeface="Hiragino Sans W8" panose="020B0400000000000000" pitchFamily="34" charset="-128"/>
+              </a:endParaRPr>
+            </a:p>
+          </p:txBody>
+        </p:sp>
+        <mc:AlternateContent xmlns:mc="http://schemas.openxmlformats.org/markup-compatibility/2006" xmlns:a14="http://schemas.microsoft.com/office/drawing/2010/main">
+          <mc:Choice Requires="a14">
+            <p:sp>
+              <p:nvSpPr>
+                <p:cNvPr id="23" name="テキスト ボックス 22">
+                  <a:extLst>
+                    <a:ext uri="{FF2B5EF4-FFF2-40B4-BE49-F238E27FC236}">
+                      <a16:creationId xmlns:a16="http://schemas.microsoft.com/office/drawing/2014/main" id="{CDBFAD5B-B76C-D156-3835-D06DBAA65279}"/>
+                    </a:ext>
+                  </a:extLst>
+                </p:cNvPr>
+                <p:cNvSpPr txBox="1"/>
+                <p:nvPr/>
+              </p:nvSpPr>
+              <p:spPr>
+                <a:xfrm>
+                  <a:off x="9314308" y="4338101"/>
+                  <a:ext cx="2183176" cy="1015663"/>
+                </a:xfrm>
+                <a:prstGeom prst="rect">
+                  <a:avLst/>
+                </a:prstGeom>
+                <a:noFill/>
+              </p:spPr>
+              <p:txBody>
+                <a:bodyPr wrap="square">
+                  <a:spAutoFit/>
+                </a:bodyPr>
+                <a:lstStyle/>
+                <a:p>
+                  <a:pPr algn="ctr"/>
+                  <a:r>
+                    <a:rPr kumimoji="1" lang="ja-JP" altLang="en-US" sz="2800" b="1">
                       <a:latin typeface="Cambria Math" panose="02040503050406030204" pitchFamily="18" charset="0"/>
                       <a:ea typeface="Hiragino Sans W4" panose="020B0400000000000000" pitchFamily="34" charset="-128"/>
-                    </a:endParaRPr>
-                  </a:p>
-                  <a:p>
-                    <a:pPr algn="ctr"/>
-                    <a14:m>
-                      <m:oMathPara xmlns:m="http://schemas.openxmlformats.org/officeDocument/2006/math">
-                        <m:oMath>
-                          <m:sSub>
-                            <m:sSubPr>
-                              <m:ctrlPr>
-                                <a:rPr lang="en-US" altLang="ja-JP" sz="2800" b="1" i="1" smtClean="0">
-                                  <a:latin typeface="Cambria Math" panose="02040503050406030204" pitchFamily="18" charset="0"/>
-                                  <a:ea typeface="Hiragino Sans W4" panose="020B0400000000000000" pitchFamily="34" charset="-128"/>
-                                </a:rPr>
-                              </m:ctrlPr>
-                            </m:sSubPr>
-                            <m:e>
-                              <m:r>
-                                <a:rPr lang="en-US" altLang="ja-JP" sz="2800" b="1" i="1" smtClean="0">
-                                  <a:latin typeface="Cambria Math" panose="02040503050406030204" pitchFamily="18" charset="0"/>
-                                  <a:ea typeface="Hiragino Sans W4" panose="020B0400000000000000" pitchFamily="34" charset="-128"/>
-                                </a:rPr>
-                                <m:t>𝜷</m:t>
-                              </m:r>
-                            </m:e>
-                            <m:sub>
-                              <m:r>
-                                <a:rPr lang="en-US" altLang="ja-JP" sz="2800" b="1" i="1" smtClean="0">
-                                  <a:latin typeface="Cambria Math" panose="02040503050406030204" pitchFamily="18" charset="0"/>
-                                  <a:ea typeface="Hiragino Sans W4" panose="020B0400000000000000" pitchFamily="34" charset="-128"/>
-                                </a:rPr>
-                                <m:t>𝟏</m:t>
-                              </m:r>
-                            </m:sub>
-                          </m:sSub>
-                          <m:r>
-                            <a:rPr lang="en-US" altLang="ja-JP" sz="2800" b="1" i="1" smtClean="0">
-                              <a:latin typeface="Cambria Math" panose="02040503050406030204" pitchFamily="18" charset="0"/>
-                              <a:ea typeface="Hiragino Sans W4" panose="020B0400000000000000" pitchFamily="34" charset="-128"/>
-                            </a:rPr>
-                            <m:t>=</m:t>
-                          </m:r>
-                          <m:r>
-                            <a:rPr lang="en-US" altLang="ja-JP" sz="2800" b="1" i="1" smtClean="0">
-                              <a:latin typeface="Cambria Math" panose="02040503050406030204" pitchFamily="18" charset="0"/>
-                              <a:ea typeface="Hiragino Sans W4" panose="020B0400000000000000" pitchFamily="34" charset="-128"/>
-                            </a:rPr>
-                            <m:t>?</m:t>
-                          </m:r>
-                        </m:oMath>
-                      </m:oMathPara>
-                    </a14:m>
-                    <a:endParaRPr kumimoji="1" lang="en-US" altLang="ja-JP" sz="2800" b="1" dirty="0">
-                      <a:latin typeface="Cambria Math" panose="02040503050406030204" pitchFamily="18" charset="0"/>
-                      <a:ea typeface="Hiragino Sans W4" panose="020B0400000000000000" pitchFamily="34" charset="-128"/>
-                    </a:endParaRPr>
-                  </a:p>
-                </p:txBody>
-              </p:sp>
-            </mc:Choice>
-            <mc:Fallback>
-              <p:sp>
-                <p:nvSpPr>
-                  <p:cNvPr id="23" name="テキスト ボックス 22">
-                    <a:extLst>
-                      <a:ext uri="{FF2B5EF4-FFF2-40B4-BE49-F238E27FC236}">
-                        <a16:creationId xmlns:a16="http://schemas.microsoft.com/office/drawing/2014/main" id="{CDBFAD5B-B76C-D156-3835-D06DBAA65279}"/>
-                      </a:ext>
-                    </a:extLst>
-                  </p:cNvPr>
-                  <p:cNvSpPr txBox="1">
-                    <a:spLocks noRot="1" noChangeAspect="1" noMove="1" noResize="1" noEditPoints="1" noAdjustHandles="1" noChangeArrowheads="1" noChangeShapeType="1" noTextEdit="1"/>
-                  </p:cNvSpPr>
-                  <p:nvPr/>
-                </p:nvSpPr>
-                <p:spPr>
-                  <a:xfrm>
-                    <a:off x="7466684" y="3266543"/>
-                    <a:ext cx="2183176" cy="954107"/>
-                  </a:xfrm>
-                  <a:prstGeom prst="rect">
-                    <a:avLst/>
-                  </a:prstGeom>
-                  <a:blipFill>
-                    <a:blip r:embed="rId2"/>
-                    <a:stretch>
-                      <a:fillRect t="-3352"/>
-                    </a:stretch>
-                  </a:blipFill>
-                </p:spPr>
-                <p:txBody>
-                  <a:bodyPr/>
-                  <a:lstStyle/>
-                  <a:p>
-                    <a:r>
-                      <a:rPr lang="ja-JP" altLang="en-US">
-                        <a:noFill/>
-                      </a:rPr>
-                      <a:t> </a:t>
-                    </a:r>
-                  </a:p>
-                </p:txBody>
-              </p:sp>
-            </mc:Fallback>
-          </mc:AlternateContent>
-        </p:grpSp>
-        <mc:AlternateContent xmlns:mc="http://schemas.openxmlformats.org/markup-compatibility/2006">
-          <mc:Choice xmlns:a14="http://schemas.microsoft.com/office/drawing/2010/main" Requires="a14">
+                    </a:rPr>
+                    <a:t>真の値：</a:t>
+                  </a:r>
+                  <a:endParaRPr kumimoji="1" lang="en-US" altLang="ja-JP" sz="2800" b="1" dirty="0">
+                    <a:latin typeface="Cambria Math" panose="02040503050406030204" pitchFamily="18" charset="0"/>
+                    <a:ea typeface="Hiragino Sans W4" panose="020B0400000000000000" pitchFamily="34" charset="-128"/>
+                  </a:endParaRPr>
+                </a:p>
+                <a:p>
+                  <a:pPr algn="ctr"/>
+                  <a14:m>
+                    <m:oMathPara xmlns:m="http://schemas.openxmlformats.org/officeDocument/2006/math">
+                      <m:oMath>
+                        <m:sSub>
+                          <m:sSubPr>
+                            <m:ctrlPr>
+                              <a:rPr lang="en-US" altLang="ja-JP" sz="3200" b="1" i="1" smtClean="0">
+                                <a:latin typeface="Cambria Math" panose="02040503050406030204" pitchFamily="18" charset="0"/>
+                                <a:ea typeface="Hiragino Sans W4" panose="020B0400000000000000" pitchFamily="34" charset="-128"/>
+                              </a:rPr>
+                            </m:ctrlPr>
+                          </m:sSubPr>
+                          <m:e>
+                            <m:r>
+                              <a:rPr lang="en-US" altLang="ja-JP" sz="3200" b="1" i="1" smtClean="0">
+                                <a:latin typeface="Cambria Math" panose="02040503050406030204" pitchFamily="18" charset="0"/>
+                                <a:ea typeface="Hiragino Sans W4" panose="020B0400000000000000" pitchFamily="34" charset="-128"/>
+                              </a:rPr>
+                              <m:t>𝜷</m:t>
+                            </m:r>
+                          </m:e>
+                          <m:sub>
+                            <m:r>
+                              <a:rPr lang="en-US" altLang="ja-JP" sz="3200" b="1" i="1" smtClean="0">
+                                <a:latin typeface="Cambria Math" panose="02040503050406030204" pitchFamily="18" charset="0"/>
+                                <a:ea typeface="Hiragino Sans W4" panose="020B0400000000000000" pitchFamily="34" charset="-128"/>
+                              </a:rPr>
+                              <m:t>𝟏</m:t>
+                            </m:r>
+                          </m:sub>
+                        </m:sSub>
+                        <m:r>
+                          <a:rPr lang="en-US" altLang="ja-JP" sz="3200" b="1" i="1" smtClean="0">
+                            <a:latin typeface="Cambria Math" panose="02040503050406030204" pitchFamily="18" charset="0"/>
+                            <a:ea typeface="Hiragino Sans W4" panose="020B0400000000000000" pitchFamily="34" charset="-128"/>
+                          </a:rPr>
+                          <m:t>=?</m:t>
+                        </m:r>
+                      </m:oMath>
+                    </m:oMathPara>
+                  </a14:m>
+                  <a:endParaRPr kumimoji="1" lang="en-US" altLang="ja-JP" sz="2800" b="1" dirty="0">
+                    <a:latin typeface="Cambria Math" panose="02040503050406030204" pitchFamily="18" charset="0"/>
+                    <a:ea typeface="Hiragino Sans W4" panose="020B0400000000000000" pitchFamily="34" charset="-128"/>
+                  </a:endParaRPr>
+                </a:p>
+              </p:txBody>
+            </p:sp>
+          </mc:Choice>
+          <mc:Fallback xmlns="">
+            <p:sp>
+              <p:nvSpPr>
+                <p:cNvPr id="23" name="テキスト ボックス 22">
+                  <a:extLst>
+                    <a:ext uri="{FF2B5EF4-FFF2-40B4-BE49-F238E27FC236}">
+                      <a16:creationId xmlns:a16="http://schemas.microsoft.com/office/drawing/2014/main" id="{CDBFAD5B-B76C-D156-3835-D06DBAA65279}"/>
+                    </a:ext>
+                  </a:extLst>
+                </p:cNvPr>
+                <p:cNvSpPr txBox="1">
+                  <a:spLocks noRot="1" noChangeAspect="1" noMove="1" noResize="1" noEditPoints="1" noAdjustHandles="1" noChangeArrowheads="1" noChangeShapeType="1" noTextEdit="1"/>
+                </p:cNvSpPr>
+                <p:nvPr/>
+              </p:nvSpPr>
+              <p:spPr>
+                <a:xfrm>
+                  <a:off x="9314308" y="4338101"/>
+                  <a:ext cx="2183176" cy="1015663"/>
+                </a:xfrm>
+                <a:prstGeom prst="rect">
+                  <a:avLst/>
+                </a:prstGeom>
+                <a:blipFill>
+                  <a:blip r:embed="rId3"/>
+                  <a:stretch>
+                    <a:fillRect t="-7407" b="-12346"/>
+                  </a:stretch>
+                </a:blipFill>
+              </p:spPr>
+              <p:txBody>
+                <a:bodyPr/>
+                <a:lstStyle/>
+                <a:p>
+                  <a:r>
+                    <a:rPr lang="ja-JP" altLang="en-US">
+                      <a:noFill/>
+                    </a:rPr>
+                    <a:t> </a:t>
+                  </a:r>
+                </a:p>
+              </p:txBody>
+            </p:sp>
+          </mc:Fallback>
+        </mc:AlternateContent>
+        <mc:AlternateContent xmlns:mc="http://schemas.openxmlformats.org/markup-compatibility/2006" xmlns:a14="http://schemas.microsoft.com/office/drawing/2010/main">
+          <mc:Choice Requires="a14">
             <p:sp>
               <p:nvSpPr>
                 <p:cNvPr id="24" name="角丸四角形 23">
@@ -7111,7 +7167,6 @@
                   </a:endParaRPr>
                 </a:p>
                 <a:p>
-                  <a:pPr/>
                   <a:r>
                     <a:rPr lang="ja-JP" altLang="en-US" sz="2400">
                       <a:solidFill>
@@ -7264,7 +7319,7 @@
               </p:txBody>
             </p:sp>
           </mc:Choice>
-          <mc:Fallback>
+          <mc:Fallback xmlns="">
             <p:sp>
               <p:nvSpPr>
                 <p:cNvPr id="24" name="角丸四角形 23">
@@ -7288,7 +7343,7 @@
                   <a:avLst/>
                 </a:prstGeom>
                 <a:blipFill>
-                  <a:blip r:embed="rId3"/>
+                  <a:blip r:embed="rId4"/>
                   <a:stretch>
                     <a:fillRect/>
                   </a:stretch>
@@ -7310,8 +7365,8 @@
             </p:sp>
           </mc:Fallback>
         </mc:AlternateContent>
-        <mc:AlternateContent xmlns:mc="http://schemas.openxmlformats.org/markup-compatibility/2006">
-          <mc:Choice xmlns:a14="http://schemas.microsoft.com/office/drawing/2010/main" Requires="a14">
+        <mc:AlternateContent xmlns:mc="http://schemas.openxmlformats.org/markup-compatibility/2006" xmlns:a14="http://schemas.microsoft.com/office/drawing/2010/main">
+          <mc:Choice Requires="a14">
             <p:sp>
               <p:nvSpPr>
                 <p:cNvPr id="26" name="角丸四角形 25">
@@ -7495,7 +7550,6 @@
                   </a:endParaRPr>
                 </a:p>
                 <a:p>
-                  <a:pPr/>
                   <a:r>
                     <a:rPr lang="ja-JP" altLang="en-US" sz="2400">
                       <a:solidFill>
@@ -7628,7 +7682,7 @@
               </p:txBody>
             </p:sp>
           </mc:Choice>
-          <mc:Fallback>
+          <mc:Fallback xmlns="">
             <p:sp>
               <p:nvSpPr>
                 <p:cNvPr id="26" name="角丸四角形 25">
@@ -7652,7 +7706,7 @@
                   <a:avLst/>
                 </a:prstGeom>
                 <a:blipFill>
-                  <a:blip r:embed="rId4"/>
+                  <a:blip r:embed="rId5"/>
                   <a:stretch>
                     <a:fillRect/>
                   </a:stretch>
@@ -7775,6 +7829,81 @@
             <a:p>
               <a:pPr algn="ctr"/>
               <a:endParaRPr kumimoji="1" lang="ja-JP" altLang="en-US"/>
+            </a:p>
+          </p:txBody>
+        </p:sp>
+        <p:sp>
+          <p:nvSpPr>
+            <p:cNvPr id="32" name="テキスト ボックス 31">
+              <a:extLst>
+                <a:ext uri="{FF2B5EF4-FFF2-40B4-BE49-F238E27FC236}">
+                  <a16:creationId xmlns:a16="http://schemas.microsoft.com/office/drawing/2014/main" id="{46A4A3A5-876C-03E3-752C-09649A0F77F9}"/>
+                </a:ext>
+              </a:extLst>
+            </p:cNvPr>
+            <p:cNvSpPr txBox="1"/>
+            <p:nvPr/>
+          </p:nvSpPr>
+          <p:spPr>
+            <a:xfrm>
+              <a:off x="9226632" y="2074839"/>
+              <a:ext cx="2183176" cy="1938992"/>
+            </a:xfrm>
+            <a:prstGeom prst="rect">
+              <a:avLst/>
+            </a:prstGeom>
+            <a:noFill/>
+          </p:spPr>
+          <p:txBody>
+            <a:bodyPr wrap="square">
+              <a:spAutoFit/>
+            </a:bodyPr>
+            <a:lstStyle/>
+            <a:p>
+              <a:pPr algn="ctr"/>
+              <a:r>
+                <a:rPr kumimoji="1" lang="ja-JP" altLang="en-US" sz="2400">
+                  <a:latin typeface="Hiragino Sans W4" panose="020B0400000000000000" pitchFamily="34" charset="-128"/>
+                  <a:ea typeface="Hiragino Sans W4" panose="020B0400000000000000" pitchFamily="34" charset="-128"/>
+                </a:rPr>
+                <a:t>日本人が</a:t>
+              </a:r>
+              <a:r>
+                <a:rPr lang="ja-JP" altLang="en-US" sz="2400">
+                  <a:latin typeface="Hiragino Sans W4" panose="020B0400000000000000" pitchFamily="34" charset="-128"/>
+                  <a:ea typeface="Hiragino Sans W4" panose="020B0400000000000000" pitchFamily="34" charset="-128"/>
+                </a:rPr>
+                <a:t>洋画を</a:t>
+              </a:r>
+              <a:r>
+                <a:rPr lang="en-US" altLang="ja-JP" sz="2400" dirty="0">
+                  <a:latin typeface="Hiragino Sans W4" panose="020B0400000000000000" pitchFamily="34" charset="-128"/>
+                  <a:ea typeface="Hiragino Sans W4" panose="020B0400000000000000" pitchFamily="34" charset="-128"/>
+                </a:rPr>
+                <a:t>1</a:t>
+              </a:r>
+              <a:r>
+                <a:rPr lang="ja-JP" altLang="en-US" sz="2400">
+                  <a:latin typeface="Hiragino Sans W4" panose="020B0400000000000000" pitchFamily="34" charset="-128"/>
+                  <a:ea typeface="Hiragino Sans W4" panose="020B0400000000000000" pitchFamily="34" charset="-128"/>
+                </a:rPr>
+                <a:t>時間／週見ると</a:t>
+              </a:r>
+              <a:r>
+                <a:rPr lang="en-US" altLang="ja-JP" sz="2400" dirty="0">
+                  <a:latin typeface="Hiragino Sans W4" panose="020B0400000000000000" pitchFamily="34" charset="-128"/>
+                  <a:ea typeface="Hiragino Sans W4" panose="020B0400000000000000" pitchFamily="34" charset="-128"/>
+                </a:rPr>
+                <a:t>TOEIC</a:t>
+              </a:r>
+              <a:r>
+                <a:rPr lang="ja-JP" altLang="en-US" sz="2400">
+                  <a:latin typeface="Hiragino Sans W4" panose="020B0400000000000000" pitchFamily="34" charset="-128"/>
+                  <a:ea typeface="Hiragino Sans W4" panose="020B0400000000000000" pitchFamily="34" charset="-128"/>
+                </a:rPr>
+                <a:t>の点数は何点上がるか</a:t>
+              </a:r>
+              <a:endParaRPr lang="ja-JP" altLang="en-US" sz="1600"/>
             </a:p>
           </p:txBody>
         </p:sp>
@@ -8391,6 +8520,16 @@
             <a:p>
               <a:pPr algn="ctr"/>
               <a:r>
+                <a:rPr lang="ja-JP" altLang="en-US" sz="1600" b="1">
+                  <a:solidFill>
+                    <a:schemeClr val="tx1"/>
+                  </a:solidFill>
+                  <a:latin typeface="Hiragino Sans W8" panose="020B0400000000000000" pitchFamily="34" charset="-128"/>
+                  <a:ea typeface="Hiragino Sans W8" panose="020B0400000000000000" pitchFamily="34" charset="-128"/>
+                </a:rPr>
+                <a:t>実習</a:t>
+              </a:r>
+              <a:r>
                 <a:rPr kumimoji="1" lang="ja-JP" altLang="en-US" sz="1600" b="1">
                   <a:solidFill>
                     <a:schemeClr val="tx1"/>
@@ -8398,7 +8537,7 @@
                   <a:latin typeface="Hiragino Sans W8" panose="020B0400000000000000" pitchFamily="34" charset="-128"/>
                   <a:ea typeface="Hiragino Sans W8" panose="020B0400000000000000" pitchFamily="34" charset="-128"/>
                 </a:rPr>
-                <a:t>復習編</a:t>
+                <a:t>編</a:t>
               </a:r>
             </a:p>
           </p:txBody>
@@ -8628,6 +8767,16 @@
             <a:p>
               <a:pPr algn="ctr"/>
               <a:r>
+                <a:rPr lang="ja-JP" altLang="en-US" sz="1600" b="1">
+                  <a:solidFill>
+                    <a:schemeClr val="tx1"/>
+                  </a:solidFill>
+                  <a:latin typeface="Hiragino Sans W8" panose="020B0400000000000000" pitchFamily="34" charset="-128"/>
+                  <a:ea typeface="Hiragino Sans W8" panose="020B0400000000000000" pitchFamily="34" charset="-128"/>
+                </a:rPr>
+                <a:t>実習</a:t>
+              </a:r>
+              <a:r>
                 <a:rPr kumimoji="1" lang="ja-JP" altLang="en-US" sz="1600" b="1">
                   <a:solidFill>
                     <a:schemeClr val="tx1"/>
@@ -8635,7 +8784,7 @@
                   <a:latin typeface="Hiragino Sans W8" panose="020B0400000000000000" pitchFamily="34" charset="-128"/>
                   <a:ea typeface="Hiragino Sans W8" panose="020B0400000000000000" pitchFamily="34" charset="-128"/>
                 </a:rPr>
-                <a:t>復習編</a:t>
+                <a:t>編</a:t>
               </a:r>
             </a:p>
           </p:txBody>
@@ -8865,6 +9014,16 @@
             <a:p>
               <a:pPr algn="ctr"/>
               <a:r>
+                <a:rPr lang="ja-JP" altLang="en-US" sz="1600" b="1">
+                  <a:solidFill>
+                    <a:schemeClr val="tx1"/>
+                  </a:solidFill>
+                  <a:latin typeface="Hiragino Sans W8" panose="020B0400000000000000" pitchFamily="34" charset="-128"/>
+                  <a:ea typeface="Hiragino Sans W8" panose="020B0400000000000000" pitchFamily="34" charset="-128"/>
+                </a:rPr>
+                <a:t>実習</a:t>
+              </a:r>
+              <a:r>
                 <a:rPr kumimoji="1" lang="ja-JP" altLang="en-US" sz="1600" b="1">
                   <a:solidFill>
                     <a:schemeClr val="tx1"/>
@@ -8872,7 +9031,7 @@
                   <a:latin typeface="Hiragino Sans W8" panose="020B0400000000000000" pitchFamily="34" charset="-128"/>
                   <a:ea typeface="Hiragino Sans W8" panose="020B0400000000000000" pitchFamily="34" charset="-128"/>
                 </a:rPr>
-                <a:t>復習編</a:t>
+                <a:t>編</a:t>
               </a:r>
             </a:p>
           </p:txBody>
@@ -13582,8 +13741,8 @@
             </a:p>
           </p:txBody>
         </p:sp>
-        <mc:AlternateContent xmlns:mc="http://schemas.openxmlformats.org/markup-compatibility/2006">
-          <mc:Choice xmlns:a14="http://schemas.microsoft.com/office/drawing/2010/main" Requires="a14">
+        <mc:AlternateContent xmlns:mc="http://schemas.openxmlformats.org/markup-compatibility/2006" xmlns:a14="http://schemas.microsoft.com/office/drawing/2010/main">
+          <mc:Choice Requires="a14">
             <p:sp>
               <p:nvSpPr>
                 <p:cNvPr id="6" name="テキスト ボックス 5">
@@ -13954,7 +14113,7 @@
               </p:txBody>
             </p:sp>
           </mc:Choice>
-          <mc:Fallback>
+          <mc:Fallback xmlns="">
             <p:sp>
               <p:nvSpPr>
                 <p:cNvPr id="6" name="テキスト ボックス 5">

--- a/figs/DIYfigures_icpa2.pptx
+++ b/figs/DIYfigures_icpa2.pptx
@@ -5,7 +5,7 @@
     <p:sldMasterId id="2147483648" r:id="rId1"/>
   </p:sldMasterIdLst>
   <p:notesMasterIdLst>
-    <p:notesMasterId r:id="rId12"/>
+    <p:notesMasterId r:id="rId13"/>
   </p:notesMasterIdLst>
   <p:sldIdLst>
     <p:sldId id="258" r:id="rId2"/>
@@ -18,6 +18,7 @@
     <p:sldId id="265" r:id="rId9"/>
     <p:sldId id="266" r:id="rId10"/>
     <p:sldId id="267" r:id="rId11"/>
+    <p:sldId id="268" r:id="rId12"/>
   </p:sldIdLst>
   <p:sldSz cx="12192000" cy="6858000"/>
   <p:notesSz cx="6858000" cy="9144000"/>
@@ -206,7 +207,7 @@
           <a:p>
             <a:fld id="{578D67A2-3998-1741-A572-96ADB5DE7BBF}" type="datetimeFigureOut">
               <a:rPr kumimoji="1" lang="ja-JP" altLang="en-US" smtClean="0"/>
-              <a:t>2026/9/25</a:t>
+              <a:t>2026/10/2</a:t>
             </a:fld>
             <a:endParaRPr kumimoji="1" lang="ja-JP" altLang="en-US"/>
           </a:p>
@@ -904,7 +905,7 @@
           <a:p>
             <a:fld id="{F4B6AA23-F6BB-FA47-96B5-569FAB187581}" type="datetimeFigureOut">
               <a:rPr kumimoji="1" lang="ja-JP" altLang="en-US" smtClean="0"/>
-              <a:t>2026/9/25</a:t>
+              <a:t>2026/10/2</a:t>
             </a:fld>
             <a:endParaRPr kumimoji="1" lang="ja-JP" altLang="en-US"/>
           </a:p>
@@ -1134,7 +1135,7 @@
           <a:p>
             <a:fld id="{F4B6AA23-F6BB-FA47-96B5-569FAB187581}" type="datetimeFigureOut">
               <a:rPr kumimoji="1" lang="ja-JP" altLang="en-US" smtClean="0"/>
-              <a:t>2026/9/25</a:t>
+              <a:t>2026/10/2</a:t>
             </a:fld>
             <a:endParaRPr kumimoji="1" lang="ja-JP" altLang="en-US"/>
           </a:p>
@@ -1374,7 +1375,7 @@
           <a:p>
             <a:fld id="{F4B6AA23-F6BB-FA47-96B5-569FAB187581}" type="datetimeFigureOut">
               <a:rPr kumimoji="1" lang="ja-JP" altLang="en-US" smtClean="0"/>
-              <a:t>2026/9/25</a:t>
+              <a:t>2026/10/2</a:t>
             </a:fld>
             <a:endParaRPr kumimoji="1" lang="ja-JP" altLang="en-US"/>
           </a:p>
@@ -1604,7 +1605,7 @@
           <a:p>
             <a:fld id="{F4B6AA23-F6BB-FA47-96B5-569FAB187581}" type="datetimeFigureOut">
               <a:rPr kumimoji="1" lang="ja-JP" altLang="en-US" smtClean="0"/>
-              <a:t>2026/9/25</a:t>
+              <a:t>2026/10/2</a:t>
             </a:fld>
             <a:endParaRPr kumimoji="1" lang="ja-JP" altLang="en-US"/>
           </a:p>
@@ -1879,7 +1880,7 @@
           <a:p>
             <a:fld id="{F4B6AA23-F6BB-FA47-96B5-569FAB187581}" type="datetimeFigureOut">
               <a:rPr kumimoji="1" lang="ja-JP" altLang="en-US" smtClean="0"/>
-              <a:t>2026/9/25</a:t>
+              <a:t>2026/10/2</a:t>
             </a:fld>
             <a:endParaRPr kumimoji="1" lang="ja-JP" altLang="en-US"/>
           </a:p>
@@ -2208,7 +2209,7 @@
           <a:p>
             <a:fld id="{F4B6AA23-F6BB-FA47-96B5-569FAB187581}" type="datetimeFigureOut">
               <a:rPr kumimoji="1" lang="ja-JP" altLang="en-US" smtClean="0"/>
-              <a:t>2026/9/25</a:t>
+              <a:t>2026/10/2</a:t>
             </a:fld>
             <a:endParaRPr kumimoji="1" lang="ja-JP" altLang="en-US"/>
           </a:p>
@@ -2684,7 +2685,7 @@
           <a:p>
             <a:fld id="{F4B6AA23-F6BB-FA47-96B5-569FAB187581}" type="datetimeFigureOut">
               <a:rPr kumimoji="1" lang="ja-JP" altLang="en-US" smtClean="0"/>
-              <a:t>2026/9/25</a:t>
+              <a:t>2026/10/2</a:t>
             </a:fld>
             <a:endParaRPr kumimoji="1" lang="ja-JP" altLang="en-US"/>
           </a:p>
@@ -2825,7 +2826,7 @@
           <a:p>
             <a:fld id="{F4B6AA23-F6BB-FA47-96B5-569FAB187581}" type="datetimeFigureOut">
               <a:rPr kumimoji="1" lang="ja-JP" altLang="en-US" smtClean="0"/>
-              <a:t>2026/9/25</a:t>
+              <a:t>2026/10/2</a:t>
             </a:fld>
             <a:endParaRPr kumimoji="1" lang="ja-JP" altLang="en-US"/>
           </a:p>
@@ -2938,7 +2939,7 @@
           <a:p>
             <a:fld id="{F4B6AA23-F6BB-FA47-96B5-569FAB187581}" type="datetimeFigureOut">
               <a:rPr kumimoji="1" lang="ja-JP" altLang="en-US" smtClean="0"/>
-              <a:t>2026/9/25</a:t>
+              <a:t>2026/10/2</a:t>
             </a:fld>
             <a:endParaRPr kumimoji="1" lang="ja-JP" altLang="en-US"/>
           </a:p>
@@ -3281,7 +3282,7 @@
           <a:p>
             <a:fld id="{F4B6AA23-F6BB-FA47-96B5-569FAB187581}" type="datetimeFigureOut">
               <a:rPr kumimoji="1" lang="ja-JP" altLang="en-US" smtClean="0"/>
-              <a:t>2026/9/25</a:t>
+              <a:t>2026/10/2</a:t>
             </a:fld>
             <a:endParaRPr kumimoji="1" lang="ja-JP" altLang="en-US"/>
           </a:p>
@@ -3569,7 +3570,7 @@
           <a:p>
             <a:fld id="{F4B6AA23-F6BB-FA47-96B5-569FAB187581}" type="datetimeFigureOut">
               <a:rPr kumimoji="1" lang="ja-JP" altLang="en-US" smtClean="0"/>
-              <a:t>2026/9/25</a:t>
+              <a:t>2026/10/2</a:t>
             </a:fld>
             <a:endParaRPr kumimoji="1" lang="ja-JP" altLang="en-US"/>
           </a:p>
@@ -3842,7 +3843,7 @@
           <a:p>
             <a:fld id="{F4B6AA23-F6BB-FA47-96B5-569FAB187581}" type="datetimeFigureOut">
               <a:rPr kumimoji="1" lang="ja-JP" altLang="en-US" smtClean="0"/>
-              <a:t>2026/9/25</a:t>
+              <a:t>2026/10/2</a:t>
             </a:fld>
             <a:endParaRPr kumimoji="1" lang="ja-JP" altLang="en-US"/>
           </a:p>
@@ -6764,8 +6765,8 @@
           </p:nvSpPr>
           <p:spPr>
             <a:xfrm>
-              <a:off x="9138956" y="593541"/>
-              <a:ext cx="2358528" cy="5670919"/>
+              <a:off x="8809816" y="593541"/>
+              <a:ext cx="2687668" cy="5670919"/>
             </a:xfrm>
             <a:prstGeom prst="roundRect">
               <a:avLst/>
@@ -6814,8 +6815,8 @@
           </p:nvSpPr>
           <p:spPr>
             <a:xfrm>
-              <a:off x="9051280" y="1331764"/>
-              <a:ext cx="2533880" cy="1384636"/>
+              <a:off x="8697669" y="1331764"/>
+              <a:ext cx="2887491" cy="584775"/>
             </a:xfrm>
             <a:prstGeom prst="rect">
               <a:avLst/>
@@ -6843,8 +6844,8 @@
             </a:p>
           </p:txBody>
         </p:sp>
-        <mc:AlternateContent xmlns:mc="http://schemas.openxmlformats.org/markup-compatibility/2006" xmlns:a14="http://schemas.microsoft.com/office/drawing/2010/main">
-          <mc:Choice Requires="a14">
+        <mc:AlternateContent xmlns:mc="http://schemas.openxmlformats.org/markup-compatibility/2006">
+          <mc:Choice xmlns:a14="http://schemas.microsoft.com/office/drawing/2010/main" Requires="a14">
             <p:sp>
               <p:nvSpPr>
                 <p:cNvPr id="23" name="テキスト ボックス 22">
@@ -6859,8 +6860,8 @@
               </p:nvSpPr>
               <p:spPr>
                 <a:xfrm>
-                  <a:off x="9314308" y="4338101"/>
-                  <a:ext cx="2183176" cy="1015663"/>
+                  <a:off x="8965800" y="4367669"/>
+                  <a:ext cx="2400169" cy="1015663"/>
                 </a:xfrm>
                 <a:prstGeom prst="rect">
                   <a:avLst/>
@@ -6937,7 +6938,7 @@
               </p:txBody>
             </p:sp>
           </mc:Choice>
-          <mc:Fallback xmlns="">
+          <mc:Fallback>
             <p:sp>
               <p:nvSpPr>
                 <p:cNvPr id="23" name="テキスト ボックス 22">
@@ -6954,8 +6955,8 @@
               </p:nvSpPr>
               <p:spPr>
                 <a:xfrm>
-                  <a:off x="9314308" y="4338101"/>
-                  <a:ext cx="2183176" cy="1015663"/>
+                  <a:off x="8965800" y="4367669"/>
+                  <a:ext cx="2400169" cy="1015663"/>
                 </a:xfrm>
                 <a:prstGeom prst="rect">
                   <a:avLst/>
@@ -6982,8 +6983,8 @@
             </p:sp>
           </mc:Fallback>
         </mc:AlternateContent>
-        <mc:AlternateContent xmlns:mc="http://schemas.openxmlformats.org/markup-compatibility/2006" xmlns:a14="http://schemas.microsoft.com/office/drawing/2010/main">
-          <mc:Choice Requires="a14">
+        <mc:AlternateContent xmlns:mc="http://schemas.openxmlformats.org/markup-compatibility/2006">
+          <mc:Choice xmlns:a14="http://schemas.microsoft.com/office/drawing/2010/main" Requires="a14">
             <p:sp>
               <p:nvSpPr>
                 <p:cNvPr id="24" name="角丸四角形 23">
@@ -6999,7 +7000,7 @@
               <p:spPr>
                 <a:xfrm>
                   <a:off x="606840" y="593541"/>
-                  <a:ext cx="4736342" cy="2048450"/>
+                  <a:ext cx="4736342" cy="2491182"/>
                 </a:xfrm>
                 <a:prstGeom prst="roundRect">
                   <a:avLst/>
@@ -7030,7 +7031,7 @@
                 <a:lstStyle/>
                 <a:p>
                   <a:r>
-                    <a:rPr kumimoji="1" lang="ja-JP" altLang="en-US" sz="2400" b="1">
+                    <a:rPr kumimoji="1" lang="ja-JP" altLang="en-US" sz="2800" b="1">
                       <a:solidFill>
                         <a:schemeClr val="tx1"/>
                       </a:solidFill>
@@ -7040,7 +7041,7 @@
                     <a:t>標本</a:t>
                   </a:r>
                   <a:r>
-                    <a:rPr kumimoji="1" lang="en-US" altLang="ja-JP" sz="2400" b="1" dirty="0">
+                    <a:rPr kumimoji="1" lang="en-US" altLang="ja-JP" sz="2800" b="1" dirty="0">
                       <a:solidFill>
                         <a:schemeClr val="tx1"/>
                       </a:solidFill>
@@ -7050,7 +7051,7 @@
                     <a:t>1</a:t>
                   </a:r>
                   <a:r>
-                    <a:rPr kumimoji="1" lang="ja-JP" altLang="en-US" sz="2400">
+                    <a:rPr kumimoji="1" lang="ja-JP" altLang="en-US" sz="2800">
                       <a:solidFill>
                         <a:schemeClr val="tx1"/>
                       </a:solidFill>
@@ -7060,7 +7061,7 @@
                     <a:t>（</a:t>
                   </a:r>
                   <a:r>
-                    <a:rPr kumimoji="1" lang="en-US" altLang="ja-JP" sz="2400" dirty="0">
+                    <a:rPr kumimoji="1" lang="en-US" altLang="ja-JP" sz="2800" dirty="0">
                       <a:solidFill>
                         <a:schemeClr val="tx1"/>
                       </a:solidFill>
@@ -7070,7 +7071,7 @@
                     <a:t>n=10</a:t>
                   </a:r>
                   <a:r>
-                    <a:rPr kumimoji="1" lang="ja-JP" altLang="en-US" sz="2400">
+                    <a:rPr kumimoji="1" lang="ja-JP" altLang="en-US" sz="2800">
                       <a:solidFill>
                         <a:schemeClr val="tx1"/>
                       </a:solidFill>
@@ -7079,7 +7080,7 @@
                     </a:rPr>
                     <a:t>）</a:t>
                   </a:r>
-                  <a:endParaRPr kumimoji="1" lang="en-US" altLang="ja-JP" sz="2400" dirty="0">
+                  <a:endParaRPr kumimoji="1" lang="en-US" altLang="ja-JP" sz="2800" dirty="0">
                     <a:solidFill>
                       <a:schemeClr val="tx1"/>
                     </a:solidFill>
@@ -7095,7 +7096,7 @@
                         <m:sSub>
                           <m:sSubPr>
                             <m:ctrlPr>
-                              <a:rPr kumimoji="1" lang="en-US" altLang="ja-JP" sz="3200" b="1" i="1" smtClean="0">
+                              <a:rPr kumimoji="1" lang="en-US" altLang="ja-JP" sz="3600" b="1" i="1" smtClean="0">
                                 <a:solidFill>
                                   <a:schemeClr val="tx1"/>
                                 </a:solidFill>
@@ -7109,7 +7110,7 @@
                               <m:accPr>
                                 <m:chr m:val="̂"/>
                                 <m:ctrlPr>
-                                  <a:rPr kumimoji="1" lang="en-US" altLang="ja-JP" sz="3200" b="1" i="1" smtClean="0">
+                                  <a:rPr kumimoji="1" lang="en-US" altLang="ja-JP" sz="3600" b="1" i="1" smtClean="0">
                                     <a:solidFill>
                                       <a:schemeClr val="tx1"/>
                                     </a:solidFill>
@@ -7120,7 +7121,7 @@
                               </m:accPr>
                               <m:e>
                                 <m:r>
-                                  <a:rPr kumimoji="1" lang="en-US" altLang="ja-JP" sz="3200" b="1" i="1" smtClean="0">
+                                  <a:rPr kumimoji="1" lang="en-US" altLang="ja-JP" sz="3600" b="1" i="1" smtClean="0">
                                     <a:solidFill>
                                       <a:schemeClr val="tx1"/>
                                     </a:solidFill>
@@ -7134,7 +7135,7 @@
                           </m:e>
                           <m:sub>
                             <m:r>
-                              <a:rPr kumimoji="1" lang="en-US" altLang="ja-JP" sz="3200" b="1" i="1" smtClean="0">
+                              <a:rPr kumimoji="1" lang="en-US" altLang="ja-JP" sz="3600" b="1" i="1" smtClean="0">
                                 <a:solidFill>
                                   <a:schemeClr val="tx1"/>
                                 </a:solidFill>
@@ -7146,7 +7147,7 @@
                           </m:sub>
                         </m:sSub>
                         <m:r>
-                          <a:rPr kumimoji="1" lang="en-US" altLang="ja-JP" sz="3200" b="1" i="1" smtClean="0">
+                          <a:rPr kumimoji="1" lang="en-US" altLang="ja-JP" sz="3600" b="1" i="1" smtClean="0">
                             <a:solidFill>
                               <a:schemeClr val="tx1"/>
                             </a:solidFill>
@@ -7158,7 +7159,7 @@
                       </m:oMath>
                     </m:oMathPara>
                   </a14:m>
-                  <a:endParaRPr kumimoji="1" lang="en-US" altLang="ja-JP" sz="3200" dirty="0">
+                  <a:endParaRPr kumimoji="1" lang="en-US" altLang="ja-JP" sz="3600" dirty="0">
                     <a:solidFill>
                       <a:schemeClr val="tx1"/>
                     </a:solidFill>
@@ -7168,7 +7169,7 @@
                 </a:p>
                 <a:p>
                   <a:r>
-                    <a:rPr lang="ja-JP" altLang="en-US" sz="2400">
+                    <a:rPr lang="ja-JP" altLang="en-US" sz="2800">
                       <a:solidFill>
                         <a:schemeClr val="tx1"/>
                       </a:solidFill>
@@ -7182,7 +7183,7 @@
                       <m:sSub>
                         <m:sSubPr>
                           <m:ctrlPr>
-                            <a:rPr lang="en-US" altLang="ja-JP" sz="2400" b="1" i="1">
+                            <a:rPr lang="en-US" altLang="ja-JP" sz="2800" b="1" i="1">
                               <a:solidFill>
                                 <a:schemeClr val="tx1"/>
                               </a:solidFill>
@@ -7196,7 +7197,7 @@
                             <m:accPr>
                               <m:chr m:val="̂"/>
                               <m:ctrlPr>
-                                <a:rPr lang="en-US" altLang="ja-JP" sz="2400" b="1" i="1">
+                                <a:rPr lang="en-US" altLang="ja-JP" sz="2800" b="1" i="1">
                                   <a:solidFill>
                                     <a:schemeClr val="tx1"/>
                                   </a:solidFill>
@@ -7207,7 +7208,7 @@
                             </m:accPr>
                             <m:e>
                               <m:r>
-                                <a:rPr lang="en-US" altLang="ja-JP" sz="2400" b="1" i="1">
+                                <a:rPr lang="en-US" altLang="ja-JP" sz="2800" b="1" i="1">
                                   <a:solidFill>
                                     <a:schemeClr val="tx1"/>
                                   </a:solidFill>
@@ -7221,7 +7222,7 @@
                         </m:e>
                         <m:sub>
                           <m:r>
-                            <a:rPr lang="en-US" altLang="ja-JP" sz="2400" b="1" i="1">
+                            <a:rPr lang="en-US" altLang="ja-JP" sz="2800" b="1" i="1">
                               <a:solidFill>
                                 <a:schemeClr val="tx1"/>
                               </a:solidFill>
@@ -7235,7 +7236,7 @@
                     </m:oMath>
                   </a14:m>
                   <a:r>
-                    <a:rPr kumimoji="1" lang="ja-JP" altLang="en-US" sz="2400">
+                    <a:rPr kumimoji="1" lang="ja-JP" altLang="en-US" sz="2800">
                       <a:solidFill>
                         <a:schemeClr val="tx1"/>
                       </a:solidFill>
@@ -7249,7 +7250,7 @@
                       <m:sSub>
                         <m:sSubPr>
                           <m:ctrlPr>
-                            <a:rPr lang="en-US" altLang="ja-JP" sz="2400" b="1" i="1">
+                            <a:rPr lang="en-US" altLang="ja-JP" sz="2800" b="1" i="1">
                               <a:solidFill>
                                 <a:schemeClr val="tx1"/>
                               </a:solidFill>
@@ -7260,7 +7261,7 @@
                         </m:sSubPr>
                         <m:e>
                           <m:r>
-                            <a:rPr lang="en-US" altLang="ja-JP" sz="2400" b="1" i="1">
+                            <a:rPr lang="en-US" altLang="ja-JP" sz="2800" b="1" i="1">
                               <a:solidFill>
                                 <a:schemeClr val="tx1"/>
                               </a:solidFill>
@@ -7272,7 +7273,7 @@
                         </m:e>
                         <m:sub>
                           <m:r>
-                            <a:rPr lang="en-US" altLang="ja-JP" sz="2400" b="1" i="1">
+                            <a:rPr lang="en-US" altLang="ja-JP" sz="2800" b="1" i="1">
                               <a:solidFill>
                                 <a:schemeClr val="tx1"/>
                               </a:solidFill>
@@ -7286,7 +7287,7 @@
                     </m:oMath>
                   </a14:m>
                   <a:r>
-                    <a:rPr kumimoji="1" lang="ja-JP" altLang="en-US" sz="2400">
+                    <a:rPr kumimoji="1" lang="ja-JP" altLang="en-US" sz="2800">
                       <a:solidFill>
                         <a:schemeClr val="tx1"/>
                       </a:solidFill>
@@ -7296,7 +7297,7 @@
                     <a:t>からかけ離れているかもしれない</a:t>
                   </a:r>
                   <a:r>
-                    <a:rPr kumimoji="1" lang="en-US" altLang="ja-JP" sz="2400" dirty="0">
+                    <a:rPr kumimoji="1" lang="en-US" altLang="ja-JP" sz="2800" dirty="0">
                       <a:solidFill>
                         <a:schemeClr val="tx1"/>
                       </a:solidFill>
@@ -7306,7 +7307,7 @@
                     <a:t>…</a:t>
                   </a:r>
                   <a:r>
-                    <a:rPr kumimoji="1" lang="ja-JP" altLang="en-US" sz="2400">
+                    <a:rPr kumimoji="1" lang="ja-JP" altLang="en-US" sz="2800">
                       <a:solidFill>
                         <a:schemeClr val="tx1"/>
                       </a:solidFill>
@@ -7319,7 +7320,7 @@
               </p:txBody>
             </p:sp>
           </mc:Choice>
-          <mc:Fallback xmlns="">
+          <mc:Fallback>
             <p:sp>
               <p:nvSpPr>
                 <p:cNvPr id="24" name="角丸四角形 23">
@@ -7337,7 +7338,7 @@
               <p:spPr>
                 <a:xfrm>
                   <a:off x="606840" y="593541"/>
-                  <a:ext cx="4736342" cy="2048450"/>
+                  <a:ext cx="4736342" cy="2491182"/>
                 </a:xfrm>
                 <a:prstGeom prst="roundRect">
                   <a:avLst/>
@@ -7345,7 +7346,7 @@
                 <a:blipFill>
                   <a:blip r:embed="rId4"/>
                   <a:stretch>
-                    <a:fillRect/>
+                    <a:fillRect b="-4000"/>
                   </a:stretch>
                 </a:blipFill>
                 <a:ln w="38100"/>
@@ -7365,8 +7366,8 @@
             </p:sp>
           </mc:Fallback>
         </mc:AlternateContent>
-        <mc:AlternateContent xmlns:mc="http://schemas.openxmlformats.org/markup-compatibility/2006" xmlns:a14="http://schemas.microsoft.com/office/drawing/2010/main">
-          <mc:Choice Requires="a14">
+        <mc:AlternateContent xmlns:mc="http://schemas.openxmlformats.org/markup-compatibility/2006">
+          <mc:Choice xmlns:a14="http://schemas.microsoft.com/office/drawing/2010/main" Requires="a14">
             <p:sp>
               <p:nvSpPr>
                 <p:cNvPr id="26" name="角丸四角形 25">
@@ -7381,8 +7382,8 @@
               </p:nvSpPr>
               <p:spPr>
                 <a:xfrm>
-                  <a:off x="606840" y="4216010"/>
-                  <a:ext cx="4736342" cy="2048450"/>
+                  <a:off x="606840" y="3773278"/>
+                  <a:ext cx="4736342" cy="2491182"/>
                 </a:xfrm>
                 <a:prstGeom prst="roundRect">
                   <a:avLst/>
@@ -7413,7 +7414,7 @@
                 <a:lstStyle/>
                 <a:p>
                   <a:r>
-                    <a:rPr kumimoji="1" lang="ja-JP" altLang="en-US" sz="2400" b="1">
+                    <a:rPr kumimoji="1" lang="ja-JP" altLang="en-US" sz="2800" b="1">
                       <a:solidFill>
                         <a:schemeClr val="tx1"/>
                       </a:solidFill>
@@ -7423,7 +7424,7 @@
                     <a:t>標本</a:t>
                   </a:r>
                   <a:r>
-                    <a:rPr lang="en-US" altLang="ja-JP" sz="2400" b="1" dirty="0">
+                    <a:rPr lang="en-US" altLang="ja-JP" sz="2800" b="1" dirty="0">
                       <a:solidFill>
                         <a:schemeClr val="tx1"/>
                       </a:solidFill>
@@ -7433,7 +7434,7 @@
                     <a:t>2</a:t>
                   </a:r>
                   <a:r>
-                    <a:rPr kumimoji="1" lang="ja-JP" altLang="en-US" sz="2400">
+                    <a:rPr kumimoji="1" lang="ja-JP" altLang="en-US" sz="2800">
                       <a:solidFill>
                         <a:schemeClr val="tx1"/>
                       </a:solidFill>
@@ -7443,7 +7444,7 @@
                     <a:t>（</a:t>
                   </a:r>
                   <a:r>
-                    <a:rPr kumimoji="1" lang="en-US" altLang="ja-JP" sz="2400" dirty="0">
+                    <a:rPr kumimoji="1" lang="en-US" altLang="ja-JP" sz="2800" dirty="0">
                       <a:solidFill>
                         <a:schemeClr val="tx1"/>
                       </a:solidFill>
@@ -7453,7 +7454,7 @@
                     <a:t>n=10,000</a:t>
                   </a:r>
                   <a:r>
-                    <a:rPr kumimoji="1" lang="ja-JP" altLang="en-US" sz="2400">
+                    <a:rPr kumimoji="1" lang="ja-JP" altLang="en-US" sz="2800">
                       <a:solidFill>
                         <a:schemeClr val="tx1"/>
                       </a:solidFill>
@@ -7462,7 +7463,7 @@
                     </a:rPr>
                     <a:t>）</a:t>
                   </a:r>
-                  <a:endParaRPr kumimoji="1" lang="en-US" altLang="ja-JP" sz="2400" dirty="0">
+                  <a:endParaRPr kumimoji="1" lang="en-US" altLang="ja-JP" sz="2800" dirty="0">
                     <a:solidFill>
                       <a:schemeClr val="tx1"/>
                     </a:solidFill>
@@ -7478,7 +7479,7 @@
                         <m:sSub>
                           <m:sSubPr>
                             <m:ctrlPr>
-                              <a:rPr kumimoji="1" lang="en-US" altLang="ja-JP" sz="3200" b="1" i="1" smtClean="0">
+                              <a:rPr kumimoji="1" lang="en-US" altLang="ja-JP" sz="3600" b="1" i="1" smtClean="0">
                                 <a:solidFill>
                                   <a:schemeClr val="tx1"/>
                                 </a:solidFill>
@@ -7492,7 +7493,7 @@
                               <m:accPr>
                                 <m:chr m:val="̂"/>
                                 <m:ctrlPr>
-                                  <a:rPr kumimoji="1" lang="en-US" altLang="ja-JP" sz="3200" b="1" i="1" smtClean="0">
+                                  <a:rPr kumimoji="1" lang="en-US" altLang="ja-JP" sz="3600" b="1" i="1" smtClean="0">
                                     <a:solidFill>
                                       <a:schemeClr val="tx1"/>
                                     </a:solidFill>
@@ -7503,7 +7504,7 @@
                               </m:accPr>
                               <m:e>
                                 <m:r>
-                                  <a:rPr kumimoji="1" lang="en-US" altLang="ja-JP" sz="3200" b="1" i="1" smtClean="0">
+                                  <a:rPr kumimoji="1" lang="en-US" altLang="ja-JP" sz="3600" b="1" i="1" smtClean="0">
                                     <a:solidFill>
                                       <a:schemeClr val="tx1"/>
                                     </a:solidFill>
@@ -7517,7 +7518,7 @@
                           </m:e>
                           <m:sub>
                             <m:r>
-                              <a:rPr kumimoji="1" lang="en-US" altLang="ja-JP" sz="3200" b="1" i="1" smtClean="0">
+                              <a:rPr kumimoji="1" lang="en-US" altLang="ja-JP" sz="3600" b="1" i="1" smtClean="0">
                                 <a:solidFill>
                                   <a:schemeClr val="tx1"/>
                                 </a:solidFill>
@@ -7529,7 +7530,7 @@
                           </m:sub>
                         </m:sSub>
                         <m:r>
-                          <a:rPr kumimoji="1" lang="en-US" altLang="ja-JP" sz="3200" b="1" i="1" smtClean="0">
+                          <a:rPr kumimoji="1" lang="en-US" altLang="ja-JP" sz="3600" b="1" i="1" smtClean="0">
                             <a:solidFill>
                               <a:schemeClr val="tx1"/>
                             </a:solidFill>
@@ -7541,7 +7542,7 @@
                       </m:oMath>
                     </m:oMathPara>
                   </a14:m>
-                  <a:endParaRPr kumimoji="1" lang="en-US" altLang="ja-JP" sz="3200" dirty="0">
+                  <a:endParaRPr kumimoji="1" lang="en-US" altLang="ja-JP" sz="3600" dirty="0">
                     <a:solidFill>
                       <a:schemeClr val="tx1"/>
                     </a:solidFill>
@@ -7551,7 +7552,7 @@
                 </a:p>
                 <a:p>
                   <a:r>
-                    <a:rPr lang="ja-JP" altLang="en-US" sz="2400">
+                    <a:rPr lang="ja-JP" altLang="en-US" sz="2800">
                       <a:solidFill>
                         <a:schemeClr val="tx1"/>
                       </a:solidFill>
@@ -7565,7 +7566,7 @@
                       <m:sSub>
                         <m:sSubPr>
                           <m:ctrlPr>
-                            <a:rPr lang="en-US" altLang="ja-JP" sz="2400" b="1" i="1">
+                            <a:rPr lang="en-US" altLang="ja-JP" sz="2800" b="1" i="1">
                               <a:solidFill>
                                 <a:schemeClr val="tx1"/>
                               </a:solidFill>
@@ -7579,7 +7580,7 @@
                             <m:accPr>
                               <m:chr m:val="̂"/>
                               <m:ctrlPr>
-                                <a:rPr lang="en-US" altLang="ja-JP" sz="2400" b="1" i="1">
+                                <a:rPr lang="en-US" altLang="ja-JP" sz="2800" b="1" i="1">
                                   <a:solidFill>
                                     <a:schemeClr val="tx1"/>
                                   </a:solidFill>
@@ -7590,7 +7591,7 @@
                             </m:accPr>
                             <m:e>
                               <m:r>
-                                <a:rPr lang="en-US" altLang="ja-JP" sz="2400" b="1" i="1">
+                                <a:rPr lang="en-US" altLang="ja-JP" sz="2800" b="1" i="1">
                                   <a:solidFill>
                                     <a:schemeClr val="tx1"/>
                                   </a:solidFill>
@@ -7604,7 +7605,7 @@
                         </m:e>
                         <m:sub>
                           <m:r>
-                            <a:rPr lang="en-US" altLang="ja-JP" sz="2400" b="1" i="1">
+                            <a:rPr lang="en-US" altLang="ja-JP" sz="2800" b="1" i="1">
                               <a:solidFill>
                                 <a:schemeClr val="tx1"/>
                               </a:solidFill>
@@ -7618,7 +7619,7 @@
                     </m:oMath>
                   </a14:m>
                   <a:r>
-                    <a:rPr kumimoji="1" lang="ja-JP" altLang="en-US" sz="2400">
+                    <a:rPr kumimoji="1" lang="ja-JP" altLang="en-US" sz="2800">
                       <a:solidFill>
                         <a:schemeClr val="tx1"/>
                       </a:solidFill>
@@ -7632,7 +7633,7 @@
                       <m:sSub>
                         <m:sSubPr>
                           <m:ctrlPr>
-                            <a:rPr lang="en-US" altLang="ja-JP" sz="2400" b="1" i="1">
+                            <a:rPr lang="en-US" altLang="ja-JP" sz="2800" b="1" i="1">
                               <a:solidFill>
                                 <a:schemeClr val="tx1"/>
                               </a:solidFill>
@@ -7643,7 +7644,7 @@
                         </m:sSubPr>
                         <m:e>
                           <m:r>
-                            <a:rPr lang="en-US" altLang="ja-JP" sz="2400" b="1" i="1">
+                            <a:rPr lang="en-US" altLang="ja-JP" sz="2800" b="1" i="1">
                               <a:solidFill>
                                 <a:schemeClr val="tx1"/>
                               </a:solidFill>
@@ -7655,7 +7656,7 @@
                         </m:e>
                         <m:sub>
                           <m:r>
-                            <a:rPr lang="en-US" altLang="ja-JP" sz="2400" b="1" i="1">
+                            <a:rPr lang="en-US" altLang="ja-JP" sz="2800" b="1" i="1">
                               <a:solidFill>
                                 <a:schemeClr val="tx1"/>
                               </a:solidFill>
@@ -7669,7 +7670,7 @@
                     </m:oMath>
                   </a14:m>
                   <a:r>
-                    <a:rPr kumimoji="1" lang="ja-JP" altLang="en-US" sz="2400">
+                    <a:rPr kumimoji="1" lang="ja-JP" altLang="en-US" sz="2800">
                       <a:solidFill>
                         <a:schemeClr val="tx1"/>
                       </a:solidFill>
@@ -7682,7 +7683,7 @@
               </p:txBody>
             </p:sp>
           </mc:Choice>
-          <mc:Fallback xmlns="">
+          <mc:Fallback>
             <p:sp>
               <p:nvSpPr>
                 <p:cNvPr id="26" name="角丸四角形 25">
@@ -7699,8 +7700,8 @@
               </p:nvSpPr>
               <p:spPr>
                 <a:xfrm>
-                  <a:off x="606840" y="4216010"/>
-                  <a:ext cx="4736342" cy="2048450"/>
+                  <a:off x="606840" y="3773278"/>
+                  <a:ext cx="4736342" cy="2491182"/>
                 </a:xfrm>
                 <a:prstGeom prst="roundRect">
                   <a:avLst/>
@@ -7742,7 +7743,7 @@
           </p:nvSpPr>
           <p:spPr>
             <a:xfrm flipH="1">
-              <a:off x="5780180" y="966565"/>
+              <a:off x="5780180" y="1187931"/>
               <a:ext cx="2592638" cy="1302401"/>
             </a:xfrm>
             <a:prstGeom prst="rightArrow">
@@ -7794,7 +7795,7 @@
           </p:nvSpPr>
           <p:spPr>
             <a:xfrm flipH="1">
-              <a:off x="5780180" y="4589035"/>
+              <a:off x="5780180" y="4367669"/>
               <a:ext cx="2592638" cy="1302401"/>
             </a:xfrm>
             <a:prstGeom prst="rightArrow">
@@ -7846,8 +7847,8 @@
           </p:nvSpPr>
           <p:spPr>
             <a:xfrm>
-              <a:off x="9226632" y="2074839"/>
-              <a:ext cx="2183176" cy="1938992"/>
+              <a:off x="8921963" y="2074839"/>
+              <a:ext cx="2487845" cy="1569660"/>
             </a:xfrm>
             <a:prstGeom prst="rect">
               <a:avLst/>
@@ -7912,6 +7913,2352 @@
     <p:extLst>
       <p:ext uri="{BB962C8B-B14F-4D97-AF65-F5344CB8AC3E}">
         <p14:creationId xmlns:p14="http://schemas.microsoft.com/office/powerpoint/2010/main" val="3382139105"/>
+      </p:ext>
+    </p:extLst>
+  </p:cSld>
+  <p:clrMapOvr>
+    <a:masterClrMapping/>
+  </p:clrMapOvr>
+</p:sld>
+</file>
+
+<file path=ppt/slides/slide11.xml><?xml version="1.0" encoding="utf-8"?>
+<p:sld xmlns:a="http://schemas.openxmlformats.org/drawingml/2006/main" xmlns:r="http://schemas.openxmlformats.org/officeDocument/2006/relationships" xmlns:p="http://schemas.openxmlformats.org/presentationml/2006/main">
+  <p:cSld>
+    <p:spTree>
+      <p:nvGrpSpPr>
+        <p:cNvPr id="1" name=""/>
+        <p:cNvGrpSpPr/>
+        <p:nvPr/>
+      </p:nvGrpSpPr>
+      <p:grpSpPr>
+        <a:xfrm>
+          <a:off x="0" y="0"/>
+          <a:ext cx="0" cy="0"/>
+          <a:chOff x="0" y="0"/>
+          <a:chExt cx="0" cy="0"/>
+        </a:xfrm>
+      </p:grpSpPr>
+      <p:grpSp>
+        <p:nvGrpSpPr>
+          <p:cNvPr id="48" name="グループ化 47">
+            <a:extLst>
+              <a:ext uri="{FF2B5EF4-FFF2-40B4-BE49-F238E27FC236}">
+                <a16:creationId xmlns:a16="http://schemas.microsoft.com/office/drawing/2014/main" id="{FC599CBB-8E88-7AA1-028F-0F598AD4C73D}"/>
+              </a:ext>
+            </a:extLst>
+          </p:cNvPr>
+          <p:cNvGrpSpPr/>
+          <p:nvPr/>
+        </p:nvGrpSpPr>
+        <p:grpSpPr>
+          <a:xfrm>
+            <a:off x="166645" y="109041"/>
+            <a:ext cx="12109838" cy="6748959"/>
+            <a:chOff x="315311" y="109041"/>
+            <a:chExt cx="12109838" cy="6748959"/>
+          </a:xfrm>
+        </p:grpSpPr>
+        <p:sp>
+          <p:nvSpPr>
+            <p:cNvPr id="2" name="角丸四角形 1">
+              <a:extLst>
+                <a:ext uri="{FF2B5EF4-FFF2-40B4-BE49-F238E27FC236}">
+                  <a16:creationId xmlns:a16="http://schemas.microsoft.com/office/drawing/2014/main" id="{96300DE6-E9A5-764C-C23F-87E69D8A3F7E}"/>
+                </a:ext>
+              </a:extLst>
+            </p:cNvPr>
+            <p:cNvSpPr/>
+            <p:nvPr/>
+          </p:nvSpPr>
+          <p:spPr>
+            <a:xfrm>
+              <a:off x="9693643" y="492957"/>
+              <a:ext cx="2400170" cy="5670919"/>
+            </a:xfrm>
+            <a:prstGeom prst="roundRect">
+              <a:avLst/>
+            </a:prstGeom>
+            <a:solidFill>
+              <a:schemeClr val="bg1"/>
+            </a:solidFill>
+            <a:ln w="38100"/>
+          </p:spPr>
+          <p:style>
+            <a:lnRef idx="2">
+              <a:schemeClr val="accent1">
+                <a:shade val="15000"/>
+              </a:schemeClr>
+            </a:lnRef>
+            <a:fillRef idx="1">
+              <a:schemeClr val="accent1"/>
+            </a:fillRef>
+            <a:effectRef idx="0">
+              <a:schemeClr val="accent1"/>
+            </a:effectRef>
+            <a:fontRef idx="minor">
+              <a:schemeClr val="lt1"/>
+            </a:fontRef>
+          </p:style>
+          <p:txBody>
+            <a:bodyPr rtlCol="0" anchor="ctr"/>
+            <a:lstStyle/>
+            <a:p>
+              <a:pPr algn="ctr"/>
+              <a:endParaRPr kumimoji="1" lang="ja-JP" altLang="en-US"/>
+            </a:p>
+          </p:txBody>
+        </p:sp>
+        <p:sp>
+          <p:nvSpPr>
+            <p:cNvPr id="3" name="テキスト ボックス 2">
+              <a:extLst>
+                <a:ext uri="{FF2B5EF4-FFF2-40B4-BE49-F238E27FC236}">
+                  <a16:creationId xmlns:a16="http://schemas.microsoft.com/office/drawing/2014/main" id="{411B0805-A0E6-136B-9EFF-4B95774C3ED3}"/>
+                </a:ext>
+              </a:extLst>
+            </p:cNvPr>
+            <p:cNvSpPr txBox="1"/>
+            <p:nvPr/>
+          </p:nvSpPr>
+          <p:spPr>
+            <a:xfrm>
+              <a:off x="9537658" y="1251813"/>
+              <a:ext cx="2887491" cy="584775"/>
+            </a:xfrm>
+            <a:prstGeom prst="rect">
+              <a:avLst/>
+            </a:prstGeom>
+            <a:noFill/>
+          </p:spPr>
+          <p:txBody>
+            <a:bodyPr wrap="square" rtlCol="0">
+              <a:spAutoFit/>
+            </a:bodyPr>
+            <a:lstStyle/>
+            <a:p>
+              <a:pPr algn="ctr"/>
+              <a:r>
+                <a:rPr kumimoji="1" lang="ja-JP" altLang="en-US" sz="3200" b="1">
+                  <a:latin typeface="Hiragino Sans W8" panose="020B0400000000000000" pitchFamily="34" charset="-128"/>
+                  <a:ea typeface="Hiragino Sans W8" panose="020B0400000000000000" pitchFamily="34" charset="-128"/>
+                </a:rPr>
+                <a:t>母集団</a:t>
+              </a:r>
+              <a:endParaRPr kumimoji="1" lang="ja-JP" altLang="en-US" b="1">
+                <a:latin typeface="Hiragino Sans W8" panose="020B0400000000000000" pitchFamily="34" charset="-128"/>
+                <a:ea typeface="Hiragino Sans W8" panose="020B0400000000000000" pitchFamily="34" charset="-128"/>
+              </a:endParaRPr>
+            </a:p>
+          </p:txBody>
+        </p:sp>
+        <mc:AlternateContent xmlns:mc="http://schemas.openxmlformats.org/markup-compatibility/2006">
+          <mc:Choice xmlns:a14="http://schemas.microsoft.com/office/drawing/2010/main" Requires="a14">
+            <p:sp>
+              <p:nvSpPr>
+                <p:cNvPr id="4" name="テキスト ボックス 3">
+                  <a:extLst>
+                    <a:ext uri="{FF2B5EF4-FFF2-40B4-BE49-F238E27FC236}">
+                      <a16:creationId xmlns:a16="http://schemas.microsoft.com/office/drawing/2014/main" id="{C5E73E36-7ACA-20A4-9E94-C62AD883CE9C}"/>
+                    </a:ext>
+                  </a:extLst>
+                </p:cNvPr>
+                <p:cNvSpPr txBox="1"/>
+                <p:nvPr/>
+              </p:nvSpPr>
+              <p:spPr>
+                <a:xfrm>
+                  <a:off x="9781320" y="2970140"/>
+                  <a:ext cx="2400169" cy="584775"/>
+                </a:xfrm>
+                <a:prstGeom prst="rect">
+                  <a:avLst/>
+                </a:prstGeom>
+                <a:noFill/>
+              </p:spPr>
+              <p:txBody>
+                <a:bodyPr wrap="square">
+                  <a:spAutoFit/>
+                </a:bodyPr>
+                <a:lstStyle/>
+                <a:p>
+                  <a:pPr algn="ctr"/>
+                  <a:r>
+                    <a:rPr kumimoji="1" lang="ja-JP" altLang="en-US" sz="2800" b="1">
+                      <a:latin typeface="Cambria Math" panose="02040503050406030204" pitchFamily="18" charset="0"/>
+                      <a:ea typeface="Hiragino Sans W4" panose="020B0400000000000000" pitchFamily="34" charset="-128"/>
+                    </a:rPr>
+                    <a:t>真の傾き</a:t>
+                  </a:r>
+                  <a14:m>
+                    <m:oMath xmlns:m="http://schemas.openxmlformats.org/officeDocument/2006/math">
+                      <m:sSub>
+                        <m:sSubPr>
+                          <m:ctrlPr>
+                            <a:rPr lang="en-US" altLang="ja-JP" sz="3200" b="1" i="1" smtClean="0">
+                              <a:latin typeface="Cambria Math" panose="02040503050406030204" pitchFamily="18" charset="0"/>
+                              <a:ea typeface="Hiragino Sans W4" panose="020B0400000000000000" pitchFamily="34" charset="-128"/>
+                            </a:rPr>
+                          </m:ctrlPr>
+                        </m:sSubPr>
+                        <m:e>
+                          <m:r>
+                            <a:rPr lang="en-US" altLang="ja-JP" sz="3200" b="1" i="1" smtClean="0">
+                              <a:latin typeface="Cambria Math" panose="02040503050406030204" pitchFamily="18" charset="0"/>
+                              <a:ea typeface="Hiragino Sans W4" panose="020B0400000000000000" pitchFamily="34" charset="-128"/>
+                            </a:rPr>
+                            <m:t>𝜷</m:t>
+                          </m:r>
+                        </m:e>
+                        <m:sub>
+                          <m:r>
+                            <a:rPr lang="en-US" altLang="ja-JP" sz="3200" b="1" i="1" smtClean="0">
+                              <a:latin typeface="Cambria Math" panose="02040503050406030204" pitchFamily="18" charset="0"/>
+                              <a:ea typeface="Hiragino Sans W4" panose="020B0400000000000000" pitchFamily="34" charset="-128"/>
+                            </a:rPr>
+                            <m:t>𝟏</m:t>
+                          </m:r>
+                        </m:sub>
+                      </m:sSub>
+                    </m:oMath>
+                  </a14:m>
+                  <a:endParaRPr kumimoji="1" lang="en-US" altLang="ja-JP" sz="2800" b="1" dirty="0">
+                    <a:latin typeface="Cambria Math" panose="02040503050406030204" pitchFamily="18" charset="0"/>
+                    <a:ea typeface="Hiragino Sans W4" panose="020B0400000000000000" pitchFamily="34" charset="-128"/>
+                  </a:endParaRPr>
+                </a:p>
+              </p:txBody>
+            </p:sp>
+          </mc:Choice>
+          <mc:Fallback>
+            <p:sp>
+              <p:nvSpPr>
+                <p:cNvPr id="4" name="テキスト ボックス 3">
+                  <a:extLst>
+                    <a:ext uri="{FF2B5EF4-FFF2-40B4-BE49-F238E27FC236}">
+                      <a16:creationId xmlns:a16="http://schemas.microsoft.com/office/drawing/2014/main" id="{C5E73E36-7ACA-20A4-9E94-C62AD883CE9C}"/>
+                    </a:ext>
+                  </a:extLst>
+                </p:cNvPr>
+                <p:cNvSpPr txBox="1">
+                  <a:spLocks noRot="1" noChangeAspect="1" noMove="1" noResize="1" noEditPoints="1" noAdjustHandles="1" noChangeArrowheads="1" noChangeShapeType="1" noTextEdit="1"/>
+                </p:cNvSpPr>
+                <p:nvPr/>
+              </p:nvSpPr>
+              <p:spPr>
+                <a:xfrm>
+                  <a:off x="9781320" y="2970140"/>
+                  <a:ext cx="2400169" cy="584775"/>
+                </a:xfrm>
+                <a:prstGeom prst="rect">
+                  <a:avLst/>
+                </a:prstGeom>
+                <a:blipFill>
+                  <a:blip r:embed="rId2"/>
+                  <a:stretch>
+                    <a:fillRect t="-4255" b="-23404"/>
+                  </a:stretch>
+                </a:blipFill>
+              </p:spPr>
+              <p:txBody>
+                <a:bodyPr/>
+                <a:lstStyle/>
+                <a:p>
+                  <a:r>
+                    <a:rPr lang="ja-JP" altLang="en-US">
+                      <a:noFill/>
+                    </a:rPr>
+                    <a:t> </a:t>
+                  </a:r>
+                </a:p>
+              </p:txBody>
+            </p:sp>
+          </mc:Fallback>
+        </mc:AlternateContent>
+        <mc:AlternateContent xmlns:mc="http://schemas.openxmlformats.org/markup-compatibility/2006">
+          <mc:Choice xmlns:a14="http://schemas.microsoft.com/office/drawing/2010/main" Requires="a14">
+            <p:sp>
+              <p:nvSpPr>
+                <p:cNvPr id="5" name="角丸四角形 4">
+                  <a:extLst>
+                    <a:ext uri="{FF2B5EF4-FFF2-40B4-BE49-F238E27FC236}">
+                      <a16:creationId xmlns:a16="http://schemas.microsoft.com/office/drawing/2014/main" id="{AEED4403-5C78-3E7B-24D8-F15D4AC99238}"/>
+                    </a:ext>
+                  </a:extLst>
+                </p:cNvPr>
+                <p:cNvSpPr/>
+                <p:nvPr/>
+              </p:nvSpPr>
+              <p:spPr>
+                <a:xfrm>
+                  <a:off x="5740294" y="109041"/>
+                  <a:ext cx="2530884" cy="869022"/>
+                </a:xfrm>
+                <a:prstGeom prst="roundRect">
+                  <a:avLst/>
+                </a:prstGeom>
+                <a:solidFill>
+                  <a:schemeClr val="bg1"/>
+                </a:solidFill>
+                <a:ln w="38100"/>
+              </p:spPr>
+              <p:style>
+                <a:lnRef idx="2">
+                  <a:schemeClr val="accent1">
+                    <a:shade val="15000"/>
+                  </a:schemeClr>
+                </a:lnRef>
+                <a:fillRef idx="1">
+                  <a:schemeClr val="accent1"/>
+                </a:fillRef>
+                <a:effectRef idx="0">
+                  <a:schemeClr val="accent1"/>
+                </a:effectRef>
+                <a:fontRef idx="minor">
+                  <a:schemeClr val="lt1"/>
+                </a:fontRef>
+              </p:style>
+              <p:txBody>
+                <a:bodyPr rtlCol="0" anchor="ctr"/>
+                <a:lstStyle/>
+                <a:p>
+                  <a:r>
+                    <a:rPr kumimoji="1" lang="ja-JP" altLang="en-US" sz="2400" b="1">
+                      <a:solidFill>
+                        <a:schemeClr val="tx1"/>
+                      </a:solidFill>
+                      <a:latin typeface="Hiragino Sans W4" panose="020B0400000000000000" pitchFamily="34" charset="-128"/>
+                      <a:ea typeface="Hiragino Sans W4" panose="020B0400000000000000" pitchFamily="34" charset="-128"/>
+                    </a:rPr>
+                    <a:t>標本</a:t>
+                  </a:r>
+                  <a:r>
+                    <a:rPr kumimoji="1" lang="en-US" altLang="ja-JP" sz="2400" b="1" dirty="0">
+                      <a:solidFill>
+                        <a:schemeClr val="tx1"/>
+                      </a:solidFill>
+                      <a:latin typeface="Hiragino Sans W4" panose="020B0400000000000000" pitchFamily="34" charset="-128"/>
+                      <a:ea typeface="Hiragino Sans W4" panose="020B0400000000000000" pitchFamily="34" charset="-128"/>
+                    </a:rPr>
+                    <a:t>1</a:t>
+                  </a:r>
+                  <a:r>
+                    <a:rPr kumimoji="1" lang="ja-JP" altLang="en-US" sz="2400" b="1" dirty="0">
+                      <a:solidFill>
+                        <a:schemeClr val="tx1"/>
+                      </a:solidFill>
+                      <a:latin typeface="Hiragino Sans W4" panose="020B0400000000000000" pitchFamily="34" charset="-128"/>
+                      <a:ea typeface="Hiragino Sans W4" panose="020B0400000000000000" pitchFamily="34" charset="-128"/>
+                    </a:rPr>
+                    <a:t>：</a:t>
+                  </a:r>
+                  <a:endParaRPr kumimoji="1" lang="en-US" altLang="ja-JP" sz="2400" b="1" dirty="0">
+                    <a:solidFill>
+                      <a:schemeClr val="tx1"/>
+                    </a:solidFill>
+                    <a:latin typeface="Hiragino Sans W4" panose="020B0400000000000000" pitchFamily="34" charset="-128"/>
+                    <a:ea typeface="Hiragino Sans W4" panose="020B0400000000000000" pitchFamily="34" charset="-128"/>
+                  </a:endParaRPr>
+                </a:p>
+                <a:p>
+                  <a14:m>
+                    <m:oMathPara xmlns:m="http://schemas.openxmlformats.org/officeDocument/2006/math">
+                      <m:oMath>
+                        <m:sSub>
+                          <m:sSubPr>
+                            <m:ctrlPr>
+                              <a:rPr kumimoji="1" lang="en-US" altLang="ja-JP" sz="3200" b="1" i="1" smtClean="0">
+                                <a:solidFill>
+                                  <a:schemeClr val="tx1"/>
+                                </a:solidFill>
+                                <a:latin typeface="Cambria Math" panose="02040503050406030204" pitchFamily="18" charset="0"/>
+                                <a:ea typeface="Hiragino Sans W4" panose="020B0400000000000000" pitchFamily="34" charset="-128"/>
+                              </a:rPr>
+                            </m:ctrlPr>
+                          </m:sSubPr>
+                          <m:e>
+                            <m:acc>
+                              <m:accPr>
+                                <m:chr m:val="̂"/>
+                                <m:ctrlPr>
+                                  <a:rPr kumimoji="1" lang="en-US" altLang="ja-JP" sz="3200" b="1" i="1" smtClean="0">
+                                    <a:solidFill>
+                                      <a:schemeClr val="tx1"/>
+                                    </a:solidFill>
+                                    <a:latin typeface="Cambria Math" panose="02040503050406030204" pitchFamily="18" charset="0"/>
+                                    <a:ea typeface="Hiragino Sans W4" panose="020B0400000000000000" pitchFamily="34" charset="-128"/>
+                                  </a:rPr>
+                                </m:ctrlPr>
+                              </m:accPr>
+                              <m:e>
+                                <m:r>
+                                  <a:rPr kumimoji="1" lang="en-US" altLang="ja-JP" sz="3200" b="1" i="1" smtClean="0">
+                                    <a:solidFill>
+                                      <a:schemeClr val="tx1"/>
+                                    </a:solidFill>
+                                    <a:latin typeface="Cambria Math" panose="02040503050406030204" pitchFamily="18" charset="0"/>
+                                    <a:ea typeface="Hiragino Sans W4" panose="020B0400000000000000" pitchFamily="34" charset="-128"/>
+                                  </a:rPr>
+                                  <m:t>𝜷</m:t>
+                                </m:r>
+                              </m:e>
+                            </m:acc>
+                          </m:e>
+                          <m:sub>
+                            <m:r>
+                              <a:rPr kumimoji="1" lang="en-US" altLang="ja-JP" sz="2400" b="1" i="1" smtClean="0">
+                                <a:solidFill>
+                                  <a:schemeClr val="tx1"/>
+                                </a:solidFill>
+                                <a:latin typeface="Cambria Math" panose="02040503050406030204" pitchFamily="18" charset="0"/>
+                                <a:ea typeface="Hiragino Sans W4" panose="020B0400000000000000" pitchFamily="34" charset="-128"/>
+                              </a:rPr>
+                              <m:t>𝟏</m:t>
+                            </m:r>
+                          </m:sub>
+                        </m:sSub>
+                        <m:r>
+                          <a:rPr lang="en-US" altLang="ja-JP" sz="3200" b="1" i="1">
+                            <a:solidFill>
+                              <a:schemeClr val="tx1"/>
+                            </a:solidFill>
+                            <a:latin typeface="Cambria Math" panose="02040503050406030204" pitchFamily="18" charset="0"/>
+                            <a:ea typeface="Hiragino Sans W4" panose="020B0400000000000000" pitchFamily="34" charset="-128"/>
+                          </a:rPr>
+                          <m:t>=</m:t>
+                        </m:r>
+                        <m:r>
+                          <a:rPr lang="en-US" altLang="ja-JP" sz="3200" b="1" i="1" smtClean="0">
+                            <a:solidFill>
+                              <a:schemeClr val="tx1"/>
+                            </a:solidFill>
+                            <a:latin typeface="Cambria Math" panose="02040503050406030204" pitchFamily="18" charset="0"/>
+                            <a:ea typeface="Hiragino Sans W4" panose="020B0400000000000000" pitchFamily="34" charset="-128"/>
+                          </a:rPr>
+                          <m:t>𝟏𝟖</m:t>
+                        </m:r>
+                        <m:r>
+                          <a:rPr lang="en-US" altLang="ja-JP" sz="3200" b="1" i="1" smtClean="0">
+                            <a:solidFill>
+                              <a:schemeClr val="tx1"/>
+                            </a:solidFill>
+                            <a:latin typeface="Cambria Math" panose="02040503050406030204" pitchFamily="18" charset="0"/>
+                            <a:ea typeface="Hiragino Sans W4" panose="020B0400000000000000" pitchFamily="34" charset="-128"/>
+                          </a:rPr>
+                          <m:t>.</m:t>
+                        </m:r>
+                        <m:r>
+                          <a:rPr lang="en-US" altLang="ja-JP" sz="3200" b="1" i="1" smtClean="0">
+                            <a:solidFill>
+                              <a:schemeClr val="tx1"/>
+                            </a:solidFill>
+                            <a:latin typeface="Cambria Math" panose="02040503050406030204" pitchFamily="18" charset="0"/>
+                            <a:ea typeface="Hiragino Sans W4" panose="020B0400000000000000" pitchFamily="34" charset="-128"/>
+                          </a:rPr>
+                          <m:t>𝟔</m:t>
+                        </m:r>
+                      </m:oMath>
+                    </m:oMathPara>
+                  </a14:m>
+                  <a:endParaRPr kumimoji="1" lang="ja-JP" altLang="en-US" sz="2400">
+                    <a:solidFill>
+                      <a:schemeClr val="tx1"/>
+                    </a:solidFill>
+                    <a:latin typeface="Hiragino Sans W4" panose="020B0400000000000000" pitchFamily="34" charset="-128"/>
+                    <a:ea typeface="Hiragino Sans W4" panose="020B0400000000000000" pitchFamily="34" charset="-128"/>
+                  </a:endParaRPr>
+                </a:p>
+              </p:txBody>
+            </p:sp>
+          </mc:Choice>
+          <mc:Fallback>
+            <p:sp>
+              <p:nvSpPr>
+                <p:cNvPr id="5" name="角丸四角形 4">
+                  <a:extLst>
+                    <a:ext uri="{FF2B5EF4-FFF2-40B4-BE49-F238E27FC236}">
+                      <a16:creationId xmlns:a16="http://schemas.microsoft.com/office/drawing/2014/main" id="{AEED4403-5C78-3E7B-24D8-F15D4AC99238}"/>
+                    </a:ext>
+                  </a:extLst>
+                </p:cNvPr>
+                <p:cNvSpPr>
+                  <a:spLocks noRot="1" noChangeAspect="1" noMove="1" noResize="1" noEditPoints="1" noAdjustHandles="1" noChangeArrowheads="1" noChangeShapeType="1" noTextEdit="1"/>
+                </p:cNvSpPr>
+                <p:nvPr/>
+              </p:nvSpPr>
+              <p:spPr>
+                <a:xfrm>
+                  <a:off x="5740294" y="109041"/>
+                  <a:ext cx="2530884" cy="869022"/>
+                </a:xfrm>
+                <a:prstGeom prst="roundRect">
+                  <a:avLst/>
+                </a:prstGeom>
+                <a:blipFill>
+                  <a:blip r:embed="rId3"/>
+                  <a:stretch>
+                    <a:fillRect l="-985" t="-9722" b="-18056"/>
+                  </a:stretch>
+                </a:blipFill>
+                <a:ln w="38100"/>
+              </p:spPr>
+              <p:txBody>
+                <a:bodyPr/>
+                <a:lstStyle/>
+                <a:p>
+                  <a:r>
+                    <a:rPr lang="ja-JP" altLang="en-US">
+                      <a:noFill/>
+                    </a:rPr>
+                    <a:t> </a:t>
+                  </a:r>
+                </a:p>
+              </p:txBody>
+            </p:sp>
+          </mc:Fallback>
+        </mc:AlternateContent>
+        <mc:AlternateContent xmlns:mc="http://schemas.openxmlformats.org/markup-compatibility/2006">
+          <mc:Choice xmlns:a14="http://schemas.microsoft.com/office/drawing/2010/main" Requires="a14">
+            <p:sp>
+              <p:nvSpPr>
+                <p:cNvPr id="6" name="角丸四角形 5">
+                  <a:extLst>
+                    <a:ext uri="{FF2B5EF4-FFF2-40B4-BE49-F238E27FC236}">
+                      <a16:creationId xmlns:a16="http://schemas.microsoft.com/office/drawing/2014/main" id="{A467D7E6-2939-B281-A240-E39C85E99B8A}"/>
+                    </a:ext>
+                  </a:extLst>
+                </p:cNvPr>
+                <p:cNvSpPr/>
+                <p:nvPr/>
+              </p:nvSpPr>
+              <p:spPr>
+                <a:xfrm>
+                  <a:off x="5740293" y="1183247"/>
+                  <a:ext cx="2530884" cy="869022"/>
+                </a:xfrm>
+                <a:prstGeom prst="roundRect">
+                  <a:avLst/>
+                </a:prstGeom>
+                <a:solidFill>
+                  <a:schemeClr val="bg1"/>
+                </a:solidFill>
+                <a:ln w="38100"/>
+              </p:spPr>
+              <p:style>
+                <a:lnRef idx="2">
+                  <a:schemeClr val="accent1">
+                    <a:shade val="15000"/>
+                  </a:schemeClr>
+                </a:lnRef>
+                <a:fillRef idx="1">
+                  <a:schemeClr val="accent1"/>
+                </a:fillRef>
+                <a:effectRef idx="0">
+                  <a:schemeClr val="accent1"/>
+                </a:effectRef>
+                <a:fontRef idx="minor">
+                  <a:schemeClr val="lt1"/>
+                </a:fontRef>
+              </p:style>
+              <p:txBody>
+                <a:bodyPr rtlCol="0" anchor="ctr"/>
+                <a:lstStyle/>
+                <a:p>
+                  <a:r>
+                    <a:rPr kumimoji="1" lang="ja-JP" altLang="en-US" sz="2400" b="1">
+                      <a:solidFill>
+                        <a:schemeClr val="tx1"/>
+                      </a:solidFill>
+                      <a:latin typeface="Hiragino Sans W4" panose="020B0400000000000000" pitchFamily="34" charset="-128"/>
+                      <a:ea typeface="Hiragino Sans W4" panose="020B0400000000000000" pitchFamily="34" charset="-128"/>
+                    </a:rPr>
+                    <a:t>標本</a:t>
+                  </a:r>
+                  <a:r>
+                    <a:rPr lang="en-US" altLang="ja-JP" sz="2400" b="1" dirty="0">
+                      <a:solidFill>
+                        <a:schemeClr val="tx1"/>
+                      </a:solidFill>
+                      <a:latin typeface="Hiragino Sans W4" panose="020B0400000000000000" pitchFamily="34" charset="-128"/>
+                      <a:ea typeface="Hiragino Sans W4" panose="020B0400000000000000" pitchFamily="34" charset="-128"/>
+                    </a:rPr>
+                    <a:t>2</a:t>
+                  </a:r>
+                  <a:r>
+                    <a:rPr kumimoji="1" lang="ja-JP" altLang="en-US" sz="2400">
+                      <a:solidFill>
+                        <a:schemeClr val="tx1"/>
+                      </a:solidFill>
+                      <a:latin typeface="Hiragino Sans W4" panose="020B0400000000000000" pitchFamily="34" charset="-128"/>
+                      <a:ea typeface="Hiragino Sans W4" panose="020B0400000000000000" pitchFamily="34" charset="-128"/>
+                    </a:rPr>
+                    <a:t>：</a:t>
+                  </a:r>
+                  <a:endParaRPr kumimoji="1" lang="en-US" altLang="ja-JP" sz="2400" dirty="0">
+                    <a:solidFill>
+                      <a:schemeClr val="tx1"/>
+                    </a:solidFill>
+                    <a:latin typeface="Hiragino Sans W4" panose="020B0400000000000000" pitchFamily="34" charset="-128"/>
+                    <a:ea typeface="Hiragino Sans W4" panose="020B0400000000000000" pitchFamily="34" charset="-128"/>
+                  </a:endParaRPr>
+                </a:p>
+                <a:p>
+                  <a14:m>
+                    <m:oMathPara xmlns:m="http://schemas.openxmlformats.org/officeDocument/2006/math">
+                      <m:oMath>
+                        <m:sSub>
+                          <m:sSubPr>
+                            <m:ctrlPr>
+                              <a:rPr lang="en-US" altLang="ja-JP" sz="3200" b="1" i="1">
+                                <a:solidFill>
+                                  <a:schemeClr val="tx1"/>
+                                </a:solidFill>
+                                <a:latin typeface="Cambria Math" panose="02040503050406030204" pitchFamily="18" charset="0"/>
+                                <a:ea typeface="Hiragino Sans W4" panose="020B0400000000000000" pitchFamily="34" charset="-128"/>
+                              </a:rPr>
+                            </m:ctrlPr>
+                          </m:sSubPr>
+                          <m:e>
+                            <m:acc>
+                              <m:accPr>
+                                <m:chr m:val="̂"/>
+                                <m:ctrlPr>
+                                  <a:rPr lang="en-US" altLang="ja-JP" sz="3200" b="1" i="1">
+                                    <a:solidFill>
+                                      <a:schemeClr val="tx1"/>
+                                    </a:solidFill>
+                                    <a:latin typeface="Cambria Math" panose="02040503050406030204" pitchFamily="18" charset="0"/>
+                                    <a:ea typeface="Hiragino Sans W4" panose="020B0400000000000000" pitchFamily="34" charset="-128"/>
+                                  </a:rPr>
+                                </m:ctrlPr>
+                              </m:accPr>
+                              <m:e>
+                                <m:r>
+                                  <a:rPr lang="en-US" altLang="ja-JP" sz="3200" b="1" i="1">
+                                    <a:solidFill>
+                                      <a:schemeClr val="tx1"/>
+                                    </a:solidFill>
+                                    <a:latin typeface="Cambria Math" panose="02040503050406030204" pitchFamily="18" charset="0"/>
+                                    <a:ea typeface="Hiragino Sans W4" panose="020B0400000000000000" pitchFamily="34" charset="-128"/>
+                                  </a:rPr>
+                                  <m:t>𝜷</m:t>
+                                </m:r>
+                              </m:e>
+                            </m:acc>
+                          </m:e>
+                          <m:sub>
+                            <m:r>
+                              <a:rPr lang="en-US" altLang="ja-JP" sz="2400" b="1" i="1">
+                                <a:solidFill>
+                                  <a:schemeClr val="tx1"/>
+                                </a:solidFill>
+                                <a:latin typeface="Cambria Math" panose="02040503050406030204" pitchFamily="18" charset="0"/>
+                                <a:ea typeface="Hiragino Sans W4" panose="020B0400000000000000" pitchFamily="34" charset="-128"/>
+                              </a:rPr>
+                              <m:t>𝟏</m:t>
+                            </m:r>
+                          </m:sub>
+                        </m:sSub>
+                        <m:r>
+                          <a:rPr lang="en-US" altLang="ja-JP" sz="3200" b="1" i="1">
+                            <a:solidFill>
+                              <a:schemeClr val="tx1"/>
+                            </a:solidFill>
+                            <a:latin typeface="Cambria Math" panose="02040503050406030204" pitchFamily="18" charset="0"/>
+                            <a:ea typeface="Hiragino Sans W4" panose="020B0400000000000000" pitchFamily="34" charset="-128"/>
+                          </a:rPr>
+                          <m:t>=</m:t>
+                        </m:r>
+                        <m:r>
+                          <a:rPr lang="en-US" altLang="ja-JP" sz="3200" b="1" i="1" smtClean="0">
+                            <a:solidFill>
+                              <a:schemeClr val="tx1"/>
+                            </a:solidFill>
+                            <a:latin typeface="Cambria Math" panose="02040503050406030204" pitchFamily="18" charset="0"/>
+                            <a:ea typeface="Hiragino Sans W4" panose="020B0400000000000000" pitchFamily="34" charset="-128"/>
+                          </a:rPr>
+                          <m:t>𝟐𝟎</m:t>
+                        </m:r>
+                        <m:r>
+                          <a:rPr lang="en-US" altLang="ja-JP" sz="3200" b="1" i="1" smtClean="0">
+                            <a:solidFill>
+                              <a:schemeClr val="tx1"/>
+                            </a:solidFill>
+                            <a:latin typeface="Cambria Math" panose="02040503050406030204" pitchFamily="18" charset="0"/>
+                            <a:ea typeface="Hiragino Sans W4" panose="020B0400000000000000" pitchFamily="34" charset="-128"/>
+                          </a:rPr>
+                          <m:t>.</m:t>
+                        </m:r>
+                        <m:r>
+                          <a:rPr lang="en-US" altLang="ja-JP" sz="3200" b="1" i="1" smtClean="0">
+                            <a:solidFill>
+                              <a:schemeClr val="tx1"/>
+                            </a:solidFill>
+                            <a:latin typeface="Cambria Math" panose="02040503050406030204" pitchFamily="18" charset="0"/>
+                            <a:ea typeface="Hiragino Sans W4" panose="020B0400000000000000" pitchFamily="34" charset="-128"/>
+                          </a:rPr>
+                          <m:t>𝟒</m:t>
+                        </m:r>
+                      </m:oMath>
+                    </m:oMathPara>
+                  </a14:m>
+                  <a:endParaRPr kumimoji="1" lang="ja-JP" altLang="en-US" sz="2400">
+                    <a:solidFill>
+                      <a:schemeClr val="tx1"/>
+                    </a:solidFill>
+                    <a:latin typeface="Hiragino Sans W4" panose="020B0400000000000000" pitchFamily="34" charset="-128"/>
+                    <a:ea typeface="Hiragino Sans W4" panose="020B0400000000000000" pitchFamily="34" charset="-128"/>
+                  </a:endParaRPr>
+                </a:p>
+              </p:txBody>
+            </p:sp>
+          </mc:Choice>
+          <mc:Fallback>
+            <p:sp>
+              <p:nvSpPr>
+                <p:cNvPr id="6" name="角丸四角形 5">
+                  <a:extLst>
+                    <a:ext uri="{FF2B5EF4-FFF2-40B4-BE49-F238E27FC236}">
+                      <a16:creationId xmlns:a16="http://schemas.microsoft.com/office/drawing/2014/main" id="{A467D7E6-2939-B281-A240-E39C85E99B8A}"/>
+                    </a:ext>
+                  </a:extLst>
+                </p:cNvPr>
+                <p:cNvSpPr>
+                  <a:spLocks noRot="1" noChangeAspect="1" noMove="1" noResize="1" noEditPoints="1" noAdjustHandles="1" noChangeArrowheads="1" noChangeShapeType="1" noTextEdit="1"/>
+                </p:cNvSpPr>
+                <p:nvPr/>
+              </p:nvSpPr>
+              <p:spPr>
+                <a:xfrm>
+                  <a:off x="5740293" y="1183247"/>
+                  <a:ext cx="2530884" cy="869022"/>
+                </a:xfrm>
+                <a:prstGeom prst="roundRect">
+                  <a:avLst/>
+                </a:prstGeom>
+                <a:blipFill>
+                  <a:blip r:embed="rId4"/>
+                  <a:stretch>
+                    <a:fillRect l="-985" t="-8219" b="-17808"/>
+                  </a:stretch>
+                </a:blipFill>
+                <a:ln w="38100"/>
+              </p:spPr>
+              <p:txBody>
+                <a:bodyPr/>
+                <a:lstStyle/>
+                <a:p>
+                  <a:r>
+                    <a:rPr lang="ja-JP" altLang="en-US">
+                      <a:noFill/>
+                    </a:rPr>
+                    <a:t> </a:t>
+                  </a:r>
+                </a:p>
+              </p:txBody>
+            </p:sp>
+          </mc:Fallback>
+        </mc:AlternateContent>
+        <mc:AlternateContent xmlns:mc="http://schemas.openxmlformats.org/markup-compatibility/2006">
+          <mc:Choice xmlns:a14="http://schemas.microsoft.com/office/drawing/2010/main" Requires="a14">
+            <p:sp>
+              <p:nvSpPr>
+                <p:cNvPr id="7" name="角丸四角形 6">
+                  <a:extLst>
+                    <a:ext uri="{FF2B5EF4-FFF2-40B4-BE49-F238E27FC236}">
+                      <a16:creationId xmlns:a16="http://schemas.microsoft.com/office/drawing/2014/main" id="{321BE857-A692-FEBD-B80B-B63D2B356A0A}"/>
+                    </a:ext>
+                  </a:extLst>
+                </p:cNvPr>
+                <p:cNvSpPr/>
+                <p:nvPr/>
+              </p:nvSpPr>
+              <p:spPr>
+                <a:xfrm>
+                  <a:off x="5729279" y="2257453"/>
+                  <a:ext cx="2530884" cy="869022"/>
+                </a:xfrm>
+                <a:prstGeom prst="roundRect">
+                  <a:avLst/>
+                </a:prstGeom>
+                <a:solidFill>
+                  <a:schemeClr val="bg1"/>
+                </a:solidFill>
+                <a:ln w="38100"/>
+              </p:spPr>
+              <p:style>
+                <a:lnRef idx="2">
+                  <a:schemeClr val="accent1">
+                    <a:shade val="15000"/>
+                  </a:schemeClr>
+                </a:lnRef>
+                <a:fillRef idx="1">
+                  <a:schemeClr val="accent1"/>
+                </a:fillRef>
+                <a:effectRef idx="0">
+                  <a:schemeClr val="accent1"/>
+                </a:effectRef>
+                <a:fontRef idx="minor">
+                  <a:schemeClr val="lt1"/>
+                </a:fontRef>
+              </p:style>
+              <p:txBody>
+                <a:bodyPr rtlCol="0" anchor="ctr"/>
+                <a:lstStyle/>
+                <a:p>
+                  <a:r>
+                    <a:rPr kumimoji="1" lang="ja-JP" altLang="en-US" sz="2400" b="1">
+                      <a:solidFill>
+                        <a:schemeClr val="tx1"/>
+                      </a:solidFill>
+                      <a:latin typeface="Hiragino Sans W4" panose="020B0400000000000000" pitchFamily="34" charset="-128"/>
+                      <a:ea typeface="Hiragino Sans W4" panose="020B0400000000000000" pitchFamily="34" charset="-128"/>
+                    </a:rPr>
+                    <a:t>標本</a:t>
+                  </a:r>
+                  <a:r>
+                    <a:rPr kumimoji="1" lang="en-US" altLang="ja-JP" sz="2400" b="1" dirty="0">
+                      <a:solidFill>
+                        <a:schemeClr val="tx1"/>
+                      </a:solidFill>
+                      <a:latin typeface="Hiragino Sans W4" panose="020B0400000000000000" pitchFamily="34" charset="-128"/>
+                      <a:ea typeface="Hiragino Sans W4" panose="020B0400000000000000" pitchFamily="34" charset="-128"/>
+                    </a:rPr>
+                    <a:t>3</a:t>
+                  </a:r>
+                  <a:r>
+                    <a:rPr kumimoji="1" lang="ja-JP" altLang="en-US" sz="2400">
+                      <a:solidFill>
+                        <a:schemeClr val="tx1"/>
+                      </a:solidFill>
+                      <a:latin typeface="Hiragino Sans W4" panose="020B0400000000000000" pitchFamily="34" charset="-128"/>
+                      <a:ea typeface="Hiragino Sans W4" panose="020B0400000000000000" pitchFamily="34" charset="-128"/>
+                    </a:rPr>
+                    <a:t>：</a:t>
+                  </a:r>
+                  <a:endParaRPr kumimoji="1" lang="en-US" altLang="ja-JP" sz="2400" dirty="0">
+                    <a:solidFill>
+                      <a:schemeClr val="tx1"/>
+                    </a:solidFill>
+                    <a:latin typeface="Hiragino Sans W4" panose="020B0400000000000000" pitchFamily="34" charset="-128"/>
+                    <a:ea typeface="Hiragino Sans W4" panose="020B0400000000000000" pitchFamily="34" charset="-128"/>
+                  </a:endParaRPr>
+                </a:p>
+                <a:p>
+                  <a14:m>
+                    <m:oMathPara xmlns:m="http://schemas.openxmlformats.org/officeDocument/2006/math">
+                      <m:oMath>
+                        <m:sSub>
+                          <m:sSubPr>
+                            <m:ctrlPr>
+                              <a:rPr lang="en-US" altLang="ja-JP" sz="3200" b="1" i="1">
+                                <a:solidFill>
+                                  <a:schemeClr val="tx1"/>
+                                </a:solidFill>
+                                <a:latin typeface="Cambria Math" panose="02040503050406030204" pitchFamily="18" charset="0"/>
+                                <a:ea typeface="Hiragino Sans W4" panose="020B0400000000000000" pitchFamily="34" charset="-128"/>
+                              </a:rPr>
+                            </m:ctrlPr>
+                          </m:sSubPr>
+                          <m:e>
+                            <m:acc>
+                              <m:accPr>
+                                <m:chr m:val="̂"/>
+                                <m:ctrlPr>
+                                  <a:rPr lang="en-US" altLang="ja-JP" sz="3200" b="1" i="1">
+                                    <a:solidFill>
+                                      <a:schemeClr val="tx1"/>
+                                    </a:solidFill>
+                                    <a:latin typeface="Cambria Math" panose="02040503050406030204" pitchFamily="18" charset="0"/>
+                                    <a:ea typeface="Hiragino Sans W4" panose="020B0400000000000000" pitchFamily="34" charset="-128"/>
+                                  </a:rPr>
+                                </m:ctrlPr>
+                              </m:accPr>
+                              <m:e>
+                                <m:r>
+                                  <a:rPr lang="en-US" altLang="ja-JP" sz="3200" b="1" i="1">
+                                    <a:solidFill>
+                                      <a:schemeClr val="tx1"/>
+                                    </a:solidFill>
+                                    <a:latin typeface="Cambria Math" panose="02040503050406030204" pitchFamily="18" charset="0"/>
+                                    <a:ea typeface="Hiragino Sans W4" panose="020B0400000000000000" pitchFamily="34" charset="-128"/>
+                                  </a:rPr>
+                                  <m:t>𝜷</m:t>
+                                </m:r>
+                              </m:e>
+                            </m:acc>
+                          </m:e>
+                          <m:sub>
+                            <m:r>
+                              <a:rPr lang="en-US" altLang="ja-JP" sz="2400" b="1" i="1">
+                                <a:solidFill>
+                                  <a:schemeClr val="tx1"/>
+                                </a:solidFill>
+                                <a:latin typeface="Cambria Math" panose="02040503050406030204" pitchFamily="18" charset="0"/>
+                                <a:ea typeface="Hiragino Sans W4" panose="020B0400000000000000" pitchFamily="34" charset="-128"/>
+                              </a:rPr>
+                              <m:t>𝟏</m:t>
+                            </m:r>
+                          </m:sub>
+                        </m:sSub>
+                        <m:r>
+                          <a:rPr lang="en-US" altLang="ja-JP" sz="3200" b="1" i="1">
+                            <a:solidFill>
+                              <a:schemeClr val="tx1"/>
+                            </a:solidFill>
+                            <a:latin typeface="Cambria Math" panose="02040503050406030204" pitchFamily="18" charset="0"/>
+                            <a:ea typeface="Hiragino Sans W4" panose="020B0400000000000000" pitchFamily="34" charset="-128"/>
+                          </a:rPr>
+                          <m:t>=</m:t>
+                        </m:r>
+                        <m:r>
+                          <a:rPr lang="en-US" altLang="ja-JP" sz="3200" b="1" i="1" smtClean="0">
+                            <a:solidFill>
+                              <a:schemeClr val="tx1"/>
+                            </a:solidFill>
+                            <a:latin typeface="Cambria Math" panose="02040503050406030204" pitchFamily="18" charset="0"/>
+                            <a:ea typeface="Hiragino Sans W4" panose="020B0400000000000000" pitchFamily="34" charset="-128"/>
+                          </a:rPr>
+                          <m:t>𝟏𝟕</m:t>
+                        </m:r>
+                        <m:r>
+                          <a:rPr lang="en-US" altLang="ja-JP" sz="3200" b="1" i="1" smtClean="0">
+                            <a:solidFill>
+                              <a:schemeClr val="tx1"/>
+                            </a:solidFill>
+                            <a:latin typeface="Cambria Math" panose="02040503050406030204" pitchFamily="18" charset="0"/>
+                            <a:ea typeface="Hiragino Sans W4" panose="020B0400000000000000" pitchFamily="34" charset="-128"/>
+                          </a:rPr>
+                          <m:t>.</m:t>
+                        </m:r>
+                        <m:r>
+                          <a:rPr lang="en-US" altLang="ja-JP" sz="3200" b="1" i="1" smtClean="0">
+                            <a:solidFill>
+                              <a:schemeClr val="tx1"/>
+                            </a:solidFill>
+                            <a:latin typeface="Cambria Math" panose="02040503050406030204" pitchFamily="18" charset="0"/>
+                            <a:ea typeface="Hiragino Sans W4" panose="020B0400000000000000" pitchFamily="34" charset="-128"/>
+                          </a:rPr>
+                          <m:t>𝟖</m:t>
+                        </m:r>
+                      </m:oMath>
+                    </m:oMathPara>
+                  </a14:m>
+                  <a:endParaRPr kumimoji="1" lang="ja-JP" altLang="en-US" sz="2400">
+                    <a:solidFill>
+                      <a:schemeClr val="tx1"/>
+                    </a:solidFill>
+                    <a:latin typeface="Hiragino Sans W4" panose="020B0400000000000000" pitchFamily="34" charset="-128"/>
+                    <a:ea typeface="Hiragino Sans W4" panose="020B0400000000000000" pitchFamily="34" charset="-128"/>
+                  </a:endParaRPr>
+                </a:p>
+              </p:txBody>
+            </p:sp>
+          </mc:Choice>
+          <mc:Fallback>
+            <p:sp>
+              <p:nvSpPr>
+                <p:cNvPr id="7" name="角丸四角形 6">
+                  <a:extLst>
+                    <a:ext uri="{FF2B5EF4-FFF2-40B4-BE49-F238E27FC236}">
+                      <a16:creationId xmlns:a16="http://schemas.microsoft.com/office/drawing/2014/main" id="{321BE857-A692-FEBD-B80B-B63D2B356A0A}"/>
+                    </a:ext>
+                  </a:extLst>
+                </p:cNvPr>
+                <p:cNvSpPr>
+                  <a:spLocks noRot="1" noChangeAspect="1" noMove="1" noResize="1" noEditPoints="1" noAdjustHandles="1" noChangeArrowheads="1" noChangeShapeType="1" noTextEdit="1"/>
+                </p:cNvSpPr>
+                <p:nvPr/>
+              </p:nvSpPr>
+              <p:spPr>
+                <a:xfrm>
+                  <a:off x="5729279" y="2257453"/>
+                  <a:ext cx="2530884" cy="869022"/>
+                </a:xfrm>
+                <a:prstGeom prst="roundRect">
+                  <a:avLst/>
+                </a:prstGeom>
+                <a:blipFill>
+                  <a:blip r:embed="rId5"/>
+                  <a:stretch>
+                    <a:fillRect l="-980" t="-9722" b="-19444"/>
+                  </a:stretch>
+                </a:blipFill>
+                <a:ln w="38100"/>
+              </p:spPr>
+              <p:txBody>
+                <a:bodyPr/>
+                <a:lstStyle/>
+                <a:p>
+                  <a:r>
+                    <a:rPr lang="ja-JP" altLang="en-US">
+                      <a:noFill/>
+                    </a:rPr>
+                    <a:t> </a:t>
+                  </a:r>
+                </a:p>
+              </p:txBody>
+            </p:sp>
+          </mc:Fallback>
+        </mc:AlternateContent>
+        <mc:AlternateContent xmlns:mc="http://schemas.openxmlformats.org/markup-compatibility/2006">
+          <mc:Choice xmlns:a14="http://schemas.microsoft.com/office/drawing/2010/main" Requires="a14">
+            <p:sp>
+              <p:nvSpPr>
+                <p:cNvPr id="8" name="角丸四角形 7">
+                  <a:extLst>
+                    <a:ext uri="{FF2B5EF4-FFF2-40B4-BE49-F238E27FC236}">
+                      <a16:creationId xmlns:a16="http://schemas.microsoft.com/office/drawing/2014/main" id="{03B37D11-16AE-00D4-1C05-9E93A8C52CD9}"/>
+                    </a:ext>
+                  </a:extLst>
+                </p:cNvPr>
+                <p:cNvSpPr/>
+                <p:nvPr/>
+              </p:nvSpPr>
+              <p:spPr>
+                <a:xfrm>
+                  <a:off x="5729279" y="3328416"/>
+                  <a:ext cx="2530884" cy="985655"/>
+                </a:xfrm>
+                <a:prstGeom prst="roundRect">
+                  <a:avLst/>
+                </a:prstGeom>
+                <a:solidFill>
+                  <a:schemeClr val="bg1"/>
+                </a:solidFill>
+                <a:ln w="38100"/>
+              </p:spPr>
+              <p:style>
+                <a:lnRef idx="2">
+                  <a:schemeClr val="accent1">
+                    <a:shade val="15000"/>
+                  </a:schemeClr>
+                </a:lnRef>
+                <a:fillRef idx="1">
+                  <a:schemeClr val="accent1"/>
+                </a:fillRef>
+                <a:effectRef idx="0">
+                  <a:schemeClr val="accent1"/>
+                </a:effectRef>
+                <a:fontRef idx="minor">
+                  <a:schemeClr val="lt1"/>
+                </a:fontRef>
+              </p:style>
+              <p:txBody>
+                <a:bodyPr rtlCol="0" anchor="ctr"/>
+                <a:lstStyle/>
+                <a:p>
+                  <a:r>
+                    <a:rPr kumimoji="1" lang="ja-JP" altLang="en-US" sz="2400" b="1">
+                      <a:solidFill>
+                        <a:schemeClr val="tx1"/>
+                      </a:solidFill>
+                      <a:latin typeface="Hiragino Sans W4" panose="020B0400000000000000" pitchFamily="34" charset="-128"/>
+                      <a:ea typeface="Hiragino Sans W4" panose="020B0400000000000000" pitchFamily="34" charset="-128"/>
+                    </a:rPr>
+                    <a:t>標本</a:t>
+                  </a:r>
+                  <a:r>
+                    <a:rPr kumimoji="1" lang="en-US" altLang="ja-JP" sz="2400" b="1" dirty="0">
+                      <a:solidFill>
+                        <a:schemeClr val="tx1"/>
+                      </a:solidFill>
+                      <a:latin typeface="Hiragino Sans W4" panose="020B0400000000000000" pitchFamily="34" charset="-128"/>
+                      <a:ea typeface="Hiragino Sans W4" panose="020B0400000000000000" pitchFamily="34" charset="-128"/>
+                    </a:rPr>
+                    <a:t>4</a:t>
+                  </a:r>
+                  <a:r>
+                    <a:rPr kumimoji="1" lang="ja-JP" altLang="en-US" sz="2400">
+                      <a:solidFill>
+                        <a:schemeClr val="tx1"/>
+                      </a:solidFill>
+                      <a:latin typeface="Hiragino Sans W4" panose="020B0400000000000000" pitchFamily="34" charset="-128"/>
+                      <a:ea typeface="Hiragino Sans W4" panose="020B0400000000000000" pitchFamily="34" charset="-128"/>
+                    </a:rPr>
+                    <a:t>：</a:t>
+                  </a:r>
+                  <a:endParaRPr kumimoji="1" lang="en-US" altLang="ja-JP" sz="2400" dirty="0">
+                    <a:solidFill>
+                      <a:schemeClr val="tx1"/>
+                    </a:solidFill>
+                    <a:latin typeface="Hiragino Sans W4" panose="020B0400000000000000" pitchFamily="34" charset="-128"/>
+                    <a:ea typeface="Hiragino Sans W4" panose="020B0400000000000000" pitchFamily="34" charset="-128"/>
+                  </a:endParaRPr>
+                </a:p>
+                <a:p>
+                  <a14:m>
+                    <m:oMathPara xmlns:m="http://schemas.openxmlformats.org/officeDocument/2006/math">
+                      <m:oMath>
+                        <m:sSub>
+                          <m:sSubPr>
+                            <m:ctrlPr>
+                              <a:rPr lang="en-US" altLang="ja-JP" sz="3200" b="1" i="1">
+                                <a:solidFill>
+                                  <a:schemeClr val="tx1"/>
+                                </a:solidFill>
+                                <a:latin typeface="Cambria Math" panose="02040503050406030204" pitchFamily="18" charset="0"/>
+                                <a:ea typeface="Hiragino Sans W4" panose="020B0400000000000000" pitchFamily="34" charset="-128"/>
+                              </a:rPr>
+                            </m:ctrlPr>
+                          </m:sSubPr>
+                          <m:e>
+                            <m:acc>
+                              <m:accPr>
+                                <m:chr m:val="̂"/>
+                                <m:ctrlPr>
+                                  <a:rPr lang="en-US" altLang="ja-JP" sz="3200" b="1" i="1">
+                                    <a:solidFill>
+                                      <a:schemeClr val="tx1"/>
+                                    </a:solidFill>
+                                    <a:latin typeface="Cambria Math" panose="02040503050406030204" pitchFamily="18" charset="0"/>
+                                    <a:ea typeface="Hiragino Sans W4" panose="020B0400000000000000" pitchFamily="34" charset="-128"/>
+                                  </a:rPr>
+                                </m:ctrlPr>
+                              </m:accPr>
+                              <m:e>
+                                <m:r>
+                                  <a:rPr lang="en-US" altLang="ja-JP" sz="3200" b="1" i="1">
+                                    <a:solidFill>
+                                      <a:schemeClr val="tx1"/>
+                                    </a:solidFill>
+                                    <a:latin typeface="Cambria Math" panose="02040503050406030204" pitchFamily="18" charset="0"/>
+                                    <a:ea typeface="Hiragino Sans W4" panose="020B0400000000000000" pitchFamily="34" charset="-128"/>
+                                  </a:rPr>
+                                  <m:t>𝜷</m:t>
+                                </m:r>
+                              </m:e>
+                            </m:acc>
+                          </m:e>
+                          <m:sub>
+                            <m:r>
+                              <a:rPr lang="en-US" altLang="ja-JP" sz="2400" b="1" i="1">
+                                <a:solidFill>
+                                  <a:schemeClr val="tx1"/>
+                                </a:solidFill>
+                                <a:latin typeface="Cambria Math" panose="02040503050406030204" pitchFamily="18" charset="0"/>
+                                <a:ea typeface="Hiragino Sans W4" panose="020B0400000000000000" pitchFamily="34" charset="-128"/>
+                              </a:rPr>
+                              <m:t>𝟏</m:t>
+                            </m:r>
+                          </m:sub>
+                        </m:sSub>
+                        <m:r>
+                          <a:rPr lang="en-US" altLang="ja-JP" sz="3200" b="1" i="1">
+                            <a:solidFill>
+                              <a:schemeClr val="tx1"/>
+                            </a:solidFill>
+                            <a:latin typeface="Cambria Math" panose="02040503050406030204" pitchFamily="18" charset="0"/>
+                            <a:ea typeface="Hiragino Sans W4" panose="020B0400000000000000" pitchFamily="34" charset="-128"/>
+                          </a:rPr>
+                          <m:t>=</m:t>
+                        </m:r>
+                        <m:r>
+                          <a:rPr lang="en-US" altLang="ja-JP" sz="3200" b="1" i="1" smtClean="0">
+                            <a:solidFill>
+                              <a:schemeClr val="tx1"/>
+                            </a:solidFill>
+                            <a:latin typeface="Cambria Math" panose="02040503050406030204" pitchFamily="18" charset="0"/>
+                            <a:ea typeface="Hiragino Sans W4" panose="020B0400000000000000" pitchFamily="34" charset="-128"/>
+                          </a:rPr>
+                          <m:t>𝟐𝟐</m:t>
+                        </m:r>
+                        <m:r>
+                          <a:rPr lang="en-US" altLang="ja-JP" sz="3200" b="1" i="1" smtClean="0">
+                            <a:solidFill>
+                              <a:schemeClr val="tx1"/>
+                            </a:solidFill>
+                            <a:latin typeface="Cambria Math" panose="02040503050406030204" pitchFamily="18" charset="0"/>
+                            <a:ea typeface="Hiragino Sans W4" panose="020B0400000000000000" pitchFamily="34" charset="-128"/>
+                          </a:rPr>
+                          <m:t>.</m:t>
+                        </m:r>
+                        <m:r>
+                          <a:rPr lang="en-US" altLang="ja-JP" sz="3200" b="1" i="1" smtClean="0">
+                            <a:solidFill>
+                              <a:schemeClr val="tx1"/>
+                            </a:solidFill>
+                            <a:latin typeface="Cambria Math" panose="02040503050406030204" pitchFamily="18" charset="0"/>
+                            <a:ea typeface="Hiragino Sans W4" panose="020B0400000000000000" pitchFamily="34" charset="-128"/>
+                          </a:rPr>
+                          <m:t>𝟑</m:t>
+                        </m:r>
+                      </m:oMath>
+                    </m:oMathPara>
+                  </a14:m>
+                  <a:endParaRPr kumimoji="1" lang="ja-JP" altLang="en-US" sz="2400">
+                    <a:solidFill>
+                      <a:schemeClr val="tx1"/>
+                    </a:solidFill>
+                    <a:latin typeface="Hiragino Sans W4" panose="020B0400000000000000" pitchFamily="34" charset="-128"/>
+                    <a:ea typeface="Hiragino Sans W4" panose="020B0400000000000000" pitchFamily="34" charset="-128"/>
+                  </a:endParaRPr>
+                </a:p>
+              </p:txBody>
+            </p:sp>
+          </mc:Choice>
+          <mc:Fallback>
+            <p:sp>
+              <p:nvSpPr>
+                <p:cNvPr id="8" name="角丸四角形 7">
+                  <a:extLst>
+                    <a:ext uri="{FF2B5EF4-FFF2-40B4-BE49-F238E27FC236}">
+                      <a16:creationId xmlns:a16="http://schemas.microsoft.com/office/drawing/2014/main" id="{03B37D11-16AE-00D4-1C05-9E93A8C52CD9}"/>
+                    </a:ext>
+                  </a:extLst>
+                </p:cNvPr>
+                <p:cNvSpPr>
+                  <a:spLocks noRot="1" noChangeAspect="1" noMove="1" noResize="1" noEditPoints="1" noAdjustHandles="1" noChangeArrowheads="1" noChangeShapeType="1" noTextEdit="1"/>
+                </p:cNvSpPr>
+                <p:nvPr/>
+              </p:nvSpPr>
+              <p:spPr>
+                <a:xfrm>
+                  <a:off x="5729279" y="3328416"/>
+                  <a:ext cx="2530884" cy="985655"/>
+                </a:xfrm>
+                <a:prstGeom prst="roundRect">
+                  <a:avLst/>
+                </a:prstGeom>
+                <a:blipFill>
+                  <a:blip r:embed="rId6"/>
+                  <a:stretch>
+                    <a:fillRect l="-980" t="-2439" b="-9756"/>
+                  </a:stretch>
+                </a:blipFill>
+                <a:ln w="38100"/>
+              </p:spPr>
+              <p:txBody>
+                <a:bodyPr/>
+                <a:lstStyle/>
+                <a:p>
+                  <a:r>
+                    <a:rPr lang="ja-JP" altLang="en-US">
+                      <a:noFill/>
+                    </a:rPr>
+                    <a:t> </a:t>
+                  </a:r>
+                </a:p>
+              </p:txBody>
+            </p:sp>
+          </mc:Fallback>
+        </mc:AlternateContent>
+        <mc:AlternateContent xmlns:mc="http://schemas.openxmlformats.org/markup-compatibility/2006">
+          <mc:Choice xmlns:a14="http://schemas.microsoft.com/office/drawing/2010/main" Requires="a14">
+            <p:sp>
+              <p:nvSpPr>
+                <p:cNvPr id="9" name="角丸四角形 8">
+                  <a:extLst>
+                    <a:ext uri="{FF2B5EF4-FFF2-40B4-BE49-F238E27FC236}">
+                      <a16:creationId xmlns:a16="http://schemas.microsoft.com/office/drawing/2014/main" id="{4E50A498-74FB-0D50-967E-E6BB55F915DC}"/>
+                    </a:ext>
+                  </a:extLst>
+                </p:cNvPr>
+                <p:cNvSpPr/>
+                <p:nvPr/>
+              </p:nvSpPr>
+              <p:spPr>
+                <a:xfrm>
+                  <a:off x="5740293" y="4516012"/>
+                  <a:ext cx="2530884" cy="985655"/>
+                </a:xfrm>
+                <a:prstGeom prst="roundRect">
+                  <a:avLst/>
+                </a:prstGeom>
+                <a:solidFill>
+                  <a:schemeClr val="bg1"/>
+                </a:solidFill>
+                <a:ln w="38100"/>
+              </p:spPr>
+              <p:style>
+                <a:lnRef idx="2">
+                  <a:schemeClr val="accent1">
+                    <a:shade val="15000"/>
+                  </a:schemeClr>
+                </a:lnRef>
+                <a:fillRef idx="1">
+                  <a:schemeClr val="accent1"/>
+                </a:fillRef>
+                <a:effectRef idx="0">
+                  <a:schemeClr val="accent1"/>
+                </a:effectRef>
+                <a:fontRef idx="minor">
+                  <a:schemeClr val="lt1"/>
+                </a:fontRef>
+              </p:style>
+              <p:txBody>
+                <a:bodyPr rtlCol="0" anchor="ctr"/>
+                <a:lstStyle/>
+                <a:p>
+                  <a:r>
+                    <a:rPr kumimoji="1" lang="ja-JP" altLang="en-US" sz="2400" b="1">
+                      <a:solidFill>
+                        <a:schemeClr val="tx1"/>
+                      </a:solidFill>
+                      <a:latin typeface="Hiragino Sans W4" panose="020B0400000000000000" pitchFamily="34" charset="-128"/>
+                      <a:ea typeface="Hiragino Sans W4" panose="020B0400000000000000" pitchFamily="34" charset="-128"/>
+                    </a:rPr>
+                    <a:t>標本</a:t>
+                  </a:r>
+                  <a:r>
+                    <a:rPr lang="en-US" altLang="ja-JP" sz="2400" b="1" dirty="0">
+                      <a:solidFill>
+                        <a:schemeClr val="tx1"/>
+                      </a:solidFill>
+                      <a:latin typeface="Hiragino Sans W4" panose="020B0400000000000000" pitchFamily="34" charset="-128"/>
+                      <a:ea typeface="Hiragino Sans W4" panose="020B0400000000000000" pitchFamily="34" charset="-128"/>
+                    </a:rPr>
+                    <a:t>5</a:t>
+                  </a:r>
+                  <a:r>
+                    <a:rPr kumimoji="1" lang="ja-JP" altLang="en-US" sz="2400">
+                      <a:solidFill>
+                        <a:schemeClr val="tx1"/>
+                      </a:solidFill>
+                      <a:latin typeface="Hiragino Sans W4" panose="020B0400000000000000" pitchFamily="34" charset="-128"/>
+                      <a:ea typeface="Hiragino Sans W4" panose="020B0400000000000000" pitchFamily="34" charset="-128"/>
+                    </a:rPr>
+                    <a:t>：</a:t>
+                  </a:r>
+                  <a:endParaRPr kumimoji="1" lang="en-US" altLang="ja-JP" sz="2400" dirty="0">
+                    <a:solidFill>
+                      <a:schemeClr val="tx1"/>
+                    </a:solidFill>
+                    <a:latin typeface="Hiragino Sans W4" panose="020B0400000000000000" pitchFamily="34" charset="-128"/>
+                    <a:ea typeface="Hiragino Sans W4" panose="020B0400000000000000" pitchFamily="34" charset="-128"/>
+                  </a:endParaRPr>
+                </a:p>
+                <a:p>
+                  <a14:m>
+                    <m:oMathPara xmlns:m="http://schemas.openxmlformats.org/officeDocument/2006/math">
+                      <m:oMath>
+                        <m:sSub>
+                          <m:sSubPr>
+                            <m:ctrlPr>
+                              <a:rPr lang="en-US" altLang="ja-JP" sz="3200" b="1" i="1">
+                                <a:solidFill>
+                                  <a:schemeClr val="tx1"/>
+                                </a:solidFill>
+                                <a:latin typeface="Cambria Math" panose="02040503050406030204" pitchFamily="18" charset="0"/>
+                                <a:ea typeface="Hiragino Sans W4" panose="020B0400000000000000" pitchFamily="34" charset="-128"/>
+                              </a:rPr>
+                            </m:ctrlPr>
+                          </m:sSubPr>
+                          <m:e>
+                            <m:acc>
+                              <m:accPr>
+                                <m:chr m:val="̂"/>
+                                <m:ctrlPr>
+                                  <a:rPr lang="en-US" altLang="ja-JP" sz="3200" b="1" i="1">
+                                    <a:solidFill>
+                                      <a:schemeClr val="tx1"/>
+                                    </a:solidFill>
+                                    <a:latin typeface="Cambria Math" panose="02040503050406030204" pitchFamily="18" charset="0"/>
+                                    <a:ea typeface="Hiragino Sans W4" panose="020B0400000000000000" pitchFamily="34" charset="-128"/>
+                                  </a:rPr>
+                                </m:ctrlPr>
+                              </m:accPr>
+                              <m:e>
+                                <m:r>
+                                  <a:rPr lang="en-US" altLang="ja-JP" sz="3200" b="1" i="1">
+                                    <a:solidFill>
+                                      <a:schemeClr val="tx1"/>
+                                    </a:solidFill>
+                                    <a:latin typeface="Cambria Math" panose="02040503050406030204" pitchFamily="18" charset="0"/>
+                                    <a:ea typeface="Hiragino Sans W4" panose="020B0400000000000000" pitchFamily="34" charset="-128"/>
+                                  </a:rPr>
+                                  <m:t>𝜷</m:t>
+                                </m:r>
+                              </m:e>
+                            </m:acc>
+                          </m:e>
+                          <m:sub>
+                            <m:r>
+                              <a:rPr lang="en-US" altLang="ja-JP" sz="2400" b="1" i="1">
+                                <a:solidFill>
+                                  <a:schemeClr val="tx1"/>
+                                </a:solidFill>
+                                <a:latin typeface="Cambria Math" panose="02040503050406030204" pitchFamily="18" charset="0"/>
+                                <a:ea typeface="Hiragino Sans W4" panose="020B0400000000000000" pitchFamily="34" charset="-128"/>
+                              </a:rPr>
+                              <m:t>𝟏</m:t>
+                            </m:r>
+                          </m:sub>
+                        </m:sSub>
+                        <m:r>
+                          <a:rPr lang="en-US" altLang="ja-JP" sz="3200" b="1" i="1">
+                            <a:solidFill>
+                              <a:schemeClr val="tx1"/>
+                            </a:solidFill>
+                            <a:latin typeface="Cambria Math" panose="02040503050406030204" pitchFamily="18" charset="0"/>
+                            <a:ea typeface="Hiragino Sans W4" panose="020B0400000000000000" pitchFamily="34" charset="-128"/>
+                          </a:rPr>
+                          <m:t>=</m:t>
+                        </m:r>
+                        <m:r>
+                          <a:rPr lang="en-US" altLang="ja-JP" sz="3200" b="1" i="1" smtClean="0">
+                            <a:solidFill>
+                              <a:schemeClr val="tx1"/>
+                            </a:solidFill>
+                            <a:latin typeface="Cambria Math" panose="02040503050406030204" pitchFamily="18" charset="0"/>
+                            <a:ea typeface="Hiragino Sans W4" panose="020B0400000000000000" pitchFamily="34" charset="-128"/>
+                          </a:rPr>
+                          <m:t>𝟏𝟗</m:t>
+                        </m:r>
+                        <m:r>
+                          <a:rPr lang="en-US" altLang="ja-JP" sz="3200" b="1" i="1" smtClean="0">
+                            <a:solidFill>
+                              <a:schemeClr val="tx1"/>
+                            </a:solidFill>
+                            <a:latin typeface="Cambria Math" panose="02040503050406030204" pitchFamily="18" charset="0"/>
+                            <a:ea typeface="Hiragino Sans W4" panose="020B0400000000000000" pitchFamily="34" charset="-128"/>
+                          </a:rPr>
+                          <m:t>.</m:t>
+                        </m:r>
+                        <m:r>
+                          <a:rPr lang="en-US" altLang="ja-JP" sz="3200" b="1" i="1" smtClean="0">
+                            <a:solidFill>
+                              <a:schemeClr val="tx1"/>
+                            </a:solidFill>
+                            <a:latin typeface="Cambria Math" panose="02040503050406030204" pitchFamily="18" charset="0"/>
+                            <a:ea typeface="Hiragino Sans W4" panose="020B0400000000000000" pitchFamily="34" charset="-128"/>
+                          </a:rPr>
+                          <m:t>𝟕</m:t>
+                        </m:r>
+                      </m:oMath>
+                    </m:oMathPara>
+                  </a14:m>
+                  <a:endParaRPr kumimoji="1" lang="ja-JP" altLang="en-US" sz="2400">
+                    <a:solidFill>
+                      <a:schemeClr val="tx1"/>
+                    </a:solidFill>
+                    <a:latin typeface="Hiragino Sans W4" panose="020B0400000000000000" pitchFamily="34" charset="-128"/>
+                    <a:ea typeface="Hiragino Sans W4" panose="020B0400000000000000" pitchFamily="34" charset="-128"/>
+                  </a:endParaRPr>
+                </a:p>
+              </p:txBody>
+            </p:sp>
+          </mc:Choice>
+          <mc:Fallback>
+            <p:sp>
+              <p:nvSpPr>
+                <p:cNvPr id="9" name="角丸四角形 8">
+                  <a:extLst>
+                    <a:ext uri="{FF2B5EF4-FFF2-40B4-BE49-F238E27FC236}">
+                      <a16:creationId xmlns:a16="http://schemas.microsoft.com/office/drawing/2014/main" id="{4E50A498-74FB-0D50-967E-E6BB55F915DC}"/>
+                    </a:ext>
+                  </a:extLst>
+                </p:cNvPr>
+                <p:cNvSpPr>
+                  <a:spLocks noRot="1" noChangeAspect="1" noMove="1" noResize="1" noEditPoints="1" noAdjustHandles="1" noChangeArrowheads="1" noChangeShapeType="1" noTextEdit="1"/>
+                </p:cNvSpPr>
+                <p:nvPr/>
+              </p:nvSpPr>
+              <p:spPr>
+                <a:xfrm>
+                  <a:off x="5740293" y="4516012"/>
+                  <a:ext cx="2530884" cy="985655"/>
+                </a:xfrm>
+                <a:prstGeom prst="roundRect">
+                  <a:avLst/>
+                </a:prstGeom>
+                <a:blipFill>
+                  <a:blip r:embed="rId7"/>
+                  <a:stretch>
+                    <a:fillRect l="-985" t="-2469" b="-11111"/>
+                  </a:stretch>
+                </a:blipFill>
+                <a:ln w="38100"/>
+              </p:spPr>
+              <p:txBody>
+                <a:bodyPr/>
+                <a:lstStyle/>
+                <a:p>
+                  <a:r>
+                    <a:rPr lang="ja-JP" altLang="en-US">
+                      <a:noFill/>
+                    </a:rPr>
+                    <a:t> </a:t>
+                  </a:r>
+                </a:p>
+              </p:txBody>
+            </p:sp>
+          </mc:Fallback>
+        </mc:AlternateContent>
+        <p:sp>
+          <p:nvSpPr>
+            <p:cNvPr id="10" name="テキスト ボックス 9">
+              <a:extLst>
+                <a:ext uri="{FF2B5EF4-FFF2-40B4-BE49-F238E27FC236}">
+                  <a16:creationId xmlns:a16="http://schemas.microsoft.com/office/drawing/2014/main" id="{1D0D3F99-1CDC-F34E-B815-DACC09C73F68}"/>
+                </a:ext>
+              </a:extLst>
+            </p:cNvPr>
+            <p:cNvSpPr txBox="1"/>
+            <p:nvPr/>
+          </p:nvSpPr>
+          <p:spPr>
+            <a:xfrm rot="5400000">
+              <a:off x="6559939" y="5715373"/>
+              <a:ext cx="891591" cy="923330"/>
+            </a:xfrm>
+            <a:prstGeom prst="rect">
+              <a:avLst/>
+            </a:prstGeom>
+            <a:noFill/>
+          </p:spPr>
+          <p:txBody>
+            <a:bodyPr wrap="none" rtlCol="0">
+              <a:spAutoFit/>
+            </a:bodyPr>
+            <a:lstStyle/>
+            <a:p>
+              <a:r>
+                <a:rPr kumimoji="1" lang="en-US" altLang="ja-JP" sz="5400" b="1" dirty="0">
+                  <a:latin typeface="Hiragino Sans W4" panose="020B0400000000000000" pitchFamily="34" charset="-128"/>
+                  <a:ea typeface="Hiragino Sans W4" panose="020B0400000000000000" pitchFamily="34" charset="-128"/>
+                </a:rPr>
+                <a:t>…</a:t>
+              </a:r>
+              <a:endParaRPr kumimoji="1" lang="ja-JP" altLang="en-US" sz="5400" b="1">
+                <a:latin typeface="Hiragino Sans W4" panose="020B0400000000000000" pitchFamily="34" charset="-128"/>
+                <a:ea typeface="Hiragino Sans W4" panose="020B0400000000000000" pitchFamily="34" charset="-128"/>
+              </a:endParaRPr>
+            </a:p>
+          </p:txBody>
+        </p:sp>
+        <p:sp>
+          <p:nvSpPr>
+            <p:cNvPr id="11" name="右矢印 10">
+              <a:extLst>
+                <a:ext uri="{FF2B5EF4-FFF2-40B4-BE49-F238E27FC236}">
+                  <a16:creationId xmlns:a16="http://schemas.microsoft.com/office/drawing/2014/main" id="{93662BA1-9A30-6761-CDA3-8BFFC013166A}"/>
+                </a:ext>
+              </a:extLst>
+            </p:cNvPr>
+            <p:cNvSpPr/>
+            <p:nvPr/>
+          </p:nvSpPr>
+          <p:spPr>
+            <a:xfrm flipH="1">
+              <a:off x="8420821" y="265376"/>
+              <a:ext cx="1029161" cy="556352"/>
+            </a:xfrm>
+            <a:prstGeom prst="rightArrow">
+              <a:avLst/>
+            </a:prstGeom>
+            <a:solidFill>
+              <a:schemeClr val="tx1"/>
+            </a:solidFill>
+            <a:ln>
+              <a:noFill/>
+            </a:ln>
+          </p:spPr>
+          <p:style>
+            <a:lnRef idx="2">
+              <a:schemeClr val="accent1">
+                <a:shade val="15000"/>
+              </a:schemeClr>
+            </a:lnRef>
+            <a:fillRef idx="1">
+              <a:schemeClr val="accent1"/>
+            </a:fillRef>
+            <a:effectRef idx="0">
+              <a:schemeClr val="accent1"/>
+            </a:effectRef>
+            <a:fontRef idx="minor">
+              <a:schemeClr val="lt1"/>
+            </a:fontRef>
+          </p:style>
+          <p:txBody>
+            <a:bodyPr rtlCol="0" anchor="ctr"/>
+            <a:lstStyle/>
+            <a:p>
+              <a:pPr algn="ctr"/>
+              <a:endParaRPr kumimoji="1" lang="ja-JP" altLang="en-US"/>
+            </a:p>
+          </p:txBody>
+        </p:sp>
+        <p:sp>
+          <p:nvSpPr>
+            <p:cNvPr id="12" name="右矢印 11">
+              <a:extLst>
+                <a:ext uri="{FF2B5EF4-FFF2-40B4-BE49-F238E27FC236}">
+                  <a16:creationId xmlns:a16="http://schemas.microsoft.com/office/drawing/2014/main" id="{AACC7D4B-45B8-4311-D9F9-33E134088B8F}"/>
+                </a:ext>
+              </a:extLst>
+            </p:cNvPr>
+            <p:cNvSpPr/>
+            <p:nvPr/>
+          </p:nvSpPr>
+          <p:spPr>
+            <a:xfrm flipH="1">
+              <a:off x="8420821" y="1339582"/>
+              <a:ext cx="1029161" cy="556352"/>
+            </a:xfrm>
+            <a:prstGeom prst="rightArrow">
+              <a:avLst/>
+            </a:prstGeom>
+            <a:solidFill>
+              <a:schemeClr val="tx1"/>
+            </a:solidFill>
+            <a:ln>
+              <a:noFill/>
+            </a:ln>
+          </p:spPr>
+          <p:style>
+            <a:lnRef idx="2">
+              <a:schemeClr val="accent1">
+                <a:shade val="15000"/>
+              </a:schemeClr>
+            </a:lnRef>
+            <a:fillRef idx="1">
+              <a:schemeClr val="accent1"/>
+            </a:fillRef>
+            <a:effectRef idx="0">
+              <a:schemeClr val="accent1"/>
+            </a:effectRef>
+            <a:fontRef idx="minor">
+              <a:schemeClr val="lt1"/>
+            </a:fontRef>
+          </p:style>
+          <p:txBody>
+            <a:bodyPr rtlCol="0" anchor="ctr"/>
+            <a:lstStyle/>
+            <a:p>
+              <a:pPr algn="ctr"/>
+              <a:endParaRPr kumimoji="1" lang="ja-JP" altLang="en-US"/>
+            </a:p>
+          </p:txBody>
+        </p:sp>
+        <p:sp>
+          <p:nvSpPr>
+            <p:cNvPr id="13" name="右矢印 12">
+              <a:extLst>
+                <a:ext uri="{FF2B5EF4-FFF2-40B4-BE49-F238E27FC236}">
+                  <a16:creationId xmlns:a16="http://schemas.microsoft.com/office/drawing/2014/main" id="{34BD1457-3A67-DF3E-82A4-63F03FDD8FFA}"/>
+                </a:ext>
+              </a:extLst>
+            </p:cNvPr>
+            <p:cNvSpPr/>
+            <p:nvPr/>
+          </p:nvSpPr>
+          <p:spPr>
+            <a:xfrm flipH="1">
+              <a:off x="8398332" y="2413788"/>
+              <a:ext cx="1029161" cy="556352"/>
+            </a:xfrm>
+            <a:prstGeom prst="rightArrow">
+              <a:avLst/>
+            </a:prstGeom>
+            <a:solidFill>
+              <a:schemeClr val="tx1"/>
+            </a:solidFill>
+            <a:ln>
+              <a:noFill/>
+            </a:ln>
+          </p:spPr>
+          <p:style>
+            <a:lnRef idx="2">
+              <a:schemeClr val="accent1">
+                <a:shade val="15000"/>
+              </a:schemeClr>
+            </a:lnRef>
+            <a:fillRef idx="1">
+              <a:schemeClr val="accent1"/>
+            </a:fillRef>
+            <a:effectRef idx="0">
+              <a:schemeClr val="accent1"/>
+            </a:effectRef>
+            <a:fontRef idx="minor">
+              <a:schemeClr val="lt1"/>
+            </a:fontRef>
+          </p:style>
+          <p:txBody>
+            <a:bodyPr rtlCol="0" anchor="ctr"/>
+            <a:lstStyle/>
+            <a:p>
+              <a:pPr algn="ctr"/>
+              <a:endParaRPr kumimoji="1" lang="ja-JP" altLang="en-US"/>
+            </a:p>
+          </p:txBody>
+        </p:sp>
+        <p:sp>
+          <p:nvSpPr>
+            <p:cNvPr id="14" name="右矢印 13">
+              <a:extLst>
+                <a:ext uri="{FF2B5EF4-FFF2-40B4-BE49-F238E27FC236}">
+                  <a16:creationId xmlns:a16="http://schemas.microsoft.com/office/drawing/2014/main" id="{768854E4-A771-0757-7080-6FD7225155E4}"/>
+                </a:ext>
+              </a:extLst>
+            </p:cNvPr>
+            <p:cNvSpPr/>
+            <p:nvPr/>
+          </p:nvSpPr>
+          <p:spPr>
+            <a:xfrm flipH="1">
+              <a:off x="8420821" y="3529123"/>
+              <a:ext cx="1029161" cy="556352"/>
+            </a:xfrm>
+            <a:prstGeom prst="rightArrow">
+              <a:avLst/>
+            </a:prstGeom>
+            <a:solidFill>
+              <a:schemeClr val="tx1"/>
+            </a:solidFill>
+            <a:ln>
+              <a:noFill/>
+            </a:ln>
+          </p:spPr>
+          <p:style>
+            <a:lnRef idx="2">
+              <a:schemeClr val="accent1">
+                <a:shade val="15000"/>
+              </a:schemeClr>
+            </a:lnRef>
+            <a:fillRef idx="1">
+              <a:schemeClr val="accent1"/>
+            </a:fillRef>
+            <a:effectRef idx="0">
+              <a:schemeClr val="accent1"/>
+            </a:effectRef>
+            <a:fontRef idx="minor">
+              <a:schemeClr val="lt1"/>
+            </a:fontRef>
+          </p:style>
+          <p:txBody>
+            <a:bodyPr rtlCol="0" anchor="ctr"/>
+            <a:lstStyle/>
+            <a:p>
+              <a:pPr algn="ctr"/>
+              <a:endParaRPr kumimoji="1" lang="ja-JP" altLang="en-US"/>
+            </a:p>
+          </p:txBody>
+        </p:sp>
+        <p:sp>
+          <p:nvSpPr>
+            <p:cNvPr id="15" name="右矢印 14">
+              <a:extLst>
+                <a:ext uri="{FF2B5EF4-FFF2-40B4-BE49-F238E27FC236}">
+                  <a16:creationId xmlns:a16="http://schemas.microsoft.com/office/drawing/2014/main" id="{D9EA1BF9-FFFA-1561-6BC3-861F8ECE5BC8}"/>
+                </a:ext>
+              </a:extLst>
+            </p:cNvPr>
+            <p:cNvSpPr/>
+            <p:nvPr/>
+          </p:nvSpPr>
+          <p:spPr>
+            <a:xfrm flipH="1">
+              <a:off x="8420820" y="4730663"/>
+              <a:ext cx="1029161" cy="556352"/>
+            </a:xfrm>
+            <a:prstGeom prst="rightArrow">
+              <a:avLst/>
+            </a:prstGeom>
+            <a:solidFill>
+              <a:schemeClr val="tx1"/>
+            </a:solidFill>
+            <a:ln>
+              <a:noFill/>
+            </a:ln>
+          </p:spPr>
+          <p:style>
+            <a:lnRef idx="2">
+              <a:schemeClr val="accent1">
+                <a:shade val="15000"/>
+              </a:schemeClr>
+            </a:lnRef>
+            <a:fillRef idx="1">
+              <a:schemeClr val="accent1"/>
+            </a:fillRef>
+            <a:effectRef idx="0">
+              <a:schemeClr val="accent1"/>
+            </a:effectRef>
+            <a:fontRef idx="minor">
+              <a:schemeClr val="lt1"/>
+            </a:fontRef>
+          </p:style>
+          <p:txBody>
+            <a:bodyPr rtlCol="0" anchor="ctr"/>
+            <a:lstStyle/>
+            <a:p>
+              <a:pPr algn="ctr"/>
+              <a:endParaRPr kumimoji="1" lang="ja-JP" altLang="en-US"/>
+            </a:p>
+          </p:txBody>
+        </p:sp>
+        <p:sp>
+          <p:nvSpPr>
+            <p:cNvPr id="16" name="左中かっこ 15">
+              <a:extLst>
+                <a:ext uri="{FF2B5EF4-FFF2-40B4-BE49-F238E27FC236}">
+                  <a16:creationId xmlns:a16="http://schemas.microsoft.com/office/drawing/2014/main" id="{10865E95-D4DB-1D93-5753-95758B93D8FD}"/>
+                </a:ext>
+              </a:extLst>
+            </p:cNvPr>
+            <p:cNvSpPr/>
+            <p:nvPr/>
+          </p:nvSpPr>
+          <p:spPr>
+            <a:xfrm>
+              <a:off x="4958829" y="344208"/>
+              <a:ext cx="627961" cy="6513792"/>
+            </a:xfrm>
+            <a:prstGeom prst="leftBrace">
+              <a:avLst>
+                <a:gd name="adj1" fmla="val 59649"/>
+                <a:gd name="adj2" fmla="val 50000"/>
+              </a:avLst>
+            </a:prstGeom>
+          </p:spPr>
+          <p:style>
+            <a:lnRef idx="2">
+              <a:schemeClr val="dk1"/>
+            </a:lnRef>
+            <a:fillRef idx="0">
+              <a:schemeClr val="dk1"/>
+            </a:fillRef>
+            <a:effectRef idx="1">
+              <a:schemeClr val="dk1"/>
+            </a:effectRef>
+            <a:fontRef idx="minor">
+              <a:schemeClr val="tx1"/>
+            </a:fontRef>
+          </p:style>
+          <p:txBody>
+            <a:bodyPr rtlCol="0" anchor="ctr"/>
+            <a:lstStyle/>
+            <a:p>
+              <a:pPr algn="ctr"/>
+              <a:endParaRPr kumimoji="1" lang="ja-JP" altLang="en-US"/>
+            </a:p>
+          </p:txBody>
+        </p:sp>
+        <p:cxnSp>
+          <p:nvCxnSpPr>
+            <p:cNvPr id="24" name="直線コネクタ 23">
+              <a:extLst>
+                <a:ext uri="{FF2B5EF4-FFF2-40B4-BE49-F238E27FC236}">
+                  <a16:creationId xmlns:a16="http://schemas.microsoft.com/office/drawing/2014/main" id="{66FBF9E2-C460-66CB-A3B3-B6B974938839}"/>
+                </a:ext>
+              </a:extLst>
+            </p:cNvPr>
+            <p:cNvCxnSpPr>
+              <a:cxnSpLocks/>
+            </p:cNvCxnSpPr>
+            <p:nvPr/>
+          </p:nvCxnSpPr>
+          <p:spPr>
+            <a:xfrm>
+              <a:off x="315311" y="5459439"/>
+              <a:ext cx="4361792" cy="0"/>
+            </a:xfrm>
+            <a:prstGeom prst="line">
+              <a:avLst/>
+            </a:prstGeom>
+            <a:ln w="57150"/>
+          </p:spPr>
+          <p:style>
+            <a:lnRef idx="2">
+              <a:schemeClr val="dk1"/>
+            </a:lnRef>
+            <a:fillRef idx="0">
+              <a:schemeClr val="dk1"/>
+            </a:fillRef>
+            <a:effectRef idx="1">
+              <a:schemeClr val="dk1"/>
+            </a:effectRef>
+            <a:fontRef idx="minor">
+              <a:schemeClr val="tx1"/>
+            </a:fontRef>
+          </p:style>
+        </p:cxnSp>
+        <p:sp>
+          <p:nvSpPr>
+            <p:cNvPr id="35" name="フリーフォーム 34">
+              <a:extLst>
+                <a:ext uri="{FF2B5EF4-FFF2-40B4-BE49-F238E27FC236}">
+                  <a16:creationId xmlns:a16="http://schemas.microsoft.com/office/drawing/2014/main" id="{F47D5721-9C0F-EAD2-6B00-4C19B8066F24}"/>
+                </a:ext>
+              </a:extLst>
+            </p:cNvPr>
+            <p:cNvSpPr/>
+            <p:nvPr/>
+          </p:nvSpPr>
+          <p:spPr>
+            <a:xfrm>
+              <a:off x="315311" y="1339582"/>
+              <a:ext cx="4361792" cy="3558239"/>
+            </a:xfrm>
+            <a:custGeom>
+              <a:avLst/>
+              <a:gdLst>
+                <a:gd name="csX0" fmla="*/ 0 w 5801711"/>
+                <a:gd name="csY0" fmla="*/ 3615559 h 3615559"/>
+                <a:gd name="csX1" fmla="*/ 1460938 w 5801711"/>
+                <a:gd name="csY1" fmla="*/ 2879835 h 3615559"/>
+                <a:gd name="csX2" fmla="*/ 2175642 w 5801711"/>
+                <a:gd name="csY2" fmla="*/ 725214 h 3615559"/>
+                <a:gd name="csX3" fmla="*/ 2911366 w 5801711"/>
+                <a:gd name="csY3" fmla="*/ 0 h 3615559"/>
+                <a:gd name="csX4" fmla="*/ 3636580 w 5801711"/>
+                <a:gd name="csY4" fmla="*/ 725214 h 3615559"/>
+                <a:gd name="csX5" fmla="*/ 4330262 w 5801711"/>
+                <a:gd name="csY5" fmla="*/ 2890345 h 3615559"/>
+                <a:gd name="csX6" fmla="*/ 5801711 w 5801711"/>
+                <a:gd name="csY6" fmla="*/ 3594538 h 3615559"/>
+              </a:gdLst>
+              <a:ahLst/>
+              <a:cxnLst>
+                <a:cxn ang="0">
+                  <a:pos x="csX0" y="csY0"/>
+                </a:cxn>
+                <a:cxn ang="0">
+                  <a:pos x="csX1" y="csY1"/>
+                </a:cxn>
+                <a:cxn ang="0">
+                  <a:pos x="csX2" y="csY2"/>
+                </a:cxn>
+                <a:cxn ang="0">
+                  <a:pos x="csX3" y="csY3"/>
+                </a:cxn>
+                <a:cxn ang="0">
+                  <a:pos x="csX4" y="csY4"/>
+                </a:cxn>
+                <a:cxn ang="0">
+                  <a:pos x="csX5" y="csY5"/>
+                </a:cxn>
+                <a:cxn ang="0">
+                  <a:pos x="csX6" y="csY6"/>
+                </a:cxn>
+              </a:cxnLst>
+              <a:rect l="l" t="t" r="r" b="b"/>
+              <a:pathLst>
+                <a:path w="5801711" h="3615559">
+                  <a:moveTo>
+                    <a:pt x="0" y="3615559"/>
+                  </a:moveTo>
+                  <a:cubicBezTo>
+                    <a:pt x="549165" y="3488559"/>
+                    <a:pt x="1098331" y="3361559"/>
+                    <a:pt x="1460938" y="2879835"/>
+                  </a:cubicBezTo>
+                  <a:cubicBezTo>
+                    <a:pt x="1823545" y="2398111"/>
+                    <a:pt x="1933904" y="1205186"/>
+                    <a:pt x="2175642" y="725214"/>
+                  </a:cubicBezTo>
+                  <a:cubicBezTo>
+                    <a:pt x="2417380" y="245242"/>
+                    <a:pt x="2667876" y="0"/>
+                    <a:pt x="2911366" y="0"/>
+                  </a:cubicBezTo>
+                  <a:cubicBezTo>
+                    <a:pt x="3154856" y="0"/>
+                    <a:pt x="3400097" y="243490"/>
+                    <a:pt x="3636580" y="725214"/>
+                  </a:cubicBezTo>
+                  <a:cubicBezTo>
+                    <a:pt x="3873063" y="1206938"/>
+                    <a:pt x="3969407" y="2412124"/>
+                    <a:pt x="4330262" y="2890345"/>
+                  </a:cubicBezTo>
+                  <a:cubicBezTo>
+                    <a:pt x="4691117" y="3368566"/>
+                    <a:pt x="5246414" y="3481552"/>
+                    <a:pt x="5801711" y="3594538"/>
+                  </a:cubicBezTo>
+                </a:path>
+              </a:pathLst>
+            </a:custGeom>
+            <a:ln w="28575"/>
+          </p:spPr>
+          <p:style>
+            <a:lnRef idx="1">
+              <a:schemeClr val="dk1"/>
+            </a:lnRef>
+            <a:fillRef idx="0">
+              <a:schemeClr val="dk1"/>
+            </a:fillRef>
+            <a:effectRef idx="0">
+              <a:schemeClr val="dk1"/>
+            </a:effectRef>
+            <a:fontRef idx="minor">
+              <a:schemeClr val="tx1"/>
+            </a:fontRef>
+          </p:style>
+          <p:txBody>
+            <a:bodyPr rtlCol="0" anchor="ctr"/>
+            <a:lstStyle/>
+            <a:p>
+              <a:pPr algn="ctr"/>
+              <a:endParaRPr kumimoji="1" lang="ja-JP" altLang="en-US"/>
+            </a:p>
+          </p:txBody>
+        </p:sp>
+        <mc:AlternateContent xmlns:mc="http://schemas.openxmlformats.org/markup-compatibility/2006">
+          <mc:Choice xmlns:a14="http://schemas.microsoft.com/office/drawing/2010/main" Requires="a14">
+            <p:sp>
+              <p:nvSpPr>
+                <p:cNvPr id="40" name="テキスト ボックス 39">
+                  <a:extLst>
+                    <a:ext uri="{FF2B5EF4-FFF2-40B4-BE49-F238E27FC236}">
+                      <a16:creationId xmlns:a16="http://schemas.microsoft.com/office/drawing/2014/main" id="{29BD59F7-A784-FBB1-8EDC-D3DE3F5297A0}"/>
+                    </a:ext>
+                  </a:extLst>
+                </p:cNvPr>
+                <p:cNvSpPr txBox="1"/>
+                <p:nvPr/>
+              </p:nvSpPr>
+              <p:spPr>
+                <a:xfrm>
+                  <a:off x="577667" y="124580"/>
+                  <a:ext cx="3852884" cy="611386"/>
+                </a:xfrm>
+                <a:prstGeom prst="rect">
+                  <a:avLst/>
+                </a:prstGeom>
+                <a:noFill/>
+                <a:ln w="12700">
+                  <a:solidFill>
+                    <a:schemeClr val="tx1"/>
+                  </a:solidFill>
+                </a:ln>
+              </p:spPr>
+              <p:txBody>
+                <a:bodyPr wrap="square">
+                  <a:spAutoFit/>
+                </a:bodyPr>
+                <a:lstStyle/>
+                <a:p>
+                  <a:pPr algn="ctr"/>
+                  <a14:m>
+                    <m:oMath xmlns:m="http://schemas.openxmlformats.org/officeDocument/2006/math">
+                      <m:sSub>
+                        <m:sSubPr>
+                          <m:ctrlPr>
+                            <a:rPr kumimoji="1" lang="en-US" altLang="ja-JP" sz="3200" b="1" i="1" smtClean="0">
+                              <a:solidFill>
+                                <a:schemeClr val="tx1"/>
+                              </a:solidFill>
+                              <a:latin typeface="Cambria Math" panose="02040503050406030204" pitchFamily="18" charset="0"/>
+                              <a:ea typeface="Hiragino Sans W4" panose="020B0400000000000000" pitchFamily="34" charset="-128"/>
+                            </a:rPr>
+                          </m:ctrlPr>
+                        </m:sSubPr>
+                        <m:e>
+                          <m:acc>
+                            <m:accPr>
+                              <m:chr m:val="̂"/>
+                              <m:ctrlPr>
+                                <a:rPr kumimoji="1" lang="en-US" altLang="ja-JP" sz="3200" b="1" i="1" smtClean="0">
+                                  <a:solidFill>
+                                    <a:schemeClr val="tx1"/>
+                                  </a:solidFill>
+                                  <a:latin typeface="Cambria Math" panose="02040503050406030204" pitchFamily="18" charset="0"/>
+                                  <a:ea typeface="Hiragino Sans W4" panose="020B0400000000000000" pitchFamily="34" charset="-128"/>
+                                </a:rPr>
+                              </m:ctrlPr>
+                            </m:accPr>
+                            <m:e>
+                              <m:r>
+                                <a:rPr kumimoji="1" lang="en-US" altLang="ja-JP" sz="3200" b="1" i="1" smtClean="0">
+                                  <a:solidFill>
+                                    <a:schemeClr val="tx1"/>
+                                  </a:solidFill>
+                                  <a:latin typeface="Cambria Math" panose="02040503050406030204" pitchFamily="18" charset="0"/>
+                                  <a:ea typeface="Hiragino Sans W4" panose="020B0400000000000000" pitchFamily="34" charset="-128"/>
+                                </a:rPr>
+                                <m:t>𝜷</m:t>
+                              </m:r>
+                            </m:e>
+                          </m:acc>
+                        </m:e>
+                        <m:sub>
+                          <m:r>
+                            <a:rPr kumimoji="1" lang="en-US" altLang="ja-JP" sz="3200" b="1" i="1" smtClean="0">
+                              <a:solidFill>
+                                <a:schemeClr val="tx1"/>
+                              </a:solidFill>
+                              <a:latin typeface="Cambria Math" panose="02040503050406030204" pitchFamily="18" charset="0"/>
+                              <a:ea typeface="Hiragino Sans W4" panose="020B0400000000000000" pitchFamily="34" charset="-128"/>
+                            </a:rPr>
+                            <m:t>𝟏</m:t>
+                          </m:r>
+                        </m:sub>
+                      </m:sSub>
+                    </m:oMath>
+                  </a14:m>
+                  <a:r>
+                    <a:rPr lang="ja-JP" altLang="en-US" sz="3200" b="1">
+                      <a:latin typeface="Hiragino Sans W4" panose="020B0400000000000000" pitchFamily="34" charset="-128"/>
+                      <a:ea typeface="Hiragino Sans W4" panose="020B0400000000000000" pitchFamily="34" charset="-128"/>
+                    </a:rPr>
+                    <a:t>の分布</a:t>
+                  </a:r>
+                  <a:r>
+                    <a:rPr lang="en-US" altLang="ja-JP" sz="3200" b="1" dirty="0">
+                      <a:latin typeface="Hiragino Sans W4" panose="020B0400000000000000" pitchFamily="34" charset="-128"/>
+                      <a:ea typeface="Hiragino Sans W4" panose="020B0400000000000000" pitchFamily="34" charset="-128"/>
+                    </a:rPr>
+                    <a:t>=</a:t>
+                  </a:r>
+                  <a:r>
+                    <a:rPr lang="ja-JP" altLang="en-US" sz="3200" b="1">
+                      <a:latin typeface="Hiragino Sans W4" panose="020B0400000000000000" pitchFamily="34" charset="-128"/>
+                      <a:ea typeface="Hiragino Sans W4" panose="020B0400000000000000" pitchFamily="34" charset="-128"/>
+                    </a:rPr>
+                    <a:t>正規分布</a:t>
+                  </a:r>
+                  <a:endParaRPr lang="en-US" altLang="ja-JP" sz="3200" b="1" dirty="0">
+                    <a:latin typeface="Hiragino Sans W4" panose="020B0400000000000000" pitchFamily="34" charset="-128"/>
+                    <a:ea typeface="Hiragino Sans W4" panose="020B0400000000000000" pitchFamily="34" charset="-128"/>
+                  </a:endParaRPr>
+                </a:p>
+              </p:txBody>
+            </p:sp>
+          </mc:Choice>
+          <mc:Fallback>
+            <p:sp>
+              <p:nvSpPr>
+                <p:cNvPr id="40" name="テキスト ボックス 39">
+                  <a:extLst>
+                    <a:ext uri="{FF2B5EF4-FFF2-40B4-BE49-F238E27FC236}">
+                      <a16:creationId xmlns:a16="http://schemas.microsoft.com/office/drawing/2014/main" id="{29BD59F7-A784-FBB1-8EDC-D3DE3F5297A0}"/>
+                    </a:ext>
+                  </a:extLst>
+                </p:cNvPr>
+                <p:cNvSpPr txBox="1">
+                  <a:spLocks noRot="1" noChangeAspect="1" noMove="1" noResize="1" noEditPoints="1" noAdjustHandles="1" noChangeArrowheads="1" noChangeShapeType="1" noTextEdit="1"/>
+                </p:cNvSpPr>
+                <p:nvPr/>
+              </p:nvSpPr>
+              <p:spPr>
+                <a:xfrm>
+                  <a:off x="577667" y="124580"/>
+                  <a:ext cx="3852884" cy="611386"/>
+                </a:xfrm>
+                <a:prstGeom prst="rect">
+                  <a:avLst/>
+                </a:prstGeom>
+                <a:blipFill>
+                  <a:blip r:embed="rId8"/>
+                  <a:stretch>
+                    <a:fillRect l="-1967" t="-8000" r="-3607" b="-28000"/>
+                  </a:stretch>
+                </a:blipFill>
+                <a:ln w="12700">
+                  <a:solidFill>
+                    <a:schemeClr val="tx1"/>
+                  </a:solidFill>
+                </a:ln>
+              </p:spPr>
+              <p:txBody>
+                <a:bodyPr/>
+                <a:lstStyle/>
+                <a:p>
+                  <a:r>
+                    <a:rPr lang="ja-JP" altLang="en-US">
+                      <a:noFill/>
+                    </a:rPr>
+                    <a:t> </a:t>
+                  </a:r>
+                </a:p>
+              </p:txBody>
+            </p:sp>
+          </mc:Fallback>
+        </mc:AlternateContent>
+        <p:cxnSp>
+          <p:nvCxnSpPr>
+            <p:cNvPr id="42" name="直線コネクタ 41">
+              <a:extLst>
+                <a:ext uri="{FF2B5EF4-FFF2-40B4-BE49-F238E27FC236}">
+                  <a16:creationId xmlns:a16="http://schemas.microsoft.com/office/drawing/2014/main" id="{C2177D59-ECCD-CECA-8938-896B4148A55B}"/>
+                </a:ext>
+              </a:extLst>
+            </p:cNvPr>
+            <p:cNvCxnSpPr>
+              <a:cxnSpLocks/>
+              <a:stCxn id="35" idx="3"/>
+            </p:cNvCxnSpPr>
+            <p:nvPr/>
+          </p:nvCxnSpPr>
+          <p:spPr>
+            <a:xfrm>
+              <a:off x="2504109" y="1339582"/>
+              <a:ext cx="0" cy="4119857"/>
+            </a:xfrm>
+            <a:prstGeom prst="line">
+              <a:avLst/>
+            </a:prstGeom>
+            <a:ln>
+              <a:solidFill>
+                <a:schemeClr val="tx1"/>
+              </a:solidFill>
+              <a:prstDash val="sysDash"/>
+            </a:ln>
+          </p:spPr>
+          <p:style>
+            <a:lnRef idx="2">
+              <a:schemeClr val="accent1"/>
+            </a:lnRef>
+            <a:fillRef idx="0">
+              <a:schemeClr val="accent1"/>
+            </a:fillRef>
+            <a:effectRef idx="1">
+              <a:schemeClr val="accent1"/>
+            </a:effectRef>
+            <a:fontRef idx="minor">
+              <a:schemeClr val="tx1"/>
+            </a:fontRef>
+          </p:style>
+        </p:cxnSp>
+        <p:sp>
+          <p:nvSpPr>
+            <p:cNvPr id="43" name="テキスト ボックス 42">
+              <a:extLst>
+                <a:ext uri="{FF2B5EF4-FFF2-40B4-BE49-F238E27FC236}">
+                  <a16:creationId xmlns:a16="http://schemas.microsoft.com/office/drawing/2014/main" id="{315BD5F7-0105-EC93-6404-A826759858A9}"/>
+                </a:ext>
+              </a:extLst>
+            </p:cNvPr>
+            <p:cNvSpPr txBox="1"/>
+            <p:nvPr/>
+          </p:nvSpPr>
+          <p:spPr>
+            <a:xfrm>
+              <a:off x="1789582" y="5579101"/>
+              <a:ext cx="1429054" cy="523220"/>
+            </a:xfrm>
+            <a:prstGeom prst="rect">
+              <a:avLst/>
+            </a:prstGeom>
+            <a:noFill/>
+            <a:ln w="12700">
+              <a:noFill/>
+            </a:ln>
+          </p:spPr>
+          <p:txBody>
+            <a:bodyPr wrap="square">
+              <a:spAutoFit/>
+            </a:bodyPr>
+            <a:lstStyle/>
+            <a:p>
+              <a:pPr algn="ctr"/>
+              <a:r>
+                <a:rPr lang="ja-JP" altLang="en-US" sz="2800" b="1">
+                  <a:latin typeface="Hiragino Sans W4" panose="020B0400000000000000" pitchFamily="34" charset="-128"/>
+                  <a:ea typeface="Hiragino Sans W4" panose="020B0400000000000000" pitchFamily="34" charset="-128"/>
+                </a:rPr>
+                <a:t>平均</a:t>
+              </a:r>
+            </a:p>
+          </p:txBody>
+        </p:sp>
+        <p:sp>
+          <p:nvSpPr>
+            <p:cNvPr id="44" name="左右矢印 43">
+              <a:extLst>
+                <a:ext uri="{FF2B5EF4-FFF2-40B4-BE49-F238E27FC236}">
+                  <a16:creationId xmlns:a16="http://schemas.microsoft.com/office/drawing/2014/main" id="{4A7A76C0-F1FA-90B9-55A0-95420C4CFB03}"/>
+                </a:ext>
+              </a:extLst>
+            </p:cNvPr>
+            <p:cNvSpPr/>
+            <p:nvPr/>
+          </p:nvSpPr>
+          <p:spPr>
+            <a:xfrm>
+              <a:off x="2572470" y="953493"/>
+              <a:ext cx="2119992" cy="283780"/>
+            </a:xfrm>
+            <a:prstGeom prst="leftRightArrow">
+              <a:avLst/>
+            </a:prstGeom>
+          </p:spPr>
+          <p:style>
+            <a:lnRef idx="2">
+              <a:schemeClr val="dk1">
+                <a:shade val="15000"/>
+              </a:schemeClr>
+            </a:lnRef>
+            <a:fillRef idx="1">
+              <a:schemeClr val="dk1"/>
+            </a:fillRef>
+            <a:effectRef idx="0">
+              <a:schemeClr val="dk1"/>
+            </a:effectRef>
+            <a:fontRef idx="minor">
+              <a:schemeClr val="lt1"/>
+            </a:fontRef>
+          </p:style>
+          <p:txBody>
+            <a:bodyPr rtlCol="0" anchor="ctr"/>
+            <a:lstStyle/>
+            <a:p>
+              <a:pPr algn="ctr"/>
+              <a:endParaRPr kumimoji="1" lang="ja-JP" altLang="en-US"/>
+            </a:p>
+          </p:txBody>
+        </p:sp>
+        <p:sp>
+          <p:nvSpPr>
+            <p:cNvPr id="47" name="テキスト ボックス 46">
+              <a:extLst>
+                <a:ext uri="{FF2B5EF4-FFF2-40B4-BE49-F238E27FC236}">
+                  <a16:creationId xmlns:a16="http://schemas.microsoft.com/office/drawing/2014/main" id="{B82CD029-1917-72DA-526B-829545424013}"/>
+                </a:ext>
+              </a:extLst>
+            </p:cNvPr>
+            <p:cNvSpPr txBox="1"/>
+            <p:nvPr/>
+          </p:nvSpPr>
+          <p:spPr>
+            <a:xfrm>
+              <a:off x="2883892" y="1237273"/>
+              <a:ext cx="2612734" cy="523220"/>
+            </a:xfrm>
+            <a:prstGeom prst="rect">
+              <a:avLst/>
+            </a:prstGeom>
+            <a:noFill/>
+            <a:ln w="12700">
+              <a:noFill/>
+            </a:ln>
+          </p:spPr>
+          <p:txBody>
+            <a:bodyPr wrap="square">
+              <a:spAutoFit/>
+            </a:bodyPr>
+            <a:lstStyle/>
+            <a:p>
+              <a:pPr/>
+              <a:r>
+                <a:rPr lang="ja-JP" altLang="en-US" sz="2800" b="1">
+                  <a:latin typeface="Hiragino Sans W4" panose="020B0400000000000000" pitchFamily="34" charset="-128"/>
+                  <a:ea typeface="Hiragino Sans W4" panose="020B0400000000000000" pitchFamily="34" charset="-128"/>
+                </a:rPr>
+                <a:t>分散</a:t>
+              </a:r>
+              <a:r>
+                <a:rPr lang="ja-JP" altLang="en-US" sz="2000" b="1">
+                  <a:latin typeface="Hiragino Sans W4" panose="020B0400000000000000" pitchFamily="34" charset="-128"/>
+                  <a:ea typeface="Hiragino Sans W4" panose="020B0400000000000000" pitchFamily="34" charset="-128"/>
+                </a:rPr>
+                <a:t>（標準誤差）</a:t>
+              </a:r>
+              <a:endParaRPr lang="ja-JP" altLang="en-US" sz="2800" b="1">
+                <a:latin typeface="Hiragino Sans W4" panose="020B0400000000000000" pitchFamily="34" charset="-128"/>
+                <a:ea typeface="Hiragino Sans W4" panose="020B0400000000000000" pitchFamily="34" charset="-128"/>
+              </a:endParaRPr>
+            </a:p>
+          </p:txBody>
+        </p:sp>
+      </p:grpSp>
+    </p:spTree>
+    <p:extLst>
+      <p:ext uri="{BB962C8B-B14F-4D97-AF65-F5344CB8AC3E}">
+        <p14:creationId xmlns:p14="http://schemas.microsoft.com/office/powerpoint/2010/main" val="2349887949"/>
       </p:ext>
     </p:extLst>
   </p:cSld>

--- a/figs/DIYfigures_icpa2.pptx
+++ b/figs/DIYfigures_icpa2.pptx
@@ -207,7 +207,7 @@
           <a:p>
             <a:fld id="{578D67A2-3998-1741-A572-96ADB5DE7BBF}" type="datetimeFigureOut">
               <a:rPr kumimoji="1" lang="ja-JP" altLang="en-US" smtClean="0"/>
-              <a:t>2026/10/2</a:t>
+              <a:t>2026/10/20</a:t>
             </a:fld>
             <a:endParaRPr kumimoji="1" lang="ja-JP" altLang="en-US"/>
           </a:p>
@@ -905,7 +905,7 @@
           <a:p>
             <a:fld id="{F4B6AA23-F6BB-FA47-96B5-569FAB187581}" type="datetimeFigureOut">
               <a:rPr kumimoji="1" lang="ja-JP" altLang="en-US" smtClean="0"/>
-              <a:t>2026/10/2</a:t>
+              <a:t>2026/10/20</a:t>
             </a:fld>
             <a:endParaRPr kumimoji="1" lang="ja-JP" altLang="en-US"/>
           </a:p>
@@ -1135,7 +1135,7 @@
           <a:p>
             <a:fld id="{F4B6AA23-F6BB-FA47-96B5-569FAB187581}" type="datetimeFigureOut">
               <a:rPr kumimoji="1" lang="ja-JP" altLang="en-US" smtClean="0"/>
-              <a:t>2026/10/2</a:t>
+              <a:t>2026/10/20</a:t>
             </a:fld>
             <a:endParaRPr kumimoji="1" lang="ja-JP" altLang="en-US"/>
           </a:p>
@@ -1375,7 +1375,7 @@
           <a:p>
             <a:fld id="{F4B6AA23-F6BB-FA47-96B5-569FAB187581}" type="datetimeFigureOut">
               <a:rPr kumimoji="1" lang="ja-JP" altLang="en-US" smtClean="0"/>
-              <a:t>2026/10/2</a:t>
+              <a:t>2026/10/20</a:t>
             </a:fld>
             <a:endParaRPr kumimoji="1" lang="ja-JP" altLang="en-US"/>
           </a:p>
@@ -1605,7 +1605,7 @@
           <a:p>
             <a:fld id="{F4B6AA23-F6BB-FA47-96B5-569FAB187581}" type="datetimeFigureOut">
               <a:rPr kumimoji="1" lang="ja-JP" altLang="en-US" smtClean="0"/>
-              <a:t>2026/10/2</a:t>
+              <a:t>2026/10/20</a:t>
             </a:fld>
             <a:endParaRPr kumimoji="1" lang="ja-JP" altLang="en-US"/>
           </a:p>
@@ -1880,7 +1880,7 @@
           <a:p>
             <a:fld id="{F4B6AA23-F6BB-FA47-96B5-569FAB187581}" type="datetimeFigureOut">
               <a:rPr kumimoji="1" lang="ja-JP" altLang="en-US" smtClean="0"/>
-              <a:t>2026/10/2</a:t>
+              <a:t>2026/10/20</a:t>
             </a:fld>
             <a:endParaRPr kumimoji="1" lang="ja-JP" altLang="en-US"/>
           </a:p>
@@ -2209,7 +2209,7 @@
           <a:p>
             <a:fld id="{F4B6AA23-F6BB-FA47-96B5-569FAB187581}" type="datetimeFigureOut">
               <a:rPr kumimoji="1" lang="ja-JP" altLang="en-US" smtClean="0"/>
-              <a:t>2026/10/2</a:t>
+              <a:t>2026/10/20</a:t>
             </a:fld>
             <a:endParaRPr kumimoji="1" lang="ja-JP" altLang="en-US"/>
           </a:p>
@@ -2685,7 +2685,7 @@
           <a:p>
             <a:fld id="{F4B6AA23-F6BB-FA47-96B5-569FAB187581}" type="datetimeFigureOut">
               <a:rPr kumimoji="1" lang="ja-JP" altLang="en-US" smtClean="0"/>
-              <a:t>2026/10/2</a:t>
+              <a:t>2026/10/20</a:t>
             </a:fld>
             <a:endParaRPr kumimoji="1" lang="ja-JP" altLang="en-US"/>
           </a:p>
@@ -2826,7 +2826,7 @@
           <a:p>
             <a:fld id="{F4B6AA23-F6BB-FA47-96B5-569FAB187581}" type="datetimeFigureOut">
               <a:rPr kumimoji="1" lang="ja-JP" altLang="en-US" smtClean="0"/>
-              <a:t>2026/10/2</a:t>
+              <a:t>2026/10/20</a:t>
             </a:fld>
             <a:endParaRPr kumimoji="1" lang="ja-JP" altLang="en-US"/>
           </a:p>
@@ -2939,7 +2939,7 @@
           <a:p>
             <a:fld id="{F4B6AA23-F6BB-FA47-96B5-569FAB187581}" type="datetimeFigureOut">
               <a:rPr kumimoji="1" lang="ja-JP" altLang="en-US" smtClean="0"/>
-              <a:t>2026/10/2</a:t>
+              <a:t>2026/10/20</a:t>
             </a:fld>
             <a:endParaRPr kumimoji="1" lang="ja-JP" altLang="en-US"/>
           </a:p>
@@ -3282,7 +3282,7 @@
           <a:p>
             <a:fld id="{F4B6AA23-F6BB-FA47-96B5-569FAB187581}" type="datetimeFigureOut">
               <a:rPr kumimoji="1" lang="ja-JP" altLang="en-US" smtClean="0"/>
-              <a:t>2026/10/2</a:t>
+              <a:t>2026/10/20</a:t>
             </a:fld>
             <a:endParaRPr kumimoji="1" lang="ja-JP" altLang="en-US"/>
           </a:p>
@@ -3570,7 +3570,7 @@
           <a:p>
             <a:fld id="{F4B6AA23-F6BB-FA47-96B5-569FAB187581}" type="datetimeFigureOut">
               <a:rPr kumimoji="1" lang="ja-JP" altLang="en-US" smtClean="0"/>
-              <a:t>2026/10/2</a:t>
+              <a:t>2026/10/20</a:t>
             </a:fld>
             <a:endParaRPr kumimoji="1" lang="ja-JP" altLang="en-US"/>
           </a:p>
@@ -3843,7 +3843,7 @@
           <a:p>
             <a:fld id="{F4B6AA23-F6BB-FA47-96B5-569FAB187581}" type="datetimeFigureOut">
               <a:rPr kumimoji="1" lang="ja-JP" altLang="en-US" smtClean="0"/>
-              <a:t>2026/10/2</a:t>
+              <a:t>2026/10/20</a:t>
             </a:fld>
             <a:endParaRPr kumimoji="1" lang="ja-JP" altLang="en-US"/>
           </a:p>
@@ -6844,8 +6844,8 @@
             </a:p>
           </p:txBody>
         </p:sp>
-        <mc:AlternateContent xmlns:mc="http://schemas.openxmlformats.org/markup-compatibility/2006">
-          <mc:Choice xmlns:a14="http://schemas.microsoft.com/office/drawing/2010/main" Requires="a14">
+        <mc:AlternateContent xmlns:mc="http://schemas.openxmlformats.org/markup-compatibility/2006" xmlns:a14="http://schemas.microsoft.com/office/drawing/2010/main">
+          <mc:Choice Requires="a14">
             <p:sp>
               <p:nvSpPr>
                 <p:cNvPr id="23" name="テキスト ボックス 22">
@@ -6938,7 +6938,7 @@
               </p:txBody>
             </p:sp>
           </mc:Choice>
-          <mc:Fallback>
+          <mc:Fallback xmlns="">
             <p:sp>
               <p:nvSpPr>
                 <p:cNvPr id="23" name="テキスト ボックス 22">
@@ -6983,8 +6983,8 @@
             </p:sp>
           </mc:Fallback>
         </mc:AlternateContent>
-        <mc:AlternateContent xmlns:mc="http://schemas.openxmlformats.org/markup-compatibility/2006">
-          <mc:Choice xmlns:a14="http://schemas.microsoft.com/office/drawing/2010/main" Requires="a14">
+        <mc:AlternateContent xmlns:mc="http://schemas.openxmlformats.org/markup-compatibility/2006" xmlns:a14="http://schemas.microsoft.com/office/drawing/2010/main">
+          <mc:Choice Requires="a14">
             <p:sp>
               <p:nvSpPr>
                 <p:cNvPr id="24" name="角丸四角形 23">
@@ -7320,7 +7320,7 @@
               </p:txBody>
             </p:sp>
           </mc:Choice>
-          <mc:Fallback>
+          <mc:Fallback xmlns="">
             <p:sp>
               <p:nvSpPr>
                 <p:cNvPr id="24" name="角丸四角形 23">
@@ -7366,8 +7366,8 @@
             </p:sp>
           </mc:Fallback>
         </mc:AlternateContent>
-        <mc:AlternateContent xmlns:mc="http://schemas.openxmlformats.org/markup-compatibility/2006">
-          <mc:Choice xmlns:a14="http://schemas.microsoft.com/office/drawing/2010/main" Requires="a14">
+        <mc:AlternateContent xmlns:mc="http://schemas.openxmlformats.org/markup-compatibility/2006" xmlns:a14="http://schemas.microsoft.com/office/drawing/2010/main">
+          <mc:Choice Requires="a14">
             <p:sp>
               <p:nvSpPr>
                 <p:cNvPr id="26" name="角丸四角形 25">
@@ -7683,7 +7683,7 @@
               </p:txBody>
             </p:sp>
           </mc:Choice>
-          <mc:Fallback>
+          <mc:Fallback xmlns="">
             <p:sp>
               <p:nvSpPr>
                 <p:cNvPr id="26" name="角丸四角形 25">
@@ -8052,8 +8052,8 @@
             </a:p>
           </p:txBody>
         </p:sp>
-        <mc:AlternateContent xmlns:mc="http://schemas.openxmlformats.org/markup-compatibility/2006">
-          <mc:Choice xmlns:a14="http://schemas.microsoft.com/office/drawing/2010/main" Requires="a14">
+        <mc:AlternateContent xmlns:mc="http://schemas.openxmlformats.org/markup-compatibility/2006" xmlns:a14="http://schemas.microsoft.com/office/drawing/2010/main">
+          <mc:Choice Requires="a14">
             <p:sp>
               <p:nvSpPr>
                 <p:cNvPr id="4" name="テキスト ボックス 3">
@@ -8130,7 +8130,7 @@
               </p:txBody>
             </p:sp>
           </mc:Choice>
-          <mc:Fallback>
+          <mc:Fallback xmlns="">
             <p:sp>
               <p:nvSpPr>
                 <p:cNvPr id="4" name="テキスト ボックス 3">
@@ -8175,8 +8175,8 @@
             </p:sp>
           </mc:Fallback>
         </mc:AlternateContent>
-        <mc:AlternateContent xmlns:mc="http://schemas.openxmlformats.org/markup-compatibility/2006">
-          <mc:Choice xmlns:a14="http://schemas.microsoft.com/office/drawing/2010/main" Requires="a14">
+        <mc:AlternateContent xmlns:mc="http://schemas.openxmlformats.org/markup-compatibility/2006" xmlns:a14="http://schemas.microsoft.com/office/drawing/2010/main">
+          <mc:Choice Requires="a14">
             <p:sp>
               <p:nvSpPr>
                 <p:cNvPr id="5" name="角丸四角形 4">
@@ -8261,6 +8261,7 @@
                   </a:endParaRPr>
                 </a:p>
                 <a:p>
+                  <a:pPr/>
                   <a14:m>
                     <m:oMathPara xmlns:m="http://schemas.openxmlformats.org/officeDocument/2006/math">
                       <m:oMath>
@@ -8371,7 +8372,7 @@
               </p:txBody>
             </p:sp>
           </mc:Choice>
-          <mc:Fallback>
+          <mc:Fallback xmlns="">
             <p:sp>
               <p:nvSpPr>
                 <p:cNvPr id="5" name="角丸四角形 4">
@@ -8417,8 +8418,8 @@
             </p:sp>
           </mc:Fallback>
         </mc:AlternateContent>
-        <mc:AlternateContent xmlns:mc="http://schemas.openxmlformats.org/markup-compatibility/2006">
-          <mc:Choice xmlns:a14="http://schemas.microsoft.com/office/drawing/2010/main" Requires="a14">
+        <mc:AlternateContent xmlns:mc="http://schemas.openxmlformats.org/markup-compatibility/2006" xmlns:a14="http://schemas.microsoft.com/office/drawing/2010/main">
+          <mc:Choice Requires="a14">
             <p:sp>
               <p:nvSpPr>
                 <p:cNvPr id="6" name="角丸四角形 5">
@@ -8503,6 +8504,7 @@
                   </a:endParaRPr>
                 </a:p>
                 <a:p>
+                  <a:pPr/>
                   <a14:m>
                     <m:oMathPara xmlns:m="http://schemas.openxmlformats.org/officeDocument/2006/math">
                       <m:oMath>
@@ -8613,7 +8615,7 @@
               </p:txBody>
             </p:sp>
           </mc:Choice>
-          <mc:Fallback>
+          <mc:Fallback xmlns="">
             <p:sp>
               <p:nvSpPr>
                 <p:cNvPr id="6" name="角丸四角形 5">
@@ -8659,8 +8661,8 @@
             </p:sp>
           </mc:Fallback>
         </mc:AlternateContent>
-        <mc:AlternateContent xmlns:mc="http://schemas.openxmlformats.org/markup-compatibility/2006">
-          <mc:Choice xmlns:a14="http://schemas.microsoft.com/office/drawing/2010/main" Requires="a14">
+        <mc:AlternateContent xmlns:mc="http://schemas.openxmlformats.org/markup-compatibility/2006" xmlns:a14="http://schemas.microsoft.com/office/drawing/2010/main">
+          <mc:Choice Requires="a14">
             <p:sp>
               <p:nvSpPr>
                 <p:cNvPr id="7" name="角丸四角形 6">
@@ -8745,6 +8747,7 @@
                   </a:endParaRPr>
                 </a:p>
                 <a:p>
+                  <a:pPr/>
                   <a14:m>
                     <m:oMathPara xmlns:m="http://schemas.openxmlformats.org/officeDocument/2006/math">
                       <m:oMath>
@@ -8855,7 +8858,7 @@
               </p:txBody>
             </p:sp>
           </mc:Choice>
-          <mc:Fallback>
+          <mc:Fallback xmlns="">
             <p:sp>
               <p:nvSpPr>
                 <p:cNvPr id="7" name="角丸四角形 6">
@@ -8901,8 +8904,8 @@
             </p:sp>
           </mc:Fallback>
         </mc:AlternateContent>
-        <mc:AlternateContent xmlns:mc="http://schemas.openxmlformats.org/markup-compatibility/2006">
-          <mc:Choice xmlns:a14="http://schemas.microsoft.com/office/drawing/2010/main" Requires="a14">
+        <mc:AlternateContent xmlns:mc="http://schemas.openxmlformats.org/markup-compatibility/2006" xmlns:a14="http://schemas.microsoft.com/office/drawing/2010/main">
+          <mc:Choice Requires="a14">
             <p:sp>
               <p:nvSpPr>
                 <p:cNvPr id="8" name="角丸四角形 7">
@@ -8987,6 +8990,7 @@
                   </a:endParaRPr>
                 </a:p>
                 <a:p>
+                  <a:pPr/>
                   <a14:m>
                     <m:oMathPara xmlns:m="http://schemas.openxmlformats.org/officeDocument/2006/math">
                       <m:oMath>
@@ -9097,7 +9101,7 @@
               </p:txBody>
             </p:sp>
           </mc:Choice>
-          <mc:Fallback>
+          <mc:Fallback xmlns="">
             <p:sp>
               <p:nvSpPr>
                 <p:cNvPr id="8" name="角丸四角形 7">
@@ -9143,8 +9147,8 @@
             </p:sp>
           </mc:Fallback>
         </mc:AlternateContent>
-        <mc:AlternateContent xmlns:mc="http://schemas.openxmlformats.org/markup-compatibility/2006">
-          <mc:Choice xmlns:a14="http://schemas.microsoft.com/office/drawing/2010/main" Requires="a14">
+        <mc:AlternateContent xmlns:mc="http://schemas.openxmlformats.org/markup-compatibility/2006" xmlns:a14="http://schemas.microsoft.com/office/drawing/2010/main">
+          <mc:Choice Requires="a14">
             <p:sp>
               <p:nvSpPr>
                 <p:cNvPr id="9" name="角丸四角形 8">
@@ -9229,6 +9233,7 @@
                   </a:endParaRPr>
                 </a:p>
                 <a:p>
+                  <a:pPr/>
                   <a14:m>
                     <m:oMathPara xmlns:m="http://schemas.openxmlformats.org/officeDocument/2006/math">
                       <m:oMath>
@@ -9339,7 +9344,7 @@
               </p:txBody>
             </p:sp>
           </mc:Choice>
-          <mc:Fallback>
+          <mc:Fallback xmlns="">
             <p:sp>
               <p:nvSpPr>
                 <p:cNvPr id="9" name="角丸四角形 8">
@@ -9896,8 +9901,8 @@
             </a:p>
           </p:txBody>
         </p:sp>
-        <mc:AlternateContent xmlns:mc="http://schemas.openxmlformats.org/markup-compatibility/2006">
-          <mc:Choice xmlns:a14="http://schemas.microsoft.com/office/drawing/2010/main" Requires="a14">
+        <mc:AlternateContent xmlns:mc="http://schemas.openxmlformats.org/markup-compatibility/2006" xmlns:a14="http://schemas.microsoft.com/office/drawing/2010/main">
+          <mc:Choice Requires="a14">
             <p:sp>
               <p:nvSpPr>
                 <p:cNvPr id="40" name="テキスト ボックス 39">
@@ -10018,7 +10023,7 @@
               </p:txBody>
             </p:sp>
           </mc:Choice>
-          <mc:Fallback>
+          <mc:Fallback xmlns="">
             <p:sp>
               <p:nvSpPr>
                 <p:cNvPr id="40" name="テキスト ボックス 39">
@@ -10232,7 +10237,6 @@
             </a:bodyPr>
             <a:lstStyle/>
             <a:p>
-              <a:pPr/>
               <a:r>
                 <a:rPr lang="ja-JP" altLang="en-US" sz="2800" b="1">
                   <a:latin typeface="Hiragino Sans W4" panose="020B0400000000000000" pitchFamily="34" charset="-128"/>
@@ -15886,10 +15890,10 @@
       </p:grpSpPr>
       <p:grpSp>
         <p:nvGrpSpPr>
-          <p:cNvPr id="25" name="グループ化 24">
+          <p:cNvPr id="8" name="グループ化 7">
             <a:extLst>
               <a:ext uri="{FF2B5EF4-FFF2-40B4-BE49-F238E27FC236}">
-                <a16:creationId xmlns:a16="http://schemas.microsoft.com/office/drawing/2014/main" id="{E20CE450-64BA-7374-CAC1-7B984523ED4A}"/>
+                <a16:creationId xmlns:a16="http://schemas.microsoft.com/office/drawing/2014/main" id="{BACBE3DB-D3DC-DB40-D5CE-D640DE7E5F18}"/>
               </a:ext>
             </a:extLst>
           </p:cNvPr>
@@ -15898,10 +15902,10 @@
         </p:nvGrpSpPr>
         <p:grpSpPr>
           <a:xfrm>
-            <a:off x="309386" y="172104"/>
-            <a:ext cx="11573228" cy="6513791"/>
-            <a:chOff x="82617" y="127349"/>
-            <a:chExt cx="11573228" cy="6513791"/>
+            <a:off x="0" y="355226"/>
+            <a:ext cx="12058884" cy="6405653"/>
+            <a:chOff x="0" y="355226"/>
+            <a:chExt cx="12058884" cy="6405653"/>
           </a:xfrm>
         </p:grpSpPr>
         <p:sp>
@@ -15918,7 +15922,7 @@
           </p:nvSpPr>
           <p:spPr>
             <a:xfrm>
-              <a:off x="4406746" y="561860"/>
+              <a:off x="4809785" y="789737"/>
               <a:ext cx="7249099" cy="5971142"/>
             </a:xfrm>
             <a:prstGeom prst="roundRect">
@@ -15968,7 +15972,7 @@
           </p:nvSpPr>
           <p:spPr>
             <a:xfrm>
-              <a:off x="6764355" y="782198"/>
+              <a:off x="7167394" y="1010075"/>
               <a:ext cx="2533880" cy="584775"/>
             </a:xfrm>
             <a:prstGeom prst="rect">
@@ -16011,7 +16015,7 @@
           </p:nvSpPr>
           <p:spPr>
             <a:xfrm>
-              <a:off x="5249534" y="1581626"/>
+              <a:off x="5652573" y="1809503"/>
               <a:ext cx="5563518" cy="954107"/>
             </a:xfrm>
             <a:prstGeom prst="rect">
@@ -16088,8 +16092,8 @@
             </a:p>
           </p:txBody>
         </p:sp>
-        <mc:AlternateContent xmlns:mc="http://schemas.openxmlformats.org/markup-compatibility/2006" xmlns:a14="http://schemas.microsoft.com/office/drawing/2010/main">
-          <mc:Choice Requires="a14">
+        <mc:AlternateContent xmlns:mc="http://schemas.openxmlformats.org/markup-compatibility/2006">
+          <mc:Choice xmlns:a14="http://schemas.microsoft.com/office/drawing/2010/main" Requires="a14">
             <p:sp>
               <p:nvSpPr>
                 <p:cNvPr id="6" name="テキスト ボックス 5">
@@ -16104,7 +16108,7 @@
               </p:nvSpPr>
               <p:spPr>
                 <a:xfrm>
-                  <a:off x="5087032" y="3174611"/>
+                  <a:off x="5490071" y="3402488"/>
                   <a:ext cx="5888517" cy="959493"/>
                 </a:xfrm>
                 <a:prstGeom prst="rect">
@@ -16460,7 +16464,7 @@
               </p:txBody>
             </p:sp>
           </mc:Choice>
-          <mc:Fallback xmlns="">
+          <mc:Fallback>
             <p:sp>
               <p:nvSpPr>
                 <p:cNvPr id="6" name="テキスト ボックス 5">
@@ -16477,7 +16481,7 @@
               </p:nvSpPr>
               <p:spPr>
                 <a:xfrm>
-                  <a:off x="5087032" y="3174611"/>
+                  <a:off x="5490071" y="3402488"/>
                   <a:ext cx="5888517" cy="959493"/>
                 </a:xfrm>
                 <a:prstGeom prst="rect">
@@ -16505,8 +16509,8 @@
             </p:sp>
           </mc:Fallback>
         </mc:AlternateContent>
-        <mc:AlternateContent xmlns:mc="http://schemas.openxmlformats.org/markup-compatibility/2006" xmlns:a14="http://schemas.microsoft.com/office/drawing/2010/main">
-          <mc:Choice Requires="a14">
+        <mc:AlternateContent xmlns:mc="http://schemas.openxmlformats.org/markup-compatibility/2006">
+          <mc:Choice xmlns:a14="http://schemas.microsoft.com/office/drawing/2010/main" Requires="a14">
             <p:sp>
               <p:nvSpPr>
                 <p:cNvPr id="9" name="テキスト ボックス 8">
@@ -16521,7 +16525,7 @@
               </p:nvSpPr>
               <p:spPr>
                 <a:xfrm>
-                  <a:off x="4982373" y="4772982"/>
+                  <a:off x="5385412" y="5000859"/>
                   <a:ext cx="6097836" cy="1384995"/>
                 </a:xfrm>
                 <a:prstGeom prst="rect">
@@ -16634,7 +16638,7 @@
               </p:txBody>
             </p:sp>
           </mc:Choice>
-          <mc:Fallback xmlns="">
+          <mc:Fallback>
             <p:sp>
               <p:nvSpPr>
                 <p:cNvPr id="9" name="テキスト ボックス 8">
@@ -16651,7 +16655,7 @@
               </p:nvSpPr>
               <p:spPr>
                 <a:xfrm>
-                  <a:off x="4982373" y="4772982"/>
+                  <a:off x="5385412" y="5000859"/>
                   <a:ext cx="6097836" cy="1384995"/>
                 </a:xfrm>
                 <a:prstGeom prst="rect">
@@ -16660,7 +16664,7 @@
                 <a:blipFill>
                   <a:blip r:embed="rId3"/>
                   <a:stretch>
-                    <a:fillRect t="-5455" b="-10909"/>
+                    <a:fillRect t="-5405" b="-9910"/>
                   </a:stretch>
                 </a:blipFill>
               </p:spPr>
@@ -16693,7 +16697,7 @@
           </p:nvSpPr>
           <p:spPr>
             <a:xfrm rot="5400000">
-              <a:off x="7692522" y="4123040"/>
+              <a:off x="8095561" y="4350917"/>
               <a:ext cx="677538" cy="666521"/>
             </a:xfrm>
             <a:prstGeom prst="mathEqual">
@@ -16749,7 +16753,7 @@
           </p:nvSpPr>
           <p:spPr>
             <a:xfrm rot="5400000">
-              <a:off x="7692523" y="2555411"/>
+              <a:off x="8095562" y="2783288"/>
               <a:ext cx="677538" cy="666521"/>
             </a:xfrm>
             <a:prstGeom prst="mathEqual">
@@ -16791,8 +16795,8 @@
             </a:p>
           </p:txBody>
         </p:sp>
-        <mc:AlternateContent xmlns:mc="http://schemas.openxmlformats.org/markup-compatibility/2006" xmlns:a14="http://schemas.microsoft.com/office/drawing/2010/main">
-          <mc:Choice Requires="a14">
+        <mc:AlternateContent xmlns:mc="http://schemas.openxmlformats.org/markup-compatibility/2006">
+          <mc:Choice xmlns:a14="http://schemas.microsoft.com/office/drawing/2010/main" Requires="a14">
             <p:sp>
               <p:nvSpPr>
                 <p:cNvPr id="12" name="角丸四角形 11">
@@ -16807,8 +16811,8 @@
               </p:nvSpPr>
               <p:spPr>
                 <a:xfrm>
-                  <a:off x="93632" y="127349"/>
-                  <a:ext cx="3018629" cy="869022"/>
+                  <a:off x="1109946" y="355226"/>
+                  <a:ext cx="2766155" cy="869022"/>
                 </a:xfrm>
                 <a:prstGeom prst="roundRect">
                   <a:avLst/>
@@ -17008,7 +17012,7 @@
               </p:txBody>
             </p:sp>
           </mc:Choice>
-          <mc:Fallback xmlns="">
+          <mc:Fallback>
             <p:sp>
               <p:nvSpPr>
                 <p:cNvPr id="12" name="角丸四角形 11">
@@ -17025,8 +17029,8 @@
               </p:nvSpPr>
               <p:spPr>
                 <a:xfrm>
-                  <a:off x="93632" y="127349"/>
-                  <a:ext cx="3018629" cy="869022"/>
+                  <a:off x="1109946" y="355226"/>
+                  <a:ext cx="2766155" cy="869022"/>
                 </a:xfrm>
                 <a:prstGeom prst="roundRect">
                   <a:avLst/>
@@ -17034,7 +17038,7 @@
                 <a:blipFill>
                   <a:blip r:embed="rId4"/>
                   <a:stretch>
-                    <a:fillRect l="-1245" t="-11111" b="-19444"/>
+                    <a:fillRect l="-901" t="-8333" b="-19444"/>
                   </a:stretch>
                 </a:blipFill>
                 <a:ln w="38100"/>
@@ -17054,8 +17058,8 @@
             </p:sp>
           </mc:Fallback>
         </mc:AlternateContent>
-        <mc:AlternateContent xmlns:mc="http://schemas.openxmlformats.org/markup-compatibility/2006" xmlns:a14="http://schemas.microsoft.com/office/drawing/2010/main">
-          <mc:Choice Requires="a14">
+        <mc:AlternateContent xmlns:mc="http://schemas.openxmlformats.org/markup-compatibility/2006">
+          <mc:Choice xmlns:a14="http://schemas.microsoft.com/office/drawing/2010/main" Requires="a14">
             <p:sp>
               <p:nvSpPr>
                 <p:cNvPr id="13" name="角丸四角形 12">
@@ -17070,8 +17074,8 @@
               </p:nvSpPr>
               <p:spPr>
                 <a:xfrm>
-                  <a:off x="93631" y="1201555"/>
-                  <a:ext cx="3018629" cy="869022"/>
+                  <a:off x="1109945" y="1429432"/>
+                  <a:ext cx="2766155" cy="869022"/>
                 </a:xfrm>
                 <a:prstGeom prst="roundRect">
                   <a:avLst/>
@@ -17271,7 +17275,7 @@
               </p:txBody>
             </p:sp>
           </mc:Choice>
-          <mc:Fallback xmlns="">
+          <mc:Fallback>
             <p:sp>
               <p:nvSpPr>
                 <p:cNvPr id="13" name="角丸四角形 12">
@@ -17288,8 +17292,8 @@
               </p:nvSpPr>
               <p:spPr>
                 <a:xfrm>
-                  <a:off x="93631" y="1201555"/>
-                  <a:ext cx="3018629" cy="869022"/>
+                  <a:off x="1109945" y="1429432"/>
+                  <a:ext cx="2766155" cy="869022"/>
                 </a:xfrm>
                 <a:prstGeom prst="roundRect">
                   <a:avLst/>
@@ -17297,7 +17301,7 @@
                 <a:blipFill>
                   <a:blip r:embed="rId5"/>
                   <a:stretch>
-                    <a:fillRect l="-1245" t="-8333" b="-19444"/>
+                    <a:fillRect l="-901" t="-8219" b="-17808"/>
                   </a:stretch>
                 </a:blipFill>
                 <a:ln w="38100"/>
@@ -17317,8 +17321,8 @@
             </p:sp>
           </mc:Fallback>
         </mc:AlternateContent>
-        <mc:AlternateContent xmlns:mc="http://schemas.openxmlformats.org/markup-compatibility/2006" xmlns:a14="http://schemas.microsoft.com/office/drawing/2010/main">
-          <mc:Choice Requires="a14">
+        <mc:AlternateContent xmlns:mc="http://schemas.openxmlformats.org/markup-compatibility/2006">
+          <mc:Choice xmlns:a14="http://schemas.microsoft.com/office/drawing/2010/main" Requires="a14">
             <p:sp>
               <p:nvSpPr>
                 <p:cNvPr id="14" name="角丸四角形 13">
@@ -17333,8 +17337,8 @@
               </p:nvSpPr>
               <p:spPr>
                 <a:xfrm>
-                  <a:off x="82617" y="2275761"/>
-                  <a:ext cx="3018629" cy="869022"/>
+                  <a:off x="1098931" y="2503638"/>
+                  <a:ext cx="2766155" cy="869022"/>
                 </a:xfrm>
                 <a:prstGeom prst="roundRect">
                   <a:avLst/>
@@ -17534,7 +17538,7 @@
               </p:txBody>
             </p:sp>
           </mc:Choice>
-          <mc:Fallback xmlns="">
+          <mc:Fallback>
             <p:sp>
               <p:nvSpPr>
                 <p:cNvPr id="14" name="角丸四角形 13">
@@ -17551,8 +17555,8 @@
               </p:nvSpPr>
               <p:spPr>
                 <a:xfrm>
-                  <a:off x="82617" y="2275761"/>
-                  <a:ext cx="3018629" cy="869022"/>
+                  <a:off x="1098931" y="2503638"/>
+                  <a:ext cx="2766155" cy="869022"/>
                 </a:xfrm>
                 <a:prstGeom prst="roundRect">
                   <a:avLst/>
@@ -17560,7 +17564,7 @@
                 <a:blipFill>
                   <a:blip r:embed="rId6"/>
                   <a:stretch>
-                    <a:fillRect l="-1245" t="-9722" b="-18056"/>
+                    <a:fillRect l="-901" t="-8333" b="-19444"/>
                   </a:stretch>
                 </a:blipFill>
                 <a:ln w="38100"/>
@@ -17580,8 +17584,8 @@
             </p:sp>
           </mc:Fallback>
         </mc:AlternateContent>
-        <mc:AlternateContent xmlns:mc="http://schemas.openxmlformats.org/markup-compatibility/2006" xmlns:a14="http://schemas.microsoft.com/office/drawing/2010/main">
-          <mc:Choice Requires="a14">
+        <mc:AlternateContent xmlns:mc="http://schemas.openxmlformats.org/markup-compatibility/2006">
+          <mc:Choice xmlns:a14="http://schemas.microsoft.com/office/drawing/2010/main" Requires="a14">
             <p:sp>
               <p:nvSpPr>
                 <p:cNvPr id="16" name="角丸四角形 15">
@@ -17596,8 +17600,8 @@
               </p:nvSpPr>
               <p:spPr>
                 <a:xfrm>
-                  <a:off x="82617" y="3346724"/>
-                  <a:ext cx="3018629" cy="985655"/>
+                  <a:off x="1098931" y="3574601"/>
+                  <a:ext cx="2766155" cy="985655"/>
                 </a:xfrm>
                 <a:prstGeom prst="roundRect">
                   <a:avLst/>
@@ -17797,7 +17801,7 @@
               </p:txBody>
             </p:sp>
           </mc:Choice>
-          <mc:Fallback xmlns="">
+          <mc:Fallback>
             <p:sp>
               <p:nvSpPr>
                 <p:cNvPr id="16" name="角丸四角形 15">
@@ -17814,8 +17818,8 @@
               </p:nvSpPr>
               <p:spPr>
                 <a:xfrm>
-                  <a:off x="82617" y="3346724"/>
-                  <a:ext cx="3018629" cy="985655"/>
+                  <a:off x="1098931" y="3574601"/>
+                  <a:ext cx="2766155" cy="985655"/>
                 </a:xfrm>
                 <a:prstGeom prst="roundRect">
                   <a:avLst/>
@@ -17823,7 +17827,7 @@
                 <a:blipFill>
                   <a:blip r:embed="rId7"/>
                   <a:stretch>
-                    <a:fillRect l="-1245" t="-2439" b="-9756"/>
+                    <a:fillRect l="-901" t="-2439" b="-10976"/>
                   </a:stretch>
                 </a:blipFill>
                 <a:ln w="38100"/>
@@ -17843,8 +17847,8 @@
             </p:sp>
           </mc:Fallback>
         </mc:AlternateContent>
-        <mc:AlternateContent xmlns:mc="http://schemas.openxmlformats.org/markup-compatibility/2006" xmlns:a14="http://schemas.microsoft.com/office/drawing/2010/main">
-          <mc:Choice Requires="a14">
+        <mc:AlternateContent xmlns:mc="http://schemas.openxmlformats.org/markup-compatibility/2006">
+          <mc:Choice xmlns:a14="http://schemas.microsoft.com/office/drawing/2010/main" Requires="a14">
             <p:sp>
               <p:nvSpPr>
                 <p:cNvPr id="17" name="角丸四角形 16">
@@ -17859,8 +17863,8 @@
               </p:nvSpPr>
               <p:spPr>
                 <a:xfrm>
-                  <a:off x="93631" y="4534320"/>
-                  <a:ext cx="3018629" cy="985655"/>
+                  <a:off x="1109945" y="4762197"/>
+                  <a:ext cx="2766155" cy="985655"/>
                 </a:xfrm>
                 <a:prstGeom prst="roundRect">
                   <a:avLst/>
@@ -18060,7 +18064,7 @@
               </p:txBody>
             </p:sp>
           </mc:Choice>
-          <mc:Fallback xmlns="">
+          <mc:Fallback>
             <p:sp>
               <p:nvSpPr>
                 <p:cNvPr id="17" name="角丸四角形 16">
@@ -18077,8 +18081,8 @@
               </p:nvSpPr>
               <p:spPr>
                 <a:xfrm>
-                  <a:off x="93631" y="4534320"/>
-                  <a:ext cx="3018629" cy="985655"/>
+                  <a:off x="1109945" y="4762197"/>
+                  <a:ext cx="2766155" cy="985655"/>
                 </a:xfrm>
                 <a:prstGeom prst="roundRect">
                   <a:avLst/>
@@ -18086,7 +18090,7 @@
                 <a:blipFill>
                   <a:blip r:embed="rId8"/>
                   <a:stretch>
-                    <a:fillRect l="-1245" t="-2469" b="-11111"/>
+                    <a:fillRect l="-901" t="-2439" b="-9756"/>
                   </a:stretch>
                 </a:blipFill>
                 <a:ln w="38100"/>
@@ -18120,7 +18124,7 @@
           </p:nvSpPr>
           <p:spPr>
             <a:xfrm rot="5400000">
-              <a:off x="1157149" y="5733680"/>
+              <a:off x="2036212" y="5731983"/>
               <a:ext cx="891591" cy="923330"/>
             </a:xfrm>
             <a:prstGeom prst="rect">
@@ -18162,8 +18166,8 @@
           </p:nvSpPr>
           <p:spPr>
             <a:xfrm flipH="1">
-              <a:off x="3261904" y="283684"/>
-              <a:ext cx="1029161" cy="556352"/>
+              <a:off x="3899970" y="511561"/>
+              <a:ext cx="794133" cy="556352"/>
             </a:xfrm>
             <a:prstGeom prst="rightArrow">
               <a:avLst/>
@@ -18214,8 +18218,8 @@
           </p:nvSpPr>
           <p:spPr>
             <a:xfrm flipH="1">
-              <a:off x="3261904" y="1357890"/>
-              <a:ext cx="1029161" cy="556352"/>
+              <a:off x="3899970" y="1585767"/>
+              <a:ext cx="794133" cy="556352"/>
             </a:xfrm>
             <a:prstGeom prst="rightArrow">
               <a:avLst/>
@@ -18266,8 +18270,8 @@
           </p:nvSpPr>
           <p:spPr>
             <a:xfrm flipH="1">
-              <a:off x="3239415" y="2432096"/>
-              <a:ext cx="1029161" cy="556352"/>
+              <a:off x="3877481" y="2659973"/>
+              <a:ext cx="794133" cy="556352"/>
             </a:xfrm>
             <a:prstGeom prst="rightArrow">
               <a:avLst/>
@@ -18318,8 +18322,8 @@
           </p:nvSpPr>
           <p:spPr>
             <a:xfrm flipH="1">
-              <a:off x="3261904" y="3547431"/>
-              <a:ext cx="1029161" cy="556352"/>
+              <a:off x="3899970" y="3775308"/>
+              <a:ext cx="794133" cy="556352"/>
             </a:xfrm>
             <a:prstGeom prst="rightArrow">
               <a:avLst/>
@@ -18370,8 +18374,8 @@
           </p:nvSpPr>
           <p:spPr>
             <a:xfrm flipH="1">
-              <a:off x="3261903" y="4748971"/>
-              <a:ext cx="1029161" cy="556352"/>
+              <a:off x="3899969" y="4976848"/>
+              <a:ext cx="794133" cy="556352"/>
             </a:xfrm>
             <a:prstGeom prst="rightArrow">
               <a:avLst/>
@@ -18405,6 +18409,97 @@
             <a:p>
               <a:pPr algn="ctr"/>
               <a:endParaRPr kumimoji="1" lang="ja-JP" altLang="en-US"/>
+            </a:p>
+          </p:txBody>
+        </p:sp>
+        <p:sp>
+          <p:nvSpPr>
+            <p:cNvPr id="5" name="左中かっこ 4">
+              <a:extLst>
+                <a:ext uri="{FF2B5EF4-FFF2-40B4-BE49-F238E27FC236}">
+                  <a16:creationId xmlns:a16="http://schemas.microsoft.com/office/drawing/2014/main" id="{7525696C-A4ED-7558-7DD1-EBFAECE297CF}"/>
+                </a:ext>
+              </a:extLst>
+            </p:cNvPr>
+            <p:cNvSpPr/>
+            <p:nvPr/>
+          </p:nvSpPr>
+          <p:spPr>
+            <a:xfrm>
+              <a:off x="532940" y="370595"/>
+              <a:ext cx="473725" cy="6268849"/>
+            </a:xfrm>
+            <a:prstGeom prst="leftBrace">
+              <a:avLst/>
+            </a:prstGeom>
+            <a:ln w="38100"/>
+          </p:spPr>
+          <p:style>
+            <a:lnRef idx="2">
+              <a:schemeClr val="dk1"/>
+            </a:lnRef>
+            <a:fillRef idx="0">
+              <a:schemeClr val="dk1"/>
+            </a:fillRef>
+            <a:effectRef idx="1">
+              <a:schemeClr val="dk1"/>
+            </a:effectRef>
+            <a:fontRef idx="minor">
+              <a:schemeClr val="tx1"/>
+            </a:fontRef>
+          </p:style>
+          <p:txBody>
+            <a:bodyPr rtlCol="0" anchor="ctr"/>
+            <a:lstStyle/>
+            <a:p>
+              <a:pPr algn="ctr"/>
+              <a:endParaRPr kumimoji="1" lang="ja-JP" altLang="en-US"/>
+            </a:p>
+          </p:txBody>
+        </p:sp>
+        <p:sp>
+          <p:nvSpPr>
+            <p:cNvPr id="7" name="テキスト ボックス 6">
+              <a:extLst>
+                <a:ext uri="{FF2B5EF4-FFF2-40B4-BE49-F238E27FC236}">
+                  <a16:creationId xmlns:a16="http://schemas.microsoft.com/office/drawing/2014/main" id="{0B2E27F2-7C6B-E0BE-F98F-98290F73AA85}"/>
+                </a:ext>
+              </a:extLst>
+            </p:cNvPr>
+            <p:cNvSpPr txBox="1"/>
+            <p:nvPr/>
+          </p:nvSpPr>
+          <p:spPr>
+            <a:xfrm>
+              <a:off x="0" y="2659973"/>
+              <a:ext cx="553998" cy="1796645"/>
+            </a:xfrm>
+            <a:prstGeom prst="rect">
+              <a:avLst/>
+            </a:prstGeom>
+            <a:solidFill>
+              <a:schemeClr val="bg1"/>
+            </a:solidFill>
+            <a:ln w="28575">
+              <a:solidFill>
+                <a:schemeClr val="tx1"/>
+              </a:solidFill>
+            </a:ln>
+          </p:spPr>
+          <p:txBody>
+            <a:bodyPr vert="eaVert" wrap="square" rtlCol="0">
+              <a:spAutoFit/>
+            </a:bodyPr>
+            <a:lstStyle/>
+            <a:p>
+              <a:pPr algn="ctr"/>
+              <a:r>
+                <a:rPr kumimoji="1" lang="ja-JP" altLang="en-US" sz="2400" b="1">
+                  <a:latin typeface="Hiragino Sans W8" panose="020B0400000000000000" pitchFamily="34" charset="-128"/>
+                  <a:ea typeface="Hiragino Sans W8" panose="020B0400000000000000" pitchFamily="34" charset="-128"/>
+                </a:rPr>
+                <a:t>正規分布</a:t>
+              </a:r>
             </a:p>
           </p:txBody>
         </p:sp>
@@ -19277,8 +19372,8 @@
             </p:sp>
           </mc:Fallback>
         </mc:AlternateContent>
-        <mc:AlternateContent xmlns:mc="http://schemas.openxmlformats.org/markup-compatibility/2006" xmlns:a14="http://schemas.microsoft.com/office/drawing/2010/main">
-          <mc:Choice Requires="a14">
+        <mc:AlternateContent xmlns:mc="http://schemas.openxmlformats.org/markup-compatibility/2006">
+          <mc:Choice xmlns:a14="http://schemas.microsoft.com/office/drawing/2010/main" Requires="a14">
             <p:sp>
               <p:nvSpPr>
                 <p:cNvPr id="10" name="テキスト ボックス 9">
@@ -19293,8 +19388,8 @@
               </p:nvSpPr>
               <p:spPr>
                 <a:xfrm>
-                  <a:off x="5633291" y="1023970"/>
-                  <a:ext cx="1627369" cy="646331"/>
+                  <a:off x="5057816" y="1023970"/>
+                  <a:ext cx="2778325" cy="633571"/>
                 </a:xfrm>
                 <a:prstGeom prst="rect">
                   <a:avLst/>
@@ -19309,52 +19404,67 @@
                 <a:p>
                   <a:pPr algn="ctr"/>
                   <a14:m>
-                    <m:oMathPara xmlns:m="http://schemas.openxmlformats.org/officeDocument/2006/math">
-                      <m:oMath>
-                        <m:sSub>
-                          <m:sSubPr>
-                            <m:ctrlPr>
-                              <a:rPr kumimoji="1" lang="en-US" altLang="ja-JP" sz="3600" b="0" i="1" smtClean="0">
-                                <a:latin typeface="Cambria Math" panose="02040503050406030204" pitchFamily="18" charset="0"/>
-                                <a:ea typeface="Hiragino Sans W4" panose="020B0400000000000000" pitchFamily="34" charset="-128"/>
-                              </a:rPr>
-                            </m:ctrlPr>
-                          </m:sSubPr>
-                          <m:e>
-                            <m:r>
-                              <a:rPr kumimoji="1" lang="en-US" altLang="ja-JP" sz="3600" b="0" i="1" smtClean="0">
-                                <a:latin typeface="Cambria Math" panose="02040503050406030204" pitchFamily="18" charset="0"/>
-                                <a:ea typeface="Hiragino Sans W4" panose="020B0400000000000000" pitchFamily="34" charset="-128"/>
-                              </a:rPr>
-                              <m:t>𝛽</m:t>
-                            </m:r>
-                          </m:e>
-                          <m:sub>
-                            <m:r>
-                              <a:rPr kumimoji="1" lang="en-US" altLang="ja-JP" sz="3600" b="0" i="1" smtClean="0">
-                                <a:latin typeface="Cambria Math" panose="02040503050406030204" pitchFamily="18" charset="0"/>
-                                <a:ea typeface="Hiragino Sans W4" panose="020B0400000000000000" pitchFamily="34" charset="-128"/>
-                              </a:rPr>
-                              <m:t>1</m:t>
-                            </m:r>
-                          </m:sub>
-                        </m:sSub>
-                        <m:r>
-                          <a:rPr kumimoji="1" lang="en-US" altLang="ja-JP" sz="3600" b="0" i="1" smtClean="0">
-                            <a:latin typeface="Cambria Math" panose="02040503050406030204" pitchFamily="18" charset="0"/>
-                            <a:ea typeface="Hiragino Sans W4" panose="020B0400000000000000" pitchFamily="34" charset="-128"/>
-                          </a:rPr>
-                          <m:t>=0</m:t>
-                        </m:r>
-                      </m:oMath>
-                    </m:oMathPara>
+                    <m:oMath xmlns:m="http://schemas.openxmlformats.org/officeDocument/2006/math">
+                      <m:sSub>
+                        <m:sSubPr>
+                          <m:ctrlPr>
+                            <a:rPr kumimoji="1" lang="en-US" altLang="ja-JP" sz="3600" b="0" i="1" smtClean="0">
+                              <a:latin typeface="Cambria Math" panose="02040503050406030204" pitchFamily="18" charset="0"/>
+                              <a:ea typeface="Hiragino Sans W4" panose="020B0400000000000000" pitchFamily="34" charset="-128"/>
+                            </a:rPr>
+                          </m:ctrlPr>
+                        </m:sSubPr>
+                        <m:e>
+                          <m:r>
+                            <a:rPr kumimoji="1" lang="en-US" altLang="ja-JP" sz="3600" b="0" i="1" smtClean="0">
+                              <a:latin typeface="Cambria Math" panose="02040503050406030204" pitchFamily="18" charset="0"/>
+                              <a:ea typeface="Hiragino Sans W4" panose="020B0400000000000000" pitchFamily="34" charset="-128"/>
+                            </a:rPr>
+                            <m:t>𝛽</m:t>
+                          </m:r>
+                        </m:e>
+                        <m:sub>
+                          <m:r>
+                            <a:rPr kumimoji="1" lang="en-US" altLang="ja-JP" sz="3600" b="0" i="1" smtClean="0">
+                              <a:latin typeface="Cambria Math" panose="02040503050406030204" pitchFamily="18" charset="0"/>
+                              <a:ea typeface="Hiragino Sans W4" panose="020B0400000000000000" pitchFamily="34" charset="-128"/>
+                            </a:rPr>
+                            <m:t>1</m:t>
+                          </m:r>
+                        </m:sub>
+                      </m:sSub>
+                      <m:r>
+                        <a:rPr kumimoji="1" lang="en-US" altLang="ja-JP" sz="3600" b="0" i="1" smtClean="0">
+                          <a:latin typeface="Cambria Math" panose="02040503050406030204" pitchFamily="18" charset="0"/>
+                          <a:ea typeface="Hiragino Sans W4" panose="020B0400000000000000" pitchFamily="34" charset="-128"/>
+                        </a:rPr>
+                        <m:t>=0</m:t>
+                      </m:r>
+                    </m:oMath>
                   </a14:m>
-                  <a:endParaRPr dirty="0"/>
+                  <a:r>
+                    <a:rPr lang="ja-JP" altLang="en-US" sz="2000" dirty="0">
+                      <a:latin typeface="Hiragino Sans W4" panose="020B0400000000000000" pitchFamily="34" charset="-128"/>
+                      <a:ea typeface="Hiragino Sans W4" panose="020B0400000000000000" pitchFamily="34" charset="-128"/>
+                    </a:rPr>
+                    <a:t>（真</a:t>
+                  </a:r>
+                  <a:r>
+                    <a:rPr lang="ja-JP" altLang="en-US" sz="2000">
+                      <a:latin typeface="Hiragino Sans W4" panose="020B0400000000000000" pitchFamily="34" charset="-128"/>
+                      <a:ea typeface="Hiragino Sans W4" panose="020B0400000000000000" pitchFamily="34" charset="-128"/>
+                    </a:rPr>
+                    <a:t>の値）</a:t>
+                  </a:r>
+                  <a:endParaRPr dirty="0">
+                    <a:latin typeface="Hiragino Sans W4" panose="020B0400000000000000" pitchFamily="34" charset="-128"/>
+                    <a:ea typeface="Hiragino Sans W4" panose="020B0400000000000000" pitchFamily="34" charset="-128"/>
+                  </a:endParaRPr>
                 </a:p>
               </p:txBody>
             </p:sp>
           </mc:Choice>
-          <mc:Fallback xmlns="">
+          <mc:Fallback>
             <p:sp>
               <p:nvSpPr>
                 <p:cNvPr id="10" name="テキスト ボックス 9">
@@ -19371,8 +19481,8 @@
               </p:nvSpPr>
               <p:spPr>
                 <a:xfrm>
-                  <a:off x="5633291" y="1023970"/>
-                  <a:ext cx="1627369" cy="646331"/>
+                  <a:off x="5057816" y="1023970"/>
+                  <a:ext cx="2778325" cy="633571"/>
                 </a:xfrm>
                 <a:prstGeom prst="rect">
                   <a:avLst/>
@@ -19380,7 +19490,7 @@
                 <a:blipFill>
                   <a:blip r:embed="rId7"/>
                   <a:stretch>
-                    <a:fillRect l="-6977" b="-21154"/>
+                    <a:fillRect l="-4110" r="-2283" b="-25490"/>
                   </a:stretch>
                 </a:blipFill>
               </p:spPr>
@@ -19416,8 +19526,8 @@
           </p:nvCxnSpPr>
           <p:spPr>
             <a:xfrm flipH="1">
-              <a:off x="6446975" y="1670301"/>
-              <a:ext cx="1" cy="536551"/>
+              <a:off x="6446975" y="1657541"/>
+              <a:ext cx="4" cy="549311"/>
             </a:xfrm>
             <a:prstGeom prst="straightConnector1">
               <a:avLst/>
